--- a/lecons/LSA/Meteorology/01_LSA_MET_L01_The_Meaning_and_Composition_of_the_Atmosphere.pptx
+++ b/lecons/LSA/Meteorology/01_LSA_MET_L01_The_Meaning_and_Composition_of_the_Atmosphere.pptx
@@ -64,9 +64,11 @@
     <p:sldId id="312" r:id="rId58"/>
     <p:sldId id="313" r:id="rId59"/>
     <p:sldId id="314" r:id="rId60"/>
+    <p:sldId id="315" r:id="rId61"/>
+    <p:sldId id="316" r:id="rId62"/>
   </p:sldIdLst>
   <p:notesMasterIdLst>
-    <p:notesMasterId r:id="rId61"/>
+    <p:notesMasterId r:id="rId63"/>
   </p:notesMasterIdLst>
   <p:sldSz cx="12192000" cy="6858000"/>
   <p:notesSz cx="6858000" cy="12192000"/>
@@ -3112,7 +3114,7 @@
           <a:p>
             <a:r>
               <a:rPr lang="en-US" dirty="0"/>
-              <a:t>Let us copy Meaning and Importance of the Atmosphere. The atmosphere is important for the following reasons. Copy the point on A protective blanket on the left, then draw the diagram on the right: the atmosphere seen from space. Give it a title and label it clearly.</a:t>
+              <a:t>Let us copy Meaning of the Atmosphere. The atmosphere is explained as follows. Copy the point on The atmosphere on the left, then draw the diagram on the right: the atmosphere seen from space. Give it a title and label it clearly.</a:t>
             </a:r>
             <a:endParaRPr lang="en-US" dirty="0"/>
           </a:p>
@@ -3200,7 +3202,7 @@
           <a:p>
             <a:r>
               <a:rPr lang="en-US" dirty="0"/>
-              <a:t>We continue with Meaning and Importance of the Atmosphere. On this slide we have Temperature control, Life and Weather. Write each point on a new line, with the key term first, and explain it in your own words when we revise.</a:t>
+              <a:t>Let us copy Constant Gases. The constant gases of the atmosphere are the following. Copy the point on Nitrogen (about 78 %) on the left, then draw the diagram on the right: the gases of the atmosphere. Give it a title and label it clearly.</a:t>
             </a:r>
             <a:endParaRPr lang="en-US" dirty="0"/>
           </a:p>
@@ -3288,7 +3290,7 @@
           <a:p>
             <a:r>
               <a:rPr lang="en-US" dirty="0"/>
-              <a:t>Let us copy The Gaseous Components. The gases of the atmosphere are the following. Copy the point on Nitrogen (about 78 %) on the left, then draw the diagram on the right: the gases of the air. Give it a title and label it clearly.</a:t>
+              <a:t>We continue with Constant Gases. Copy the point on Oxygen (about 21 %): write the key term first, then its explanation.</a:t>
             </a:r>
             <a:endParaRPr lang="en-US" dirty="0"/>
           </a:p>
@@ -3376,7 +3378,7 @@
           <a:p>
             <a:r>
               <a:rPr lang="en-US" dirty="0"/>
-              <a:t>We continue with The Gaseous Components. On this slide we have Oxygen (about 21 %) and Argon (about 0.9 %). Write each point on a new line, with the key term first, and explain it in your own words when we revise.</a:t>
+              <a:t>We continue with Constant Gases. Copy the point on Argon (about 0.9 %): write the key term first, then its explanation.</a:t>
             </a:r>
             <a:endParaRPr lang="en-US" dirty="0"/>
           </a:p>
@@ -3552,7 +3554,7 @@
           <a:p>
             <a:r>
               <a:rPr lang="en-US" dirty="0"/>
-              <a:t>Copy the point on Water vapour (0–4 %) on the left, then draw the diagram on the right: constant and variable gases. Give it a title and label it clearly.</a:t>
+              <a:t>Let us copy Variable Gases. The variable gases of the atmosphere are the following. Copy the point on Water vapour (0 to 4 %) on the left, then draw the diagram on the right: constant and variable gases. Give it a title and label it clearly.</a:t>
             </a:r>
             <a:endParaRPr lang="en-US" dirty="0"/>
           </a:p>
@@ -3640,7 +3642,7 @@
           <a:p>
             <a:r>
               <a:rPr lang="en-US" dirty="0"/>
-              <a:t>We continue with The Gaseous Components. On this slide we have Other variable gases. Write each point on a new line, with the key term first, and explain it in your own words when we revise. When you finish, we go to the next slide.</a:t>
+              <a:t>We continue with Variable Gases. Copy the point on Carbon dioxide (about 0.04 %): write the key term first, then its explanation.</a:t>
             </a:r>
             <a:endParaRPr lang="en-US" dirty="0"/>
           </a:p>
@@ -3728,7 +3730,7 @@
           <a:p>
             <a:r>
               <a:rPr lang="en-US" dirty="0"/>
-              <a:t>We continue with The Gaseous Components. Copy this carefully.</a:t>
+              <a:t>We continue with Variable Gases. Copy the point on Methane: write the key term first, then its explanation.</a:t>
             </a:r>
             <a:endParaRPr lang="en-US" dirty="0"/>
           </a:p>
@@ -3816,7 +3818,7 @@
           <a:p>
             <a:r>
               <a:rPr lang="en-US" dirty="0"/>
-              <a:t>Let us copy Aerosols (Particulates). The aerosols of the atmosphere are the following. Copy the point on Liquid aerosols on the left, then draw the diagram on the right: fog. Give it a title and label it clearly.</a:t>
+              <a:t>We continue with Variable Gases. Copy the point on Ozone: write the key term first, then its explanation.</a:t>
             </a:r>
             <a:endParaRPr lang="en-US" dirty="0"/>
           </a:p>
@@ -3904,7 +3906,7 @@
           <a:p>
             <a:r>
               <a:rPr lang="en-US" dirty="0"/>
-              <a:t>We continue with Aerosols (Particulates). On this slide we have Solid aerosols. Write each point on a new line, with the key term first, and explain it in your own words when we revise. When you finish, we go to the next slide.</a:t>
+              <a:t>Let us copy Liquid Aerosols. The liquid aerosols of the atmosphere are the following. Copy the point on Water droplets on the left, then draw the diagram on the right: fog. Give it a title and label it clearly.</a:t>
             </a:r>
             <a:endParaRPr lang="en-US" dirty="0"/>
           </a:p>
@@ -3992,7 +3994,7 @@
           <a:p>
             <a:r>
               <a:rPr lang="en-US" dirty="0"/>
-              <a:t>We continue with Aerosols (Particulates). Copy this carefully.</a:t>
+              <a:t>We continue with Liquid Aerosols. Copy the point on Acid droplets: write the key term first, then its explanation.</a:t>
             </a:r>
             <a:endParaRPr lang="en-US" dirty="0"/>
           </a:p>
@@ -4080,7 +4082,7 @@
           <a:p>
             <a:r>
               <a:rPr lang="en-US" dirty="0"/>
-              <a:t>Copy the point on Harmattan haze on the left, then draw the diagram on the right: dust in the air. Give it a title and label it clearly.</a:t>
+              <a:t>Let us copy Solid Aerosols. The solid aerosols of the atmosphere are the following. Copy the point on Dust on the left, then draw the diagram on the right: a dust storm. Give it a title and label it clearly.</a:t>
             </a:r>
             <a:endParaRPr lang="en-US" dirty="0"/>
           </a:p>
@@ -4168,7 +4170,7 @@
           <a:p>
             <a:r>
               <a:rPr lang="en-US" dirty="0"/>
-              <a:t>We continue with Aerosols (Particulates). On this slide we have Role in weather. Write each point on a new line, with the key term first, and explain it in your own words when we revise.</a:t>
+              <a:t>We continue with Solid Aerosols. Copy the point on Sea salt: write the key term first, then its explanation.</a:t>
             </a:r>
             <a:endParaRPr lang="en-US" dirty="0"/>
           </a:p>
@@ -4256,7 +4258,7 @@
           <a:p>
             <a:r>
               <a:rPr lang="en-US" dirty="0"/>
-              <a:t>Now let us check what you have understood. Question 1: Distinguish a constant gas from a variable gas with one example each. Answer in your exercise book.</a:t>
+              <a:t>Copy the point on Smoke, soot and ash on the left, then draw the diagram on the right: smoke from a fire. Give it a title and label it clearly.</a:t>
             </a:r>
             <a:endParaRPr lang="en-US" dirty="0"/>
           </a:p>
@@ -4344,7 +4346,7 @@
           <a:p>
             <a:r>
               <a:rPr lang="en-US" dirty="0"/>
-              <a:t>The expected answer is: a constant gas keeps the same proportion everywhere (oxygen); a variable gas changes in amount (water vapour). If you got it right, well done.</a:t>
+              <a:t>We continue with Solid Aerosols. Copy the point on Pollen and spores: write the key term first, then its explanation.</a:t>
             </a:r>
             <a:endParaRPr lang="en-US" dirty="0"/>
           </a:p>
@@ -4520,7 +4522,7 @@
           <a:p>
             <a:r>
               <a:rPr lang="en-US" dirty="0"/>
-              <a:t>Now let us check what you have understood. Question 2: Why are aerosols important in the formation of clouds? Answer in your exercise book.</a:t>
+              <a:t>Now let us check what you have understood. Question 1: Distinguish a constant gas from a variable gas with one example each. Answer in your exercise book.</a:t>
             </a:r>
             <a:endParaRPr lang="en-US" dirty="0"/>
           </a:p>
@@ -4608,7 +4610,7 @@
           <a:p>
             <a:r>
               <a:rPr lang="en-US" dirty="0"/>
-              <a:t>The expected answer is: water vapour condenses on them; they act as condensation nuclei. If you got it right, well done.</a:t>
+              <a:t>The expected answer is: a constant gas keeps the same proportion everywhere (oxygen); a variable gas changes in amount (water vapour). If you got it right, well done.</a:t>
             </a:r>
             <a:endParaRPr lang="en-US" dirty="0"/>
           </a:p>
@@ -4696,7 +4698,7 @@
           <a:p>
             <a:r>
               <a:rPr lang="en-US" dirty="0"/>
-              <a:t>For those who need more practice, fill in the blanks in your exercise book. The answers are: number 1, 78; number 2, ultraviolet; number 3, solid.</a:t>
+              <a:t>Now let us check what you have understood. Question 2: Why are aerosols important in the formation of clouds? Answer in your exercise book.</a:t>
             </a:r>
             <a:endParaRPr lang="en-US" dirty="0"/>
           </a:p>
@@ -4784,7 +4786,7 @@
           <a:p>
             <a:r>
               <a:rPr lang="en-US" dirty="0"/>
-              <a:t>For your homework: Name the four layers of the atmosphere. We shall correct it at the beginning of our next lesson.</a:t>
+              <a:t>The expected answer is: water vapour condenses on them; they act as condensation nuclei. If you got it right, well done.</a:t>
             </a:r>
             <a:endParaRPr lang="en-US" dirty="0"/>
           </a:p>
@@ -4872,7 +4874,7 @@
           <a:p>
             <a:r>
               <a:rPr lang="en-US" dirty="0"/>
-              <a:t>Our next lesson will be on Lesson 2: Structure of the Atmosphere. Thank you for your attention, and see you next time.</a:t>
+              <a:t>For those who need more practice, fill in the blanks in your exercise book. The answers are: number 1, 78; number 2, ultraviolet; number 3, solid.</a:t>
             </a:r>
             <a:endParaRPr lang="en-US" dirty="0"/>
           </a:p>
@@ -4960,7 +4962,7 @@
           <a:p>
             <a:r>
               <a:rPr lang="en-US" dirty="0"/>
-              <a:t>Let us play the bilingual game. I say a word in English, and you give me the French word. Then we do the reverse.</a:t>
+              <a:t>For your homework: Name the four layers of the atmosphere. We shall correct it at the beginning of our next lesson.</a:t>
             </a:r>
             <a:endParaRPr lang="en-US" dirty="0"/>
           </a:p>
@@ -5048,7 +5050,7 @@
           <a:p>
             <a:r>
               <a:rPr lang="en-US" dirty="0"/>
-              <a:t>I record this information in the official logbook of the class after the lesson.</a:t>
+              <a:t>Our next lesson will be on Lesson 2: Structure of the Atmosphere. Thank you for your attention, and see you next time.</a:t>
             </a:r>
             <a:endParaRPr lang="en-US" dirty="0"/>
           </a:p>
@@ -5136,7 +5138,7 @@
           <a:p>
             <a:r>
               <a:rPr lang="en-US" dirty="0"/>
-              <a:t>I complete the second page of the logbook: the matter taught, the evaluation, the homework and the attendance.</a:t>
+              <a:t>Let us play the bilingual game. I say a word in English, and you give me the French word. Then we do the reverse.</a:t>
             </a:r>
             <a:endParaRPr lang="en-US" dirty="0"/>
           </a:p>
@@ -5224,7 +5226,7 @@
           <a:p>
             <a:r>
               <a:rPr lang="en-US" dirty="0"/>
-              <a:t>This slide is for me, the teacher: it gives the timing of the lesson and what to do if the projector is not available.</a:t>
+              <a:t>I record this information in the official logbook of the class after the lesson.</a:t>
             </a:r>
             <a:endParaRPr lang="en-US" dirty="0"/>
           </a:p>
@@ -5312,7 +5314,7 @@
           <a:p>
             <a:r>
               <a:rPr lang="en-US" dirty="0"/>
-              <a:t>These are the references and picture credits used to prepare this lesson.</a:t>
+              <a:t>I complete the second page of the logbook: the matter taught, the evaluation, the homework and the attendance.</a:t>
             </a:r>
             <a:endParaRPr lang="en-US" dirty="0"/>
           </a:p>
@@ -5424,6 +5426,182 @@
             <a:fld id="{F7021451-1387-4CA6-816F-3879F97B5CBC}" type="slidenum">
               <a:rPr lang="en-US"/>
               <a:t>6</a:t>
+            </a:fld>
+            <a:endParaRPr lang="en-US"/>
+          </a:p>
+        </p:txBody>
+      </p:sp>
+    </p:spTree>
+    <p:extLst>
+      <p:ext uri="{BB962C8B-B14F-4D97-AF65-F5344CB8AC3E}">
+        <p14:creationId xmlns:p14="http://schemas.microsoft.com/office/powerpoint/2010/main" val="1024086991"/>
+      </p:ext>
+    </p:extLst>
+  </p:cSld>
+  <p:clrMapOvr>
+    <a:masterClrMapping/>
+  </p:clrMapOvr>
+</p:notes>
+</file>
+
+<file path=ppt/notesSlides/notesSlide60.xml><?xml version="1.0" encoding="utf-8"?>
+<p:notes xmlns:a="http://schemas.openxmlformats.org/drawingml/2006/main" xmlns:r="http://schemas.openxmlformats.org/officeDocument/2006/relationships" xmlns:p="http://schemas.openxmlformats.org/presentationml/2006/main">
+  <p:cSld>
+    <p:spTree>
+      <p:nvGrpSpPr>
+        <p:cNvPr id="1" name=""/>
+        <p:cNvGrpSpPr/>
+        <p:nvPr/>
+      </p:nvGrpSpPr>
+      <p:grpSpPr>
+        <a:xfrm>
+          <a:off x="0" y="0"/>
+          <a:ext cx="0" cy="0"/>
+          <a:chOff x="0" y="0"/>
+          <a:chExt cx="0" cy="0"/>
+        </a:xfrm>
+      </p:grpSpPr>
+      <p:sp>
+        <p:nvSpPr>
+          <p:cNvPr id="2" name="Slide Image Placeholder 1"/>
+          <p:cNvSpPr>
+            <a:spLocks noGrp="1" noRot="1" noChangeAspect="1"/>
+          </p:cNvSpPr>
+          <p:nvPr>
+            <p:ph type="sldImg"/>
+          </p:nvPr>
+        </p:nvSpPr>
+        <p:spPr/>
+      </p:sp>
+      <p:sp>
+        <p:nvSpPr>
+          <p:cNvPr id="3" name="Notes Placeholder 2"/>
+          <p:cNvSpPr>
+            <a:spLocks noGrp="1"/>
+          </p:cNvSpPr>
+          <p:nvPr>
+            <p:ph type="body" idx="1"/>
+          </p:nvPr>
+        </p:nvSpPr>
+        <p:spPr/>
+        <p:txBody>
+          <a:bodyPr/>
+          <a:lstStyle/>
+          <a:p>
+            <a:r>
+              <a:rPr lang="en-US" dirty="0"/>
+              <a:t>This slide is for me, the teacher: it gives the timing of the lesson and what to do if the projector is not available.</a:t>
+            </a:r>
+            <a:endParaRPr lang="en-US" dirty="0"/>
+          </a:p>
+        </p:txBody>
+      </p:sp>
+      <p:sp>
+        <p:nvSpPr>
+          <p:cNvPr id="4" name="Slide Number Placeholder 3"/>
+          <p:cNvSpPr>
+            <a:spLocks noGrp="1"/>
+          </p:cNvSpPr>
+          <p:nvPr>
+            <p:ph type="sldNum" sz="quarter" idx="10"/>
+          </p:nvPr>
+        </p:nvSpPr>
+        <p:spPr/>
+        <p:txBody>
+          <a:bodyPr/>
+          <a:lstStyle/>
+          <a:p>
+            <a:fld id="{F7021451-1387-4CA6-816F-3879F97B5CBC}" type="slidenum">
+              <a:rPr lang="en-US"/>
+              <a:t>60</a:t>
+            </a:fld>
+            <a:endParaRPr lang="en-US"/>
+          </a:p>
+        </p:txBody>
+      </p:sp>
+    </p:spTree>
+    <p:extLst>
+      <p:ext uri="{BB962C8B-B14F-4D97-AF65-F5344CB8AC3E}">
+        <p14:creationId xmlns:p14="http://schemas.microsoft.com/office/powerpoint/2010/main" val="1024086991"/>
+      </p:ext>
+    </p:extLst>
+  </p:cSld>
+  <p:clrMapOvr>
+    <a:masterClrMapping/>
+  </p:clrMapOvr>
+</p:notes>
+</file>
+
+<file path=ppt/notesSlides/notesSlide61.xml><?xml version="1.0" encoding="utf-8"?>
+<p:notes xmlns:a="http://schemas.openxmlformats.org/drawingml/2006/main" xmlns:r="http://schemas.openxmlformats.org/officeDocument/2006/relationships" xmlns:p="http://schemas.openxmlformats.org/presentationml/2006/main">
+  <p:cSld>
+    <p:spTree>
+      <p:nvGrpSpPr>
+        <p:cNvPr id="1" name=""/>
+        <p:cNvGrpSpPr/>
+        <p:nvPr/>
+      </p:nvGrpSpPr>
+      <p:grpSpPr>
+        <a:xfrm>
+          <a:off x="0" y="0"/>
+          <a:ext cx="0" cy="0"/>
+          <a:chOff x="0" y="0"/>
+          <a:chExt cx="0" cy="0"/>
+        </a:xfrm>
+      </p:grpSpPr>
+      <p:sp>
+        <p:nvSpPr>
+          <p:cNvPr id="2" name="Slide Image Placeholder 1"/>
+          <p:cNvSpPr>
+            <a:spLocks noGrp="1" noRot="1" noChangeAspect="1"/>
+          </p:cNvSpPr>
+          <p:nvPr>
+            <p:ph type="sldImg"/>
+          </p:nvPr>
+        </p:nvSpPr>
+        <p:spPr/>
+      </p:sp>
+      <p:sp>
+        <p:nvSpPr>
+          <p:cNvPr id="3" name="Notes Placeholder 2"/>
+          <p:cNvSpPr>
+            <a:spLocks noGrp="1"/>
+          </p:cNvSpPr>
+          <p:nvPr>
+            <p:ph type="body" idx="1"/>
+          </p:nvPr>
+        </p:nvSpPr>
+        <p:spPr/>
+        <p:txBody>
+          <a:bodyPr/>
+          <a:lstStyle/>
+          <a:p>
+            <a:r>
+              <a:rPr lang="en-US" dirty="0"/>
+              <a:t>These are the references and picture credits used to prepare this lesson.</a:t>
+            </a:r>
+            <a:endParaRPr lang="en-US" dirty="0"/>
+          </a:p>
+        </p:txBody>
+      </p:sp>
+      <p:sp>
+        <p:nvSpPr>
+          <p:cNvPr id="4" name="Slide Number Placeholder 3"/>
+          <p:cNvSpPr>
+            <a:spLocks noGrp="1"/>
+          </p:cNvSpPr>
+          <p:nvPr>
+            <p:ph type="sldNum" sz="quarter" idx="10"/>
+          </p:nvPr>
+        </p:nvSpPr>
+        <p:spPr/>
+        <p:txBody>
+          <a:bodyPr/>
+          <a:lstStyle/>
+          <a:p>
+            <a:fld id="{F7021451-1387-4CA6-816F-3879F97B5CBC}" type="slidenum">
+              <a:rPr lang="en-US"/>
+              <a:t>61</a:t>
             </a:fld>
             <a:endParaRPr lang="en-US"/>
           </a:p>
@@ -14503,7 +14681,7 @@
                 <a:ea typeface="Times New Roman" pitchFamily="34" charset="-122"/>
                 <a:cs typeface="Times New Roman" pitchFamily="34" charset="-120"/>
               </a:rPr>
-              <a:t>1. Meaning and Importance of the Atmosphere</a:t>
+              <a:t>1. Meaning of the Atmosphere</a:t>
             </a:r>
             <a:endParaRPr lang="en-US" sz="3600" dirty="0"/>
           </a:p>
@@ -14518,7 +14696,7 @@
         <p:spPr>
           <a:xfrm>
             <a:off x="365760" y="1783080"/>
-            <a:ext cx="4846320" cy="4617720"/>
+            <a:ext cx="6035040" cy="4617720"/>
           </a:xfrm>
           <a:prstGeom prst="rect">
             <a:avLst/>
@@ -14537,7 +14715,7 @@
               <a:buNone/>
             </a:pPr>
             <a:r>
-              <a:rPr lang="en-US" sz="3600" i="1" dirty="0">
+              <a:rPr lang="en-US" sz="2600" i="1" dirty="0">
                 <a:solidFill>
                   <a:srgbClr val="111111"/>
                 </a:solidFill>
@@ -14545,9 +14723,9 @@
                 <a:ea typeface="Times New Roman" pitchFamily="34" charset="-122"/>
                 <a:cs typeface="Times New Roman" pitchFamily="34" charset="-120"/>
               </a:rPr>
-              <a:t>The atmosphere is important for the following reasons:</a:t>
-            </a:r>
-            <a:endParaRPr lang="en-US" sz="3600" dirty="0"/>
+              <a:t>The atmosphere is explained as follows:</a:t>
+            </a:r>
+            <a:endParaRPr lang="en-US" sz="2600" dirty="0"/>
           </a:p>
           <a:p>
             <a:pPr algn="l" indent="0" marL="0">
@@ -14557,7 +14735,7 @@
               <a:buNone/>
             </a:pPr>
             <a:r>
-              <a:rPr lang="en-US" sz="3600" b="1" dirty="0">
+              <a:rPr lang="en-US" sz="2600" b="1" dirty="0">
                 <a:solidFill>
                   <a:srgbClr val="111111"/>
                 </a:solidFill>
@@ -14565,7 +14743,7 @@
                 <a:ea typeface="Times New Roman" pitchFamily="34" charset="-122"/>
                 <a:cs typeface="Times New Roman" pitchFamily="34" charset="-120"/>
               </a:rPr>
-              <a:t>A protective blanket: </a:t>
+              <a:t>The atmosphere: </a:t>
             </a:r>
             <a:pPr algn="l" indent="0" marL="0">
               <a:spcAft>
@@ -14574,7 +14752,7 @@
               <a:buNone/>
             </a:pPr>
             <a:r>
-              <a:rPr lang="en-US" sz="3600" dirty="0">
+              <a:rPr lang="en-US" sz="2600" dirty="0">
                 <a:solidFill>
                   <a:srgbClr val="111111"/>
                 </a:solidFill>
@@ -14582,9 +14760,9 @@
                 <a:ea typeface="Times New Roman" pitchFamily="34" charset="-122"/>
                 <a:cs typeface="Times New Roman" pitchFamily="34" charset="-120"/>
               </a:rPr>
-              <a:t>It protects us from harmful solar radiation and from meteors.</a:t>
-            </a:r>
-            <a:endParaRPr lang="en-US" sz="3600" dirty="0"/>
+              <a:t>The atmosphere is the envelope of gases, water and tiny particles that surrounds the Earth and is held to it by gravity. It rotates with the Earth and reaches about 1,000 km in height, but half of its mass lies below 5.5 km. It is in this layer of air that all weather and climate take place.</a:t>
+            </a:r>
+            <a:endParaRPr lang="en-US" sz="2600" dirty="0"/>
           </a:p>
         </p:txBody>
       </p:sp>
@@ -14604,8 +14782,8 @@
         </p:blipFill>
         <p:spPr>
           <a:xfrm>
-            <a:off x="5349240" y="2071212"/>
-            <a:ext cx="6659575" cy="3693983"/>
+            <a:off x="6537960" y="2400897"/>
+            <a:ext cx="5470855" cy="3034615"/>
           </a:xfrm>
           <a:prstGeom prst="rect">
             <a:avLst/>
@@ -14620,8 +14798,8 @@
         </p:nvSpPr>
         <p:spPr>
           <a:xfrm>
-            <a:off x="5349240" y="6089904"/>
-            <a:ext cx="6659575" cy="347472"/>
+            <a:off x="6537960" y="6089904"/>
+            <a:ext cx="5470855" cy="347472"/>
           </a:xfrm>
           <a:prstGeom prst="rect">
             <a:avLst/>
@@ -14763,9 +14941,170 @@
           </a:p>
         </p:txBody>
       </p:sp>
+      <p:sp>
+        <p:nvSpPr>
+          <p:cNvPr id="3" name="Text 1"/>
+          <p:cNvSpPr/>
+          <p:nvPr/>
+        </p:nvSpPr>
+        <p:spPr>
+          <a:xfrm>
+            <a:off x="365760" y="1005840"/>
+            <a:ext cx="11460175" cy="731520"/>
+          </a:xfrm>
+          <a:prstGeom prst="rect">
+            <a:avLst/>
+          </a:prstGeom>
+          <a:noFill/>
+          <a:ln/>
+        </p:spPr>
+        <p:txBody>
+          <a:bodyPr wrap="square" lIns="0" tIns="0" rIns="0" bIns="0" rtlCol="0" anchor="ctr">
+            <a:normAutofit/>
+          </a:bodyPr>
+          <a:lstStyle/>
+          <a:p>
+            <a:pPr algn="ctr" indent="0" marL="0">
+              <a:buNone/>
+            </a:pPr>
+            <a:r>
+              <a:rPr lang="en-US" sz="3600" b="1" dirty="0">
+                <a:solidFill>
+                  <a:srgbClr val="990011"/>
+                </a:solidFill>
+                <a:latin typeface="Times New Roman" pitchFamily="34" charset="0"/>
+                <a:ea typeface="Times New Roman" pitchFamily="34" charset="-122"/>
+                <a:cs typeface="Times New Roman" pitchFamily="34" charset="-120"/>
+              </a:rPr>
+              <a:t>2. The Gaseous Components</a:t>
+            </a:r>
+            <a:endParaRPr lang="en-US" sz="3600" dirty="0"/>
+          </a:p>
+        </p:txBody>
+      </p:sp>
+      <p:sp>
+        <p:nvSpPr>
+          <p:cNvPr id="4" name="Text 2"/>
+          <p:cNvSpPr/>
+          <p:nvPr/>
+        </p:nvSpPr>
+        <p:spPr>
+          <a:xfrm>
+            <a:off x="365760" y="1737360"/>
+            <a:ext cx="6035040" cy="457200"/>
+          </a:xfrm>
+          <a:prstGeom prst="rect">
+            <a:avLst/>
+          </a:prstGeom>
+          <a:noFill/>
+          <a:ln/>
+        </p:spPr>
+        <p:txBody>
+          <a:bodyPr wrap="square" lIns="0" tIns="0" rIns="0" bIns="0" rtlCol="0" anchor="ctr">
+            <a:normAutofit/>
+          </a:bodyPr>
+          <a:lstStyle/>
+          <a:p>
+            <a:pPr algn="l" indent="0" marL="0">
+              <a:buNone/>
+            </a:pPr>
+            <a:r>
+              <a:rPr lang="en-US" sz="3000" b="1" dirty="0">
+                <a:solidFill>
+                  <a:srgbClr val="990011"/>
+                </a:solidFill>
+                <a:latin typeface="Times New Roman" pitchFamily="34" charset="0"/>
+                <a:ea typeface="Times New Roman" pitchFamily="34" charset="-122"/>
+                <a:cs typeface="Times New Roman" pitchFamily="34" charset="-120"/>
+              </a:rPr>
+              <a:t>A) Constant Gases</a:t>
+            </a:r>
+            <a:endParaRPr lang="en-US" sz="3000" dirty="0"/>
+          </a:p>
+        </p:txBody>
+      </p:sp>
+      <p:sp>
+        <p:nvSpPr>
+          <p:cNvPr id="5" name="Text 3"/>
+          <p:cNvSpPr/>
+          <p:nvPr/>
+        </p:nvSpPr>
+        <p:spPr>
+          <a:xfrm>
+            <a:off x="365760" y="2240280"/>
+            <a:ext cx="6035040" cy="4160520"/>
+          </a:xfrm>
+          <a:prstGeom prst="rect">
+            <a:avLst/>
+          </a:prstGeom>
+          <a:noFill/>
+          <a:ln/>
+        </p:spPr>
+        <p:txBody>
+          <a:bodyPr wrap="square" lIns="0" tIns="0" rIns="0" bIns="0" rtlCol="0" anchor="t"/>
+          <a:lstStyle/>
+          <a:p>
+            <a:pPr algn="l" indent="0" marL="0">
+              <a:spcAft>
+                <a:spcPts val="800"/>
+              </a:spcAft>
+              <a:buNone/>
+            </a:pPr>
+            <a:r>
+              <a:rPr lang="en-US" sz="3000" i="1" dirty="0">
+                <a:solidFill>
+                  <a:srgbClr val="111111"/>
+                </a:solidFill>
+                <a:latin typeface="Times New Roman" pitchFamily="34" charset="0"/>
+                <a:ea typeface="Times New Roman" pitchFamily="34" charset="-122"/>
+                <a:cs typeface="Times New Roman" pitchFamily="34" charset="-120"/>
+              </a:rPr>
+              <a:t>The constant gases of the atmosphere are the following:</a:t>
+            </a:r>
+            <a:endParaRPr lang="en-US" sz="3000" dirty="0"/>
+          </a:p>
+          <a:p>
+            <a:pPr algn="l" indent="0" marL="0">
+              <a:spcAft>
+                <a:spcPts val="800"/>
+              </a:spcAft>
+              <a:buNone/>
+            </a:pPr>
+            <a:r>
+              <a:rPr lang="en-US" sz="3000" b="1" dirty="0">
+                <a:solidFill>
+                  <a:srgbClr val="111111"/>
+                </a:solidFill>
+                <a:latin typeface="Times New Roman" pitchFamily="34" charset="0"/>
+                <a:ea typeface="Times New Roman" pitchFamily="34" charset="-122"/>
+                <a:cs typeface="Times New Roman" pitchFamily="34" charset="-120"/>
+              </a:rPr>
+              <a:t>Nitrogen (about 78 %): </a:t>
+            </a:r>
+            <a:pPr algn="l" indent="0" marL="0">
+              <a:spcAft>
+                <a:spcPts val="800"/>
+              </a:spcAft>
+              <a:buNone/>
+            </a:pPr>
+            <a:r>
+              <a:rPr lang="en-US" sz="3000" dirty="0">
+                <a:solidFill>
+                  <a:srgbClr val="111111"/>
+                </a:solidFill>
+                <a:latin typeface="Times New Roman" pitchFamily="34" charset="0"/>
+                <a:ea typeface="Times New Roman" pitchFamily="34" charset="-122"/>
+                <a:cs typeface="Times New Roman" pitchFamily="34" charset="-120"/>
+              </a:rPr>
+              <a:t>Nitrogen is the most abundant gas of the atmosphere and its proportion hardly changes. It dilutes oxygen, and bacteria in the soil fix it so that plants can use it to grow.</a:t>
+            </a:r>
+            <a:endParaRPr lang="en-US" sz="3000" dirty="0"/>
+          </a:p>
+        </p:txBody>
+      </p:sp>
       <p:pic>
         <p:nvPicPr>
-          <p:cNvPr id="3" name="Image 0" descr="/home/claude/f4/img/minesec_sheet.png">    </p:cNvPr>
+          <p:cNvPr id="6" name="Image 0" descr="/home/claude/f4/img/v2/gases_pie_big.png">    </p:cNvPr>
           <p:cNvPicPr>
             <a:picLocks noChangeAspect="1"/>
           </p:cNvPicPr>
@@ -14779,8 +15118,8 @@
         </p:blipFill>
         <p:spPr>
           <a:xfrm>
-            <a:off x="0" y="658368"/>
-            <a:ext cx="1463040" cy="5833872"/>
+            <a:off x="6537960" y="2849678"/>
+            <a:ext cx="5470855" cy="2137053"/>
           </a:xfrm>
           <a:prstGeom prst="rect">
             <a:avLst/>
@@ -14789,14 +15128,14 @@
       </p:pic>
       <p:sp>
         <p:nvSpPr>
-          <p:cNvPr id="4" name="Text 1"/>
+          <p:cNvPr id="7" name="Text 4"/>
           <p:cNvSpPr/>
           <p:nvPr/>
         </p:nvSpPr>
         <p:spPr>
           <a:xfrm>
-            <a:off x="1691640" y="1005840"/>
-            <a:ext cx="10180015" cy="731520"/>
+            <a:off x="6537960" y="6089904"/>
+            <a:ext cx="5470855" cy="347472"/>
           </a:xfrm>
           <a:prstGeom prst="rect">
             <a:avLst/>
@@ -14805,159 +15144,24 @@
           <a:ln/>
         </p:spPr>
         <p:txBody>
-          <a:bodyPr wrap="square" lIns="0" tIns="0" rIns="0" bIns="0" rtlCol="0" anchor="ctr">
-            <a:normAutofit/>
-          </a:bodyPr>
+          <a:bodyPr wrap="square" lIns="0" tIns="0" rIns="0" bIns="0" rtlCol="0" anchor="ctr"/>
           <a:lstStyle/>
           <a:p>
             <a:pPr algn="ctr" indent="0" marL="0">
               <a:buNone/>
             </a:pPr>
             <a:r>
-              <a:rPr lang="en-US" sz="3600" b="1" dirty="0">
-                <a:solidFill>
-                  <a:srgbClr val="990011"/>
+              <a:rPr lang="en-US" sz="1600" i="1" dirty="0">
+                <a:solidFill>
+                  <a:srgbClr val="555555"/>
                 </a:solidFill>
                 <a:latin typeface="Times New Roman" pitchFamily="34" charset="0"/>
                 <a:ea typeface="Times New Roman" pitchFamily="34" charset="-122"/>
                 <a:cs typeface="Times New Roman" pitchFamily="34" charset="-120"/>
               </a:rPr>
-              <a:t>1. Meaning and Importance of the Atmosphere</a:t>
-            </a:r>
-            <a:endParaRPr lang="en-US" sz="3600" dirty="0"/>
-          </a:p>
-        </p:txBody>
-      </p:sp>
-      <p:sp>
-        <p:nvSpPr>
-          <p:cNvPr id="5" name="Text 2"/>
-          <p:cNvSpPr/>
-          <p:nvPr/>
-        </p:nvSpPr>
-        <p:spPr>
-          <a:xfrm>
-            <a:off x="1691640" y="1783080"/>
-            <a:ext cx="10180015" cy="4663440"/>
-          </a:xfrm>
-          <a:prstGeom prst="rect">
-            <a:avLst/>
-          </a:prstGeom>
-          <a:noFill/>
-          <a:ln/>
-        </p:spPr>
-        <p:txBody>
-          <a:bodyPr wrap="square" lIns="0" tIns="0" rIns="0" bIns="0" rtlCol="0" anchor="t"/>
-          <a:lstStyle/>
-          <a:p>
-            <a:pPr algn="l" indent="0" marL="0">
-              <a:spcAft>
-                <a:spcPts val="800"/>
-              </a:spcAft>
-              <a:buNone/>
-            </a:pPr>
-            <a:r>
-              <a:rPr lang="en-US" sz="4000" b="1" dirty="0">
-                <a:solidFill>
-                  <a:srgbClr val="111111"/>
-                </a:solidFill>
-                <a:latin typeface="Times New Roman" pitchFamily="34" charset="0"/>
-                <a:ea typeface="Times New Roman" pitchFamily="34" charset="-122"/>
-                <a:cs typeface="Times New Roman" pitchFamily="34" charset="-120"/>
-              </a:rPr>
-              <a:t>Temperature control: </a:t>
-            </a:r>
-            <a:pPr algn="l" indent="0" marL="0">
-              <a:spcAft>
-                <a:spcPts val="800"/>
-              </a:spcAft>
-              <a:buNone/>
-            </a:pPr>
-            <a:r>
-              <a:rPr lang="en-US" sz="4000" dirty="0">
-                <a:solidFill>
-                  <a:srgbClr val="111111"/>
-                </a:solidFill>
-                <a:latin typeface="Times New Roman" pitchFamily="34" charset="0"/>
-                <a:ea typeface="Times New Roman" pitchFamily="34" charset="-122"/>
-                <a:cs typeface="Times New Roman" pitchFamily="34" charset="-120"/>
-              </a:rPr>
-              <a:t>It keeps the Earth warm through the greenhouse effect and reduces the difference between day and night.</a:t>
-            </a:r>
-            <a:endParaRPr lang="en-US" sz="4000" dirty="0"/>
-          </a:p>
-          <a:p>
-            <a:pPr algn="l" indent="0" marL="0">
-              <a:spcAft>
-                <a:spcPts val="800"/>
-              </a:spcAft>
-              <a:buNone/>
-            </a:pPr>
-            <a:r>
-              <a:rPr lang="en-US" sz="4000" b="1" dirty="0">
-                <a:solidFill>
-                  <a:srgbClr val="111111"/>
-                </a:solidFill>
-                <a:latin typeface="Times New Roman" pitchFamily="34" charset="0"/>
-                <a:ea typeface="Times New Roman" pitchFamily="34" charset="-122"/>
-                <a:cs typeface="Times New Roman" pitchFamily="34" charset="-120"/>
-              </a:rPr>
-              <a:t>Life: </a:t>
-            </a:r>
-            <a:pPr algn="l" indent="0" marL="0">
-              <a:spcAft>
-                <a:spcPts val="800"/>
-              </a:spcAft>
-              <a:buNone/>
-            </a:pPr>
-            <a:r>
-              <a:rPr lang="en-US" sz="4000" dirty="0">
-                <a:solidFill>
-                  <a:srgbClr val="111111"/>
-                </a:solidFill>
-                <a:latin typeface="Times New Roman" pitchFamily="34" charset="0"/>
-                <a:ea typeface="Times New Roman" pitchFamily="34" charset="-122"/>
-                <a:cs typeface="Times New Roman" pitchFamily="34" charset="-120"/>
-              </a:rPr>
-              <a:t>It contains the oxygen we breathe and the carbon dioxide used by plants.</a:t>
-            </a:r>
-            <a:endParaRPr lang="en-US" sz="4000" dirty="0"/>
-          </a:p>
-          <a:p>
-            <a:pPr algn="l" indent="0" marL="0">
-              <a:spcAft>
-                <a:spcPts val="800"/>
-              </a:spcAft>
-              <a:buNone/>
-            </a:pPr>
-            <a:r>
-              <a:rPr lang="en-US" sz="4000" b="1" dirty="0">
-                <a:solidFill>
-                  <a:srgbClr val="111111"/>
-                </a:solidFill>
-                <a:latin typeface="Times New Roman" pitchFamily="34" charset="0"/>
-                <a:ea typeface="Times New Roman" pitchFamily="34" charset="-122"/>
-                <a:cs typeface="Times New Roman" pitchFamily="34" charset="-120"/>
-              </a:rPr>
-              <a:t>Weather: </a:t>
-            </a:r>
-            <a:pPr algn="l" indent="0" marL="0">
-              <a:spcAft>
-                <a:spcPts val="800"/>
-              </a:spcAft>
-              <a:buNone/>
-            </a:pPr>
-            <a:r>
-              <a:rPr lang="en-US" sz="4000" dirty="0">
-                <a:solidFill>
-                  <a:srgbClr val="111111"/>
-                </a:solidFill>
-                <a:latin typeface="Times New Roman" pitchFamily="34" charset="0"/>
-                <a:ea typeface="Times New Roman" pitchFamily="34" charset="-122"/>
-                <a:cs typeface="Times New Roman" pitchFamily="34" charset="-120"/>
-              </a:rPr>
-              <a:t>All clouds, rain and winds take place in it.</a:t>
-            </a:r>
-            <a:endParaRPr lang="en-US" sz="4000" dirty="0"/>
+              <a:t>Illustration: the gases of the atmosphere</a:t>
+            </a:r>
+            <a:endParaRPr lang="en-US" sz="1600" dirty="0"/>
           </a:p>
         </p:txBody>
       </p:sp>
@@ -15073,129 +15277,9 @@
           </a:p>
         </p:txBody>
       </p:sp>
-      <p:sp>
-        <p:nvSpPr>
-          <p:cNvPr id="3" name="Text 1"/>
-          <p:cNvSpPr/>
-          <p:nvPr/>
-        </p:nvSpPr>
-        <p:spPr>
-          <a:xfrm>
-            <a:off x="365760" y="1005840"/>
-            <a:ext cx="11460175" cy="731520"/>
-          </a:xfrm>
-          <a:prstGeom prst="rect">
-            <a:avLst/>
-          </a:prstGeom>
-          <a:noFill/>
-          <a:ln/>
-        </p:spPr>
-        <p:txBody>
-          <a:bodyPr wrap="square" lIns="0" tIns="0" rIns="0" bIns="0" rtlCol="0" anchor="ctr">
-            <a:normAutofit/>
-          </a:bodyPr>
-          <a:lstStyle/>
-          <a:p>
-            <a:pPr algn="ctr" indent="0" marL="0">
-              <a:buNone/>
-            </a:pPr>
-            <a:r>
-              <a:rPr lang="en-US" sz="3600" b="1" dirty="0">
-                <a:solidFill>
-                  <a:srgbClr val="990011"/>
-                </a:solidFill>
-                <a:latin typeface="Times New Roman" pitchFamily="34" charset="0"/>
-                <a:ea typeface="Times New Roman" pitchFamily="34" charset="-122"/>
-                <a:cs typeface="Times New Roman" pitchFamily="34" charset="-120"/>
-              </a:rPr>
-              <a:t>2. The Gaseous Components</a:t>
-            </a:r>
-            <a:endParaRPr lang="en-US" sz="3600" dirty="0"/>
-          </a:p>
-        </p:txBody>
-      </p:sp>
-      <p:sp>
-        <p:nvSpPr>
-          <p:cNvPr id="4" name="Text 2"/>
-          <p:cNvSpPr/>
-          <p:nvPr/>
-        </p:nvSpPr>
-        <p:spPr>
-          <a:xfrm>
-            <a:off x="365760" y="1783080"/>
-            <a:ext cx="4846320" cy="4617720"/>
-          </a:xfrm>
-          <a:prstGeom prst="rect">
-            <a:avLst/>
-          </a:prstGeom>
-          <a:noFill/>
-          <a:ln/>
-        </p:spPr>
-        <p:txBody>
-          <a:bodyPr wrap="square" lIns="0" tIns="0" rIns="0" bIns="0" rtlCol="0" anchor="t"/>
-          <a:lstStyle/>
-          <a:p>
-            <a:pPr algn="l" indent="0" marL="0">
-              <a:spcAft>
-                <a:spcPts val="800"/>
-              </a:spcAft>
-              <a:buNone/>
-            </a:pPr>
-            <a:r>
-              <a:rPr lang="en-US" sz="3600" i="1" dirty="0">
-                <a:solidFill>
-                  <a:srgbClr val="111111"/>
-                </a:solidFill>
-                <a:latin typeface="Times New Roman" pitchFamily="34" charset="0"/>
-                <a:ea typeface="Times New Roman" pitchFamily="34" charset="-122"/>
-                <a:cs typeface="Times New Roman" pitchFamily="34" charset="-120"/>
-              </a:rPr>
-              <a:t>The gases of the atmosphere are the following:</a:t>
-            </a:r>
-            <a:endParaRPr lang="en-US" sz="3600" dirty="0"/>
-          </a:p>
-          <a:p>
-            <a:pPr algn="l" indent="0" marL="0">
-              <a:spcAft>
-                <a:spcPts val="800"/>
-              </a:spcAft>
-              <a:buNone/>
-            </a:pPr>
-            <a:r>
-              <a:rPr lang="en-US" sz="3600" b="1" dirty="0">
-                <a:solidFill>
-                  <a:srgbClr val="111111"/>
-                </a:solidFill>
-                <a:latin typeface="Times New Roman" pitchFamily="34" charset="0"/>
-                <a:ea typeface="Times New Roman" pitchFamily="34" charset="-122"/>
-                <a:cs typeface="Times New Roman" pitchFamily="34" charset="-120"/>
-              </a:rPr>
-              <a:t>Nitrogen (about 78 %): </a:t>
-            </a:r>
-            <a:pPr algn="l" indent="0" marL="0">
-              <a:spcAft>
-                <a:spcPts val="800"/>
-              </a:spcAft>
-              <a:buNone/>
-            </a:pPr>
-            <a:r>
-              <a:rPr lang="en-US" sz="3600" dirty="0">
-                <a:solidFill>
-                  <a:srgbClr val="111111"/>
-                </a:solidFill>
-                <a:latin typeface="Times New Roman" pitchFamily="34" charset="0"/>
-                <a:ea typeface="Times New Roman" pitchFamily="34" charset="-122"/>
-                <a:cs typeface="Times New Roman" pitchFamily="34" charset="-120"/>
-              </a:rPr>
-              <a:t>It is a constant gas, needed for plant growth.</a:t>
-            </a:r>
-            <a:endParaRPr lang="en-US" sz="3600" dirty="0"/>
-          </a:p>
-        </p:txBody>
-      </p:sp>
       <p:pic>
         <p:nvPicPr>
-          <p:cNvPr id="5" name="Image 0" descr="/home/claude/f4/img/v2/gases_pie_big.png">    </p:cNvPr>
+          <p:cNvPr id="3" name="Image 0" descr="/home/claude/f4/img/minesec_sheet.png">    </p:cNvPr>
           <p:cNvPicPr>
             <a:picLocks noChangeAspect="1"/>
           </p:cNvPicPr>
@@ -15209,8 +15293,8 @@
         </p:blipFill>
         <p:spPr>
           <a:xfrm>
-            <a:off x="5349240" y="2617506"/>
-            <a:ext cx="6659575" cy="2601397"/>
+            <a:off x="0" y="658368"/>
+            <a:ext cx="3840480" cy="5833872"/>
           </a:xfrm>
           <a:prstGeom prst="rect">
             <a:avLst/>
@@ -15219,14 +15303,14 @@
       </p:pic>
       <p:sp>
         <p:nvSpPr>
-          <p:cNvPr id="6" name="Text 3"/>
+          <p:cNvPr id="4" name="Text 1"/>
           <p:cNvSpPr/>
           <p:nvPr/>
         </p:nvSpPr>
         <p:spPr>
           <a:xfrm>
-            <a:off x="5349240" y="6089904"/>
-            <a:ext cx="6659575" cy="347472"/>
+            <a:off x="4069080" y="1005840"/>
+            <a:ext cx="7802575" cy="731520"/>
           </a:xfrm>
           <a:prstGeom prst="rect">
             <a:avLst/>
@@ -15235,24 +15319,124 @@
           <a:ln/>
         </p:spPr>
         <p:txBody>
-          <a:bodyPr wrap="square" lIns="0" tIns="0" rIns="0" bIns="0" rtlCol="0" anchor="ctr"/>
+          <a:bodyPr wrap="square" lIns="0" tIns="0" rIns="0" bIns="0" rtlCol="0" anchor="ctr">
+            <a:normAutofit/>
+          </a:bodyPr>
           <a:lstStyle/>
           <a:p>
             <a:pPr algn="ctr" indent="0" marL="0">
               <a:buNone/>
             </a:pPr>
             <a:r>
-              <a:rPr lang="en-US" sz="1600" i="1" dirty="0">
-                <a:solidFill>
-                  <a:srgbClr val="555555"/>
+              <a:rPr lang="en-US" sz="3600" b="1" dirty="0">
+                <a:solidFill>
+                  <a:srgbClr val="990011"/>
                 </a:solidFill>
                 <a:latin typeface="Times New Roman" pitchFamily="34" charset="0"/>
                 <a:ea typeface="Times New Roman" pitchFamily="34" charset="-122"/>
                 <a:cs typeface="Times New Roman" pitchFamily="34" charset="-120"/>
               </a:rPr>
-              <a:t>Illustration: the gases of the air</a:t>
-            </a:r>
-            <a:endParaRPr lang="en-US" sz="1600" dirty="0"/>
+              <a:t>2. The Gaseous Components</a:t>
+            </a:r>
+            <a:endParaRPr lang="en-US" sz="3600" dirty="0"/>
+          </a:p>
+        </p:txBody>
+      </p:sp>
+      <p:sp>
+        <p:nvSpPr>
+          <p:cNvPr id="5" name="Text 2"/>
+          <p:cNvSpPr/>
+          <p:nvPr/>
+        </p:nvSpPr>
+        <p:spPr>
+          <a:xfrm>
+            <a:off x="4069080" y="1737360"/>
+            <a:ext cx="7802575" cy="457200"/>
+          </a:xfrm>
+          <a:prstGeom prst="rect">
+            <a:avLst/>
+          </a:prstGeom>
+          <a:noFill/>
+          <a:ln/>
+        </p:spPr>
+        <p:txBody>
+          <a:bodyPr wrap="square" lIns="0" tIns="0" rIns="0" bIns="0" rtlCol="0" anchor="ctr"/>
+          <a:lstStyle/>
+          <a:p>
+            <a:pPr algn="l" indent="0" marL="0">
+              <a:buNone/>
+            </a:pPr>
+            <a:r>
+              <a:rPr lang="en-US" sz="3200" b="1" dirty="0">
+                <a:solidFill>
+                  <a:srgbClr val="990011"/>
+                </a:solidFill>
+                <a:latin typeface="Times New Roman" pitchFamily="34" charset="0"/>
+                <a:ea typeface="Times New Roman" pitchFamily="34" charset="-122"/>
+                <a:cs typeface="Times New Roman" pitchFamily="34" charset="-120"/>
+              </a:rPr>
+              <a:t>A) Constant Gases</a:t>
+            </a:r>
+            <a:endParaRPr lang="en-US" sz="3200" dirty="0"/>
+          </a:p>
+        </p:txBody>
+      </p:sp>
+      <p:sp>
+        <p:nvSpPr>
+          <p:cNvPr id="6" name="Text 3"/>
+          <p:cNvSpPr/>
+          <p:nvPr/>
+        </p:nvSpPr>
+        <p:spPr>
+          <a:xfrm>
+            <a:off x="4069080" y="2240280"/>
+            <a:ext cx="7802575" cy="4206240"/>
+          </a:xfrm>
+          <a:prstGeom prst="rect">
+            <a:avLst/>
+          </a:prstGeom>
+          <a:noFill/>
+          <a:ln/>
+        </p:spPr>
+        <p:txBody>
+          <a:bodyPr wrap="square" lIns="0" tIns="0" rIns="0" bIns="0" rtlCol="0" anchor="t"/>
+          <a:lstStyle/>
+          <a:p>
+            <a:pPr algn="l" indent="0" marL="0">
+              <a:spcAft>
+                <a:spcPts val="800"/>
+              </a:spcAft>
+              <a:buNone/>
+            </a:pPr>
+            <a:r>
+              <a:rPr lang="en-US" sz="4000" b="1" dirty="0">
+                <a:solidFill>
+                  <a:srgbClr val="111111"/>
+                </a:solidFill>
+                <a:latin typeface="Times New Roman" pitchFamily="34" charset="0"/>
+                <a:ea typeface="Times New Roman" pitchFamily="34" charset="-122"/>
+                <a:cs typeface="Times New Roman" pitchFamily="34" charset="-120"/>
+              </a:rPr>
+              <a:t>Oxygen (about 21 %): </a:t>
+            </a:r>
+            <a:pPr algn="l" indent="0" marL="0">
+              <a:spcAft>
+                <a:spcPts val="800"/>
+              </a:spcAft>
+              <a:buNone/>
+            </a:pPr>
+            <a:r>
+              <a:rPr lang="en-US" sz="4000" dirty="0">
+                <a:solidFill>
+                  <a:srgbClr val="111111"/>
+                </a:solidFill>
+                <a:latin typeface="Times New Roman" pitchFamily="34" charset="0"/>
+                <a:ea typeface="Times New Roman" pitchFamily="34" charset="-122"/>
+                <a:cs typeface="Times New Roman" pitchFamily="34" charset="-120"/>
+              </a:rPr>
+              <a:t>Oxygen is the second constant gas and is renewed by the photosynthesis of plants. It is needed by people and animals to breathe and by fire to burn.</a:t>
+            </a:r>
+            <a:endParaRPr lang="en-US" sz="4000" dirty="0"/>
           </a:p>
         </p:txBody>
       </p:sp>
@@ -15385,7 +15569,7 @@
         <p:spPr>
           <a:xfrm>
             <a:off x="0" y="658368"/>
-            <a:ext cx="5120640" cy="5833872"/>
+            <a:ext cx="3840480" cy="5833872"/>
           </a:xfrm>
           <a:prstGeom prst="rect">
             <a:avLst/>
@@ -15400,8 +15584,8 @@
         </p:nvSpPr>
         <p:spPr>
           <a:xfrm>
-            <a:off x="5349240" y="1005840"/>
-            <a:ext cx="6522415" cy="731520"/>
+            <a:off x="4069080" y="1005840"/>
+            <a:ext cx="7802575" cy="731520"/>
           </a:xfrm>
           <a:prstGeom prst="rect">
             <a:avLst/>
@@ -15441,8 +15625,47 @@
         </p:nvSpPr>
         <p:spPr>
           <a:xfrm>
-            <a:off x="5349240" y="1783080"/>
-            <a:ext cx="6522415" cy="4663440"/>
+            <a:off x="4069080" y="1737360"/>
+            <a:ext cx="7802575" cy="457200"/>
+          </a:xfrm>
+          <a:prstGeom prst="rect">
+            <a:avLst/>
+          </a:prstGeom>
+          <a:noFill/>
+          <a:ln/>
+        </p:spPr>
+        <p:txBody>
+          <a:bodyPr wrap="square" lIns="0" tIns="0" rIns="0" bIns="0" rtlCol="0" anchor="ctr"/>
+          <a:lstStyle/>
+          <a:p>
+            <a:pPr algn="l" indent="0" marL="0">
+              <a:buNone/>
+            </a:pPr>
+            <a:r>
+              <a:rPr lang="en-US" sz="3200" b="1" dirty="0">
+                <a:solidFill>
+                  <a:srgbClr val="990011"/>
+                </a:solidFill>
+                <a:latin typeface="Times New Roman" pitchFamily="34" charset="0"/>
+                <a:ea typeface="Times New Roman" pitchFamily="34" charset="-122"/>
+                <a:cs typeface="Times New Roman" pitchFamily="34" charset="-120"/>
+              </a:rPr>
+              <a:t>A) Constant Gases</a:t>
+            </a:r>
+            <a:endParaRPr lang="en-US" sz="3200" dirty="0"/>
+          </a:p>
+        </p:txBody>
+      </p:sp>
+      <p:sp>
+        <p:nvSpPr>
+          <p:cNvPr id="6" name="Text 3"/>
+          <p:cNvSpPr/>
+          <p:nvPr/>
+        </p:nvSpPr>
+        <p:spPr>
+          <a:xfrm>
+            <a:off x="4069080" y="2240280"/>
+            <a:ext cx="7802575" cy="4206240"/>
           </a:xfrm>
           <a:prstGeom prst="rect">
             <a:avLst/>
@@ -15469,7 +15692,7 @@
                 <a:ea typeface="Times New Roman" pitchFamily="34" charset="-122"/>
                 <a:cs typeface="Times New Roman" pitchFamily="34" charset="-120"/>
               </a:rPr>
-              <a:t>Oxygen (about 21 %): </a:t>
+              <a:t>Argon (about 0.9 %): </a:t>
             </a:r>
             <a:pPr algn="l" indent="0" marL="0">
               <a:spcAft>
@@ -15486,44 +15709,7 @@
                 <a:ea typeface="Times New Roman" pitchFamily="34" charset="-122"/>
                 <a:cs typeface="Times New Roman" pitchFamily="34" charset="-120"/>
               </a:rPr>
-              <a:t>It is a constant gas, necessary for breathing and burning.</a:t>
-            </a:r>
-            <a:endParaRPr lang="en-US" sz="4000" dirty="0"/>
-          </a:p>
-          <a:p>
-            <a:pPr algn="l" indent="0" marL="0">
-              <a:spcAft>
-                <a:spcPts val="800"/>
-              </a:spcAft>
-              <a:buNone/>
-            </a:pPr>
-            <a:r>
-              <a:rPr lang="en-US" sz="4000" b="1" dirty="0">
-                <a:solidFill>
-                  <a:srgbClr val="111111"/>
-                </a:solidFill>
-                <a:latin typeface="Times New Roman" pitchFamily="34" charset="0"/>
-                <a:ea typeface="Times New Roman" pitchFamily="34" charset="-122"/>
-                <a:cs typeface="Times New Roman" pitchFamily="34" charset="-120"/>
-              </a:rPr>
-              <a:t>Argon (about 0.9 %): </a:t>
-            </a:r>
-            <a:pPr algn="l" indent="0" marL="0">
-              <a:spcAft>
-                <a:spcPts val="800"/>
-              </a:spcAft>
-              <a:buNone/>
-            </a:pPr>
-            <a:r>
-              <a:rPr lang="en-US" sz="4000" dirty="0">
-                <a:solidFill>
-                  <a:srgbClr val="111111"/>
-                </a:solidFill>
-                <a:latin typeface="Times New Roman" pitchFamily="34" charset="0"/>
-                <a:ea typeface="Times New Roman" pitchFamily="34" charset="-122"/>
-                <a:cs typeface="Times New Roman" pitchFamily="34" charset="-120"/>
-              </a:rPr>
-              <a:t>It is a constant, inert gas.</a:t>
+              <a:t>Argon is an inert gas, which means that it does not react with other substances. Its amount stays the same everywhere, and it has almost no role in weather.</a:t>
             </a:r>
             <a:endParaRPr lang="en-US" sz="4000" dirty="0"/>
           </a:p>
@@ -15999,8 +16185,49 @@
         </p:nvSpPr>
         <p:spPr>
           <a:xfrm>
-            <a:off x="365760" y="1783080"/>
-            <a:ext cx="4846320" cy="4617720"/>
+            <a:off x="365760" y="1737360"/>
+            <a:ext cx="6035040" cy="457200"/>
+          </a:xfrm>
+          <a:prstGeom prst="rect">
+            <a:avLst/>
+          </a:prstGeom>
+          <a:noFill/>
+          <a:ln/>
+        </p:spPr>
+        <p:txBody>
+          <a:bodyPr wrap="square" lIns="0" tIns="0" rIns="0" bIns="0" rtlCol="0" anchor="ctr">
+            <a:normAutofit/>
+          </a:bodyPr>
+          <a:lstStyle/>
+          <a:p>
+            <a:pPr algn="l" indent="0" marL="0">
+              <a:buNone/>
+            </a:pPr>
+            <a:r>
+              <a:rPr lang="en-US" sz="3000" b="1" dirty="0">
+                <a:solidFill>
+                  <a:srgbClr val="990011"/>
+                </a:solidFill>
+                <a:latin typeface="Times New Roman" pitchFamily="34" charset="0"/>
+                <a:ea typeface="Times New Roman" pitchFamily="34" charset="-122"/>
+                <a:cs typeface="Times New Roman" pitchFamily="34" charset="-120"/>
+              </a:rPr>
+              <a:t>B) Variable Gases</a:t>
+            </a:r>
+            <a:endParaRPr lang="en-US" sz="3000" dirty="0"/>
+          </a:p>
+        </p:txBody>
+      </p:sp>
+      <p:sp>
+        <p:nvSpPr>
+          <p:cNvPr id="5" name="Text 3"/>
+          <p:cNvSpPr/>
+          <p:nvPr/>
+        </p:nvSpPr>
+        <p:spPr>
+          <a:xfrm>
+            <a:off x="365760" y="2240280"/>
+            <a:ext cx="6035040" cy="4160520"/>
           </a:xfrm>
           <a:prstGeom prst="rect">
             <a:avLst/>
@@ -16019,7 +16246,7 @@
               <a:buNone/>
             </a:pPr>
             <a:r>
-              <a:rPr lang="en-US" sz="3600" b="1" dirty="0">
+              <a:rPr lang="en-US" sz="3200" i="1" dirty="0">
                 <a:solidFill>
                   <a:srgbClr val="111111"/>
                 </a:solidFill>
@@ -16027,8 +16254,11 @@
                 <a:ea typeface="Times New Roman" pitchFamily="34" charset="-122"/>
                 <a:cs typeface="Times New Roman" pitchFamily="34" charset="-120"/>
               </a:rPr>
-              <a:t>Water vapour (0–4 %): </a:t>
-            </a:r>
+              <a:t>The variable gases of the atmosphere are the following:</a:t>
+            </a:r>
+            <a:endParaRPr lang="en-US" sz="3200" dirty="0"/>
+          </a:p>
+          <a:p>
             <a:pPr algn="l" indent="0" marL="0">
               <a:spcAft>
                 <a:spcPts val="800"/>
@@ -16036,7 +16266,7 @@
               <a:buNone/>
             </a:pPr>
             <a:r>
-              <a:rPr lang="en-US" sz="3600" dirty="0">
+              <a:rPr lang="en-US" sz="3200" b="1" dirty="0">
                 <a:solidFill>
                   <a:srgbClr val="111111"/>
                 </a:solidFill>
@@ -16044,15 +16274,32 @@
                 <a:ea typeface="Times New Roman" pitchFamily="34" charset="-122"/>
                 <a:cs typeface="Times New Roman" pitchFamily="34" charset="-120"/>
               </a:rPr>
-              <a:t>It is a variable gas that forms clouds and rain and keeps the Earth warm.</a:t>
-            </a:r>
-            <a:endParaRPr lang="en-US" sz="3600" dirty="0"/>
+              <a:t>Water vapour (0 to 4 %): </a:t>
+            </a:r>
+            <a:pPr algn="l" indent="0" marL="0">
+              <a:spcAft>
+                <a:spcPts val="800"/>
+              </a:spcAft>
+              <a:buNone/>
+            </a:pPr>
+            <a:r>
+              <a:rPr lang="en-US" sz="3200" dirty="0">
+                <a:solidFill>
+                  <a:srgbClr val="111111"/>
+                </a:solidFill>
+                <a:latin typeface="Times New Roman" pitchFamily="34" charset="0"/>
+                <a:ea typeface="Times New Roman" pitchFamily="34" charset="-122"/>
+                <a:cs typeface="Times New Roman" pitchFamily="34" charset="-120"/>
+              </a:rPr>
+              <a:t>Water vapour varies from almost nothing over deserts to about 4 % over hot oceans and forests. It forms clouds and rain and keeps the Earth warm by absorbing heat.</a:t>
+            </a:r>
+            <a:endParaRPr lang="en-US" sz="3200" dirty="0"/>
           </a:p>
         </p:txBody>
       </p:sp>
       <p:pic>
         <p:nvPicPr>
-          <p:cNvPr id="5" name="Image 0" descr="/home/claude/f4/img/v2/met2_gases.png">    </p:cNvPr>
+          <p:cNvPr id="6" name="Image 0" descr="/home/claude/f4/img/v2/met2_gases.png">    </p:cNvPr>
           <p:cNvPicPr>
             <a:picLocks noChangeAspect="1"/>
           </p:cNvPicPr>
@@ -16066,8 +16313,8 @@
         </p:blipFill>
         <p:spPr>
           <a:xfrm>
-            <a:off x="5349240" y="2617506"/>
-            <a:ext cx="6659575" cy="2601397"/>
+            <a:off x="6537960" y="2849678"/>
+            <a:ext cx="5470855" cy="2137053"/>
           </a:xfrm>
           <a:prstGeom prst="rect">
             <a:avLst/>
@@ -16076,14 +16323,14 @@
       </p:pic>
       <p:sp>
         <p:nvSpPr>
-          <p:cNvPr id="6" name="Text 3"/>
+          <p:cNvPr id="7" name="Text 4"/>
           <p:cNvSpPr/>
           <p:nvPr/>
         </p:nvSpPr>
         <p:spPr>
           <a:xfrm>
-            <a:off x="5349240" y="6089904"/>
-            <a:ext cx="6659575" cy="347472"/>
+            <a:off x="6537960" y="6089904"/>
+            <a:ext cx="5470855" cy="347472"/>
           </a:xfrm>
           <a:prstGeom prst="rect">
             <a:avLst/>
@@ -16242,7 +16489,7 @@
         <p:spPr>
           <a:xfrm>
             <a:off x="0" y="658368"/>
-            <a:ext cx="5120640" cy="5833872"/>
+            <a:ext cx="2468880" cy="5833872"/>
           </a:xfrm>
           <a:prstGeom prst="rect">
             <a:avLst/>
@@ -16257,8 +16504,8 @@
         </p:nvSpPr>
         <p:spPr>
           <a:xfrm>
-            <a:off x="5349240" y="1005840"/>
-            <a:ext cx="6522415" cy="731520"/>
+            <a:off x="2697480" y="1005840"/>
+            <a:ext cx="9174175" cy="731520"/>
           </a:xfrm>
           <a:prstGeom prst="rect">
             <a:avLst/>
@@ -16298,8 +16545,47 @@
         </p:nvSpPr>
         <p:spPr>
           <a:xfrm>
-            <a:off x="5349240" y="1783080"/>
-            <a:ext cx="6522415" cy="4663440"/>
+            <a:off x="2697480" y="1737360"/>
+            <a:ext cx="9174175" cy="457200"/>
+          </a:xfrm>
+          <a:prstGeom prst="rect">
+            <a:avLst/>
+          </a:prstGeom>
+          <a:noFill/>
+          <a:ln/>
+        </p:spPr>
+        <p:txBody>
+          <a:bodyPr wrap="square" lIns="0" tIns="0" rIns="0" bIns="0" rtlCol="0" anchor="ctr"/>
+          <a:lstStyle/>
+          <a:p>
+            <a:pPr algn="l" indent="0" marL="0">
+              <a:buNone/>
+            </a:pPr>
+            <a:r>
+              <a:rPr lang="en-US" sz="3200" b="1" dirty="0">
+                <a:solidFill>
+                  <a:srgbClr val="990011"/>
+                </a:solidFill>
+                <a:latin typeface="Times New Roman" pitchFamily="34" charset="0"/>
+                <a:ea typeface="Times New Roman" pitchFamily="34" charset="-122"/>
+                <a:cs typeface="Times New Roman" pitchFamily="34" charset="-120"/>
+              </a:rPr>
+              <a:t>B) Variable Gases</a:t>
+            </a:r>
+            <a:endParaRPr lang="en-US" sz="3200" dirty="0"/>
+          </a:p>
+        </p:txBody>
+      </p:sp>
+      <p:sp>
+        <p:nvSpPr>
+          <p:cNvPr id="6" name="Text 3"/>
+          <p:cNvSpPr/>
+          <p:nvPr/>
+        </p:nvSpPr>
+        <p:spPr>
+          <a:xfrm>
+            <a:off x="2697480" y="2240280"/>
+            <a:ext cx="9174175" cy="4206240"/>
           </a:xfrm>
           <a:prstGeom prst="rect">
             <a:avLst/>
@@ -16326,17 +16612,13 @@
                 <a:ea typeface="Times New Roman" pitchFamily="34" charset="-122"/>
                 <a:cs typeface="Times New Roman" pitchFamily="34" charset="-120"/>
               </a:rPr>
-              <a:t>Other variable gases:</a:t>
-            </a:r>
-            <a:endParaRPr lang="en-US" sz="4000" dirty="0"/>
-          </a:p>
-          <a:p>
-            <a:pPr algn="l" marL="342900" indent="-342900">
+              <a:t>Carbon dioxide (about 0.04 %): </a:t>
+            </a:r>
+            <a:pPr algn="l" indent="0" marL="0">
               <a:spcAft>
                 <a:spcPts val="800"/>
               </a:spcAft>
-              <a:buSzPct val="100000"/>
-              <a:buChar char="•"/>
+              <a:buNone/>
             </a:pPr>
             <a:r>
               <a:rPr lang="en-US" sz="4000" dirty="0">
@@ -16347,28 +16629,7 @@
                 <a:ea typeface="Times New Roman" pitchFamily="34" charset="-122"/>
                 <a:cs typeface="Times New Roman" pitchFamily="34" charset="-120"/>
               </a:rPr>
-              <a:t>Carbon dioxide: a greenhouse gas used by plants (about 0.04 %).</a:t>
-            </a:r>
-            <a:endParaRPr lang="en-US" sz="4000" dirty="0"/>
-          </a:p>
-          <a:p>
-            <a:pPr algn="l" marL="342900" indent="-342900">
-              <a:spcAft>
-                <a:spcPts val="800"/>
-              </a:spcAft>
-              <a:buSzPct val="100000"/>
-              <a:buChar char="•"/>
-            </a:pPr>
-            <a:r>
-              <a:rPr lang="en-US" sz="4000" dirty="0">
-                <a:solidFill>
-                  <a:srgbClr val="111111"/>
-                </a:solidFill>
-                <a:latin typeface="Times New Roman" pitchFamily="34" charset="0"/>
-                <a:ea typeface="Times New Roman" pitchFamily="34" charset="-122"/>
-                <a:cs typeface="Times New Roman" pitchFamily="34" charset="-120"/>
-              </a:rPr>
-              <a:t>Methane: a strong greenhouse gas from swamps, cattle and waste.</a:t>
+              <a:t>Carbon dioxide is released by breathing, burning and volcanoes and is used by plants for photosynthesis. Its amount is rising because of fuels and bush fires, which strengthens the greenhouse effect.</a:t>
             </a:r>
             <a:endParaRPr lang="en-US" sz="4000" dirty="0"/>
           </a:p>
@@ -16545,7 +16806,7 @@
                 <a:ea typeface="Times New Roman" pitchFamily="34" charset="-122"/>
                 <a:cs typeface="Times New Roman" pitchFamily="34" charset="-120"/>
               </a:rPr>
-              <a:t>2. The Gaseous Components (continued)</a:t>
+              <a:t>2. The Gaseous Components</a:t>
             </a:r>
             <a:endParaRPr lang="en-US" sz="3600" dirty="0"/>
           </a:p>
@@ -16559,8 +16820,8 @@
         </p:nvSpPr>
         <p:spPr>
           <a:xfrm>
-            <a:off x="5349240" y="1783080"/>
-            <a:ext cx="6522415" cy="4663440"/>
+            <a:off x="5349240" y="1737360"/>
+            <a:ext cx="6522415" cy="457200"/>
           </a:xfrm>
           <a:prstGeom prst="rect">
             <a:avLst/>
@@ -16569,18 +16830,56 @@
           <a:ln/>
         </p:spPr>
         <p:txBody>
+          <a:bodyPr wrap="square" lIns="0" tIns="0" rIns="0" bIns="0" rtlCol="0" anchor="ctr"/>
+          <a:lstStyle/>
+          <a:p>
+            <a:pPr algn="l" indent="0" marL="0">
+              <a:buNone/>
+            </a:pPr>
+            <a:r>
+              <a:rPr lang="en-US" sz="3200" b="1" dirty="0">
+                <a:solidFill>
+                  <a:srgbClr val="990011"/>
+                </a:solidFill>
+                <a:latin typeface="Times New Roman" pitchFamily="34" charset="0"/>
+                <a:ea typeface="Times New Roman" pitchFamily="34" charset="-122"/>
+                <a:cs typeface="Times New Roman" pitchFamily="34" charset="-120"/>
+              </a:rPr>
+              <a:t>B) Variable Gases</a:t>
+            </a:r>
+            <a:endParaRPr lang="en-US" sz="3200" dirty="0"/>
+          </a:p>
+        </p:txBody>
+      </p:sp>
+      <p:sp>
+        <p:nvSpPr>
+          <p:cNvPr id="6" name="Text 3"/>
+          <p:cNvSpPr/>
+          <p:nvPr/>
+        </p:nvSpPr>
+        <p:spPr>
+          <a:xfrm>
+            <a:off x="5349240" y="2240280"/>
+            <a:ext cx="6522415" cy="4206240"/>
+          </a:xfrm>
+          <a:prstGeom prst="rect">
+            <a:avLst/>
+          </a:prstGeom>
+          <a:noFill/>
+          <a:ln/>
+        </p:spPr>
+        <p:txBody>
           <a:bodyPr wrap="square" lIns="0" tIns="0" rIns="0" bIns="0" rtlCol="0" anchor="t"/>
           <a:lstStyle/>
           <a:p>
-            <a:pPr algn="l" marL="342900" indent="-342900">
+            <a:pPr algn="l" indent="0" marL="0">
               <a:spcAft>
                 <a:spcPts val="800"/>
               </a:spcAft>
-              <a:buSzPct val="100000"/>
-              <a:buChar char="•"/>
-            </a:pPr>
-            <a:r>
-              <a:rPr lang="en-US" sz="4000" dirty="0">
+              <a:buNone/>
+            </a:pPr>
+            <a:r>
+              <a:rPr lang="en-US" sz="4000" b="1" dirty="0">
                 <a:solidFill>
                   <a:srgbClr val="111111"/>
                 </a:solidFill>
@@ -16588,7 +16887,24 @@
                 <a:ea typeface="Times New Roman" pitchFamily="34" charset="-122"/>
                 <a:cs typeface="Times New Roman" pitchFamily="34" charset="-120"/>
               </a:rPr>
-              <a:t>Ozone: it absorbs harmful ultraviolet rays in the stratosphere.</a:t>
+              <a:t>Methane: </a:t>
+            </a:r>
+            <a:pPr algn="l" indent="0" marL="0">
+              <a:spcAft>
+                <a:spcPts val="800"/>
+              </a:spcAft>
+              <a:buNone/>
+            </a:pPr>
+            <a:r>
+              <a:rPr lang="en-US" sz="4000" dirty="0">
+                <a:solidFill>
+                  <a:srgbClr val="111111"/>
+                </a:solidFill>
+                <a:latin typeface="Times New Roman" pitchFamily="34" charset="0"/>
+                <a:ea typeface="Times New Roman" pitchFamily="34" charset="-122"/>
+                <a:cs typeface="Times New Roman" pitchFamily="34" charset="-120"/>
+              </a:rPr>
+              <a:t>Methane comes from swamps, rice fields, cattle and rotting waste. It exists in small amounts but traps heat much more strongly than carbon dioxide.</a:t>
             </a:r>
             <a:endParaRPr lang="en-US" sz="4000" dirty="0"/>
           </a:p>
@@ -16706,129 +17022,9 @@
           </a:p>
         </p:txBody>
       </p:sp>
-      <p:sp>
-        <p:nvSpPr>
-          <p:cNvPr id="3" name="Text 1"/>
-          <p:cNvSpPr/>
-          <p:nvPr/>
-        </p:nvSpPr>
-        <p:spPr>
-          <a:xfrm>
-            <a:off x="365760" y="1005840"/>
-            <a:ext cx="11460175" cy="731520"/>
-          </a:xfrm>
-          <a:prstGeom prst="rect">
-            <a:avLst/>
-          </a:prstGeom>
-          <a:noFill/>
-          <a:ln/>
-        </p:spPr>
-        <p:txBody>
-          <a:bodyPr wrap="square" lIns="0" tIns="0" rIns="0" bIns="0" rtlCol="0" anchor="ctr">
-            <a:normAutofit/>
-          </a:bodyPr>
-          <a:lstStyle/>
-          <a:p>
-            <a:pPr algn="ctr" indent="0" marL="0">
-              <a:buNone/>
-            </a:pPr>
-            <a:r>
-              <a:rPr lang="en-US" sz="3600" b="1" dirty="0">
-                <a:solidFill>
-                  <a:srgbClr val="990011"/>
-                </a:solidFill>
-                <a:latin typeface="Times New Roman" pitchFamily="34" charset="0"/>
-                <a:ea typeface="Times New Roman" pitchFamily="34" charset="-122"/>
-                <a:cs typeface="Times New Roman" pitchFamily="34" charset="-120"/>
-              </a:rPr>
-              <a:t>3. Aerosols (Particulates)</a:t>
-            </a:r>
-            <a:endParaRPr lang="en-US" sz="3600" dirty="0"/>
-          </a:p>
-        </p:txBody>
-      </p:sp>
-      <p:sp>
-        <p:nvSpPr>
-          <p:cNvPr id="4" name="Text 2"/>
-          <p:cNvSpPr/>
-          <p:nvPr/>
-        </p:nvSpPr>
-        <p:spPr>
-          <a:xfrm>
-            <a:off x="365760" y="1783080"/>
-            <a:ext cx="4846320" cy="4617720"/>
-          </a:xfrm>
-          <a:prstGeom prst="rect">
-            <a:avLst/>
-          </a:prstGeom>
-          <a:noFill/>
-          <a:ln/>
-        </p:spPr>
-        <p:txBody>
-          <a:bodyPr wrap="square" lIns="0" tIns="0" rIns="0" bIns="0" rtlCol="0" anchor="t"/>
-          <a:lstStyle/>
-          <a:p>
-            <a:pPr algn="l" indent="0" marL="0">
-              <a:spcAft>
-                <a:spcPts val="800"/>
-              </a:spcAft>
-              <a:buNone/>
-            </a:pPr>
-            <a:r>
-              <a:rPr lang="en-US" sz="3600" i="1" dirty="0">
-                <a:solidFill>
-                  <a:srgbClr val="111111"/>
-                </a:solidFill>
-                <a:latin typeface="Times New Roman" pitchFamily="34" charset="0"/>
-                <a:ea typeface="Times New Roman" pitchFamily="34" charset="-122"/>
-                <a:cs typeface="Times New Roman" pitchFamily="34" charset="-120"/>
-              </a:rPr>
-              <a:t>The aerosols of the atmosphere are the following:</a:t>
-            </a:r>
-            <a:endParaRPr lang="en-US" sz="3600" dirty="0"/>
-          </a:p>
-          <a:p>
-            <a:pPr algn="l" indent="0" marL="0">
-              <a:spcAft>
-                <a:spcPts val="800"/>
-              </a:spcAft>
-              <a:buNone/>
-            </a:pPr>
-            <a:r>
-              <a:rPr lang="en-US" sz="3600" b="1" dirty="0">
-                <a:solidFill>
-                  <a:srgbClr val="111111"/>
-                </a:solidFill>
-                <a:latin typeface="Times New Roman" pitchFamily="34" charset="0"/>
-                <a:ea typeface="Times New Roman" pitchFamily="34" charset="-122"/>
-                <a:cs typeface="Times New Roman" pitchFamily="34" charset="-120"/>
-              </a:rPr>
-              <a:t>Liquid aerosols: </a:t>
-            </a:r>
-            <a:pPr algn="l" indent="0" marL="0">
-              <a:spcAft>
-                <a:spcPts val="800"/>
-              </a:spcAft>
-              <a:buNone/>
-            </a:pPr>
-            <a:r>
-              <a:rPr lang="en-US" sz="3600" dirty="0">
-                <a:solidFill>
-                  <a:srgbClr val="111111"/>
-                </a:solidFill>
-                <a:latin typeface="Times New Roman" pitchFamily="34" charset="0"/>
-                <a:ea typeface="Times New Roman" pitchFamily="34" charset="-122"/>
-                <a:cs typeface="Times New Roman" pitchFamily="34" charset="-120"/>
-              </a:rPr>
-              <a:t>Tiny water droplets form clouds and fog.</a:t>
-            </a:r>
-            <a:endParaRPr lang="en-US" sz="3600" dirty="0"/>
-          </a:p>
-        </p:txBody>
-      </p:sp>
       <p:pic>
         <p:nvPicPr>
-          <p:cNvPr id="5" name="Image 0" descr="/home/claude/f4/img/v2/f4_fog.jpg">    </p:cNvPr>
+          <p:cNvPr id="3" name="Image 0" descr="/home/claude/f4/img/minesec_sheet.png">    </p:cNvPr>
           <p:cNvPicPr>
             <a:picLocks noChangeAspect="1"/>
           </p:cNvPicPr>
@@ -16842,8 +17038,8 @@
         </p:blipFill>
         <p:spPr>
           <a:xfrm>
-            <a:off x="5349240" y="2682541"/>
-            <a:ext cx="6659575" cy="2471327"/>
+            <a:off x="0" y="658368"/>
+            <a:ext cx="3840480" cy="5833872"/>
           </a:xfrm>
           <a:prstGeom prst="rect">
             <a:avLst/>
@@ -16852,14 +17048,14 @@
       </p:pic>
       <p:sp>
         <p:nvSpPr>
-          <p:cNvPr id="6" name="Text 3"/>
+          <p:cNvPr id="4" name="Text 1"/>
           <p:cNvSpPr/>
           <p:nvPr/>
         </p:nvSpPr>
         <p:spPr>
           <a:xfrm>
-            <a:off x="5349240" y="6089904"/>
-            <a:ext cx="6659575" cy="347472"/>
+            <a:off x="4069080" y="1005840"/>
+            <a:ext cx="7802575" cy="731520"/>
           </a:xfrm>
           <a:prstGeom prst="rect">
             <a:avLst/>
@@ -16868,24 +17064,124 @@
           <a:ln/>
         </p:spPr>
         <p:txBody>
-          <a:bodyPr wrap="square" lIns="0" tIns="0" rIns="0" bIns="0" rtlCol="0" anchor="ctr"/>
+          <a:bodyPr wrap="square" lIns="0" tIns="0" rIns="0" bIns="0" rtlCol="0" anchor="ctr">
+            <a:normAutofit/>
+          </a:bodyPr>
           <a:lstStyle/>
           <a:p>
             <a:pPr algn="ctr" indent="0" marL="0">
               <a:buNone/>
             </a:pPr>
             <a:r>
-              <a:rPr lang="en-US" sz="1600" i="1" dirty="0">
-                <a:solidFill>
-                  <a:srgbClr val="555555"/>
+              <a:rPr lang="en-US" sz="3600" b="1" dirty="0">
+                <a:solidFill>
+                  <a:srgbClr val="990011"/>
                 </a:solidFill>
                 <a:latin typeface="Times New Roman" pitchFamily="34" charset="0"/>
                 <a:ea typeface="Times New Roman" pitchFamily="34" charset="-122"/>
                 <a:cs typeface="Times New Roman" pitchFamily="34" charset="-120"/>
               </a:rPr>
-              <a:t>Illustration: fog</a:t>
-            </a:r>
-            <a:endParaRPr lang="en-US" sz="1600" dirty="0"/>
+              <a:t>2. The Gaseous Components</a:t>
+            </a:r>
+            <a:endParaRPr lang="en-US" sz="3600" dirty="0"/>
+          </a:p>
+        </p:txBody>
+      </p:sp>
+      <p:sp>
+        <p:nvSpPr>
+          <p:cNvPr id="5" name="Text 2"/>
+          <p:cNvSpPr/>
+          <p:nvPr/>
+        </p:nvSpPr>
+        <p:spPr>
+          <a:xfrm>
+            <a:off x="4069080" y="1737360"/>
+            <a:ext cx="7802575" cy="457200"/>
+          </a:xfrm>
+          <a:prstGeom prst="rect">
+            <a:avLst/>
+          </a:prstGeom>
+          <a:noFill/>
+          <a:ln/>
+        </p:spPr>
+        <p:txBody>
+          <a:bodyPr wrap="square" lIns="0" tIns="0" rIns="0" bIns="0" rtlCol="0" anchor="ctr"/>
+          <a:lstStyle/>
+          <a:p>
+            <a:pPr algn="l" indent="0" marL="0">
+              <a:buNone/>
+            </a:pPr>
+            <a:r>
+              <a:rPr lang="en-US" sz="3200" b="1" dirty="0">
+                <a:solidFill>
+                  <a:srgbClr val="990011"/>
+                </a:solidFill>
+                <a:latin typeface="Times New Roman" pitchFamily="34" charset="0"/>
+                <a:ea typeface="Times New Roman" pitchFamily="34" charset="-122"/>
+                <a:cs typeface="Times New Roman" pitchFamily="34" charset="-120"/>
+              </a:rPr>
+              <a:t>B) Variable Gases</a:t>
+            </a:r>
+            <a:endParaRPr lang="en-US" sz="3200" dirty="0"/>
+          </a:p>
+        </p:txBody>
+      </p:sp>
+      <p:sp>
+        <p:nvSpPr>
+          <p:cNvPr id="6" name="Text 3"/>
+          <p:cNvSpPr/>
+          <p:nvPr/>
+        </p:nvSpPr>
+        <p:spPr>
+          <a:xfrm>
+            <a:off x="4069080" y="2240280"/>
+            <a:ext cx="7802575" cy="4206240"/>
+          </a:xfrm>
+          <a:prstGeom prst="rect">
+            <a:avLst/>
+          </a:prstGeom>
+          <a:noFill/>
+          <a:ln/>
+        </p:spPr>
+        <p:txBody>
+          <a:bodyPr wrap="square" lIns="0" tIns="0" rIns="0" bIns="0" rtlCol="0" anchor="t"/>
+          <a:lstStyle/>
+          <a:p>
+            <a:pPr algn="l" indent="0" marL="0">
+              <a:spcAft>
+                <a:spcPts val="800"/>
+              </a:spcAft>
+              <a:buNone/>
+            </a:pPr>
+            <a:r>
+              <a:rPr lang="en-US" sz="4000" b="1" dirty="0">
+                <a:solidFill>
+                  <a:srgbClr val="111111"/>
+                </a:solidFill>
+                <a:latin typeface="Times New Roman" pitchFamily="34" charset="0"/>
+                <a:ea typeface="Times New Roman" pitchFamily="34" charset="-122"/>
+                <a:cs typeface="Times New Roman" pitchFamily="34" charset="-120"/>
+              </a:rPr>
+              <a:t>Ozone: </a:t>
+            </a:r>
+            <a:pPr algn="l" indent="0" marL="0">
+              <a:spcAft>
+                <a:spcPts val="800"/>
+              </a:spcAft>
+              <a:buNone/>
+            </a:pPr>
+            <a:r>
+              <a:rPr lang="en-US" sz="4000" dirty="0">
+                <a:solidFill>
+                  <a:srgbClr val="111111"/>
+                </a:solidFill>
+                <a:latin typeface="Times New Roman" pitchFamily="34" charset="0"/>
+                <a:ea typeface="Times New Roman" pitchFamily="34" charset="-122"/>
+                <a:cs typeface="Times New Roman" pitchFamily="34" charset="-120"/>
+              </a:rPr>
+              <a:t>Ozone is concentrated in the stratosphere, between about 15 and 35 km. It absorbs the harmful ultraviolet rays of the Sun and so protects life on Earth.</a:t>
+            </a:r>
+            <a:endParaRPr lang="en-US" sz="4000" dirty="0"/>
           </a:p>
         </p:txBody>
       </p:sp>
@@ -17001,9 +17297,170 @@
           </a:p>
         </p:txBody>
       </p:sp>
+      <p:sp>
+        <p:nvSpPr>
+          <p:cNvPr id="3" name="Text 1"/>
+          <p:cNvSpPr/>
+          <p:nvPr/>
+        </p:nvSpPr>
+        <p:spPr>
+          <a:xfrm>
+            <a:off x="365760" y="1005840"/>
+            <a:ext cx="11460175" cy="731520"/>
+          </a:xfrm>
+          <a:prstGeom prst="rect">
+            <a:avLst/>
+          </a:prstGeom>
+          <a:noFill/>
+          <a:ln/>
+        </p:spPr>
+        <p:txBody>
+          <a:bodyPr wrap="square" lIns="0" tIns="0" rIns="0" bIns="0" rtlCol="0" anchor="ctr">
+            <a:normAutofit/>
+          </a:bodyPr>
+          <a:lstStyle/>
+          <a:p>
+            <a:pPr algn="ctr" indent="0" marL="0">
+              <a:buNone/>
+            </a:pPr>
+            <a:r>
+              <a:rPr lang="en-US" sz="3600" b="1" dirty="0">
+                <a:solidFill>
+                  <a:srgbClr val="990011"/>
+                </a:solidFill>
+                <a:latin typeface="Times New Roman" pitchFamily="34" charset="0"/>
+                <a:ea typeface="Times New Roman" pitchFamily="34" charset="-122"/>
+                <a:cs typeface="Times New Roman" pitchFamily="34" charset="-120"/>
+              </a:rPr>
+              <a:t>3. Aerosols (Particulates)</a:t>
+            </a:r>
+            <a:endParaRPr lang="en-US" sz="3600" dirty="0"/>
+          </a:p>
+        </p:txBody>
+      </p:sp>
+      <p:sp>
+        <p:nvSpPr>
+          <p:cNvPr id="4" name="Text 2"/>
+          <p:cNvSpPr/>
+          <p:nvPr/>
+        </p:nvSpPr>
+        <p:spPr>
+          <a:xfrm>
+            <a:off x="365760" y="1737360"/>
+            <a:ext cx="6035040" cy="457200"/>
+          </a:xfrm>
+          <a:prstGeom prst="rect">
+            <a:avLst/>
+          </a:prstGeom>
+          <a:noFill/>
+          <a:ln/>
+        </p:spPr>
+        <p:txBody>
+          <a:bodyPr wrap="square" lIns="0" tIns="0" rIns="0" bIns="0" rtlCol="0" anchor="ctr">
+            <a:normAutofit/>
+          </a:bodyPr>
+          <a:lstStyle/>
+          <a:p>
+            <a:pPr algn="l" indent="0" marL="0">
+              <a:buNone/>
+            </a:pPr>
+            <a:r>
+              <a:rPr lang="en-US" sz="3000" b="1" dirty="0">
+                <a:solidFill>
+                  <a:srgbClr val="990011"/>
+                </a:solidFill>
+                <a:latin typeface="Times New Roman" pitchFamily="34" charset="0"/>
+                <a:ea typeface="Times New Roman" pitchFamily="34" charset="-122"/>
+                <a:cs typeface="Times New Roman" pitchFamily="34" charset="-120"/>
+              </a:rPr>
+              <a:t>A) Liquid Aerosols</a:t>
+            </a:r>
+            <a:endParaRPr lang="en-US" sz="3000" dirty="0"/>
+          </a:p>
+        </p:txBody>
+      </p:sp>
+      <p:sp>
+        <p:nvSpPr>
+          <p:cNvPr id="5" name="Text 3"/>
+          <p:cNvSpPr/>
+          <p:nvPr/>
+        </p:nvSpPr>
+        <p:spPr>
+          <a:xfrm>
+            <a:off x="365760" y="2240280"/>
+            <a:ext cx="6035040" cy="4160520"/>
+          </a:xfrm>
+          <a:prstGeom prst="rect">
+            <a:avLst/>
+          </a:prstGeom>
+          <a:noFill/>
+          <a:ln/>
+        </p:spPr>
+        <p:txBody>
+          <a:bodyPr wrap="square" lIns="0" tIns="0" rIns="0" bIns="0" rtlCol="0" anchor="t"/>
+          <a:lstStyle/>
+          <a:p>
+            <a:pPr algn="l" indent="0" marL="0">
+              <a:spcAft>
+                <a:spcPts val="800"/>
+              </a:spcAft>
+              <a:buNone/>
+            </a:pPr>
+            <a:r>
+              <a:rPr lang="en-US" sz="3200" i="1" dirty="0">
+                <a:solidFill>
+                  <a:srgbClr val="111111"/>
+                </a:solidFill>
+                <a:latin typeface="Times New Roman" pitchFamily="34" charset="0"/>
+                <a:ea typeface="Times New Roman" pitchFamily="34" charset="-122"/>
+                <a:cs typeface="Times New Roman" pitchFamily="34" charset="-120"/>
+              </a:rPr>
+              <a:t>The liquid aerosols of the atmosphere are the following:</a:t>
+            </a:r>
+            <a:endParaRPr lang="en-US" sz="3200" dirty="0"/>
+          </a:p>
+          <a:p>
+            <a:pPr algn="l" indent="0" marL="0">
+              <a:spcAft>
+                <a:spcPts val="800"/>
+              </a:spcAft>
+              <a:buNone/>
+            </a:pPr>
+            <a:r>
+              <a:rPr lang="en-US" sz="3200" b="1" dirty="0">
+                <a:solidFill>
+                  <a:srgbClr val="111111"/>
+                </a:solidFill>
+                <a:latin typeface="Times New Roman" pitchFamily="34" charset="0"/>
+                <a:ea typeface="Times New Roman" pitchFamily="34" charset="-122"/>
+                <a:cs typeface="Times New Roman" pitchFamily="34" charset="-120"/>
+              </a:rPr>
+              <a:t>Water droplets: </a:t>
+            </a:r>
+            <a:pPr algn="l" indent="0" marL="0">
+              <a:spcAft>
+                <a:spcPts val="800"/>
+              </a:spcAft>
+              <a:buNone/>
+            </a:pPr>
+            <a:r>
+              <a:rPr lang="en-US" sz="3200" dirty="0">
+                <a:solidFill>
+                  <a:srgbClr val="111111"/>
+                </a:solidFill>
+                <a:latin typeface="Times New Roman" pitchFamily="34" charset="0"/>
+                <a:ea typeface="Times New Roman" pitchFamily="34" charset="-122"/>
+                <a:cs typeface="Times New Roman" pitchFamily="34" charset="-120"/>
+              </a:rPr>
+              <a:t>Tiny droplets of water, formed by condensation, make up clouds, fog and mist. They reflect sunlight and, when they grow large enough, fall as drizzle or rain.</a:t>
+            </a:r>
+            <a:endParaRPr lang="en-US" sz="3200" dirty="0"/>
+          </a:p>
+        </p:txBody>
+      </p:sp>
       <p:pic>
         <p:nvPicPr>
-          <p:cNvPr id="3" name="Image 0" descr="/home/claude/f4/img/minesec_sheet.png">    </p:cNvPr>
+          <p:cNvPr id="6" name="Image 0" descr="/home/claude/f4/img/v2/f4_fog.jpg">    </p:cNvPr>
           <p:cNvPicPr>
             <a:picLocks noChangeAspect="1"/>
           </p:cNvPicPr>
@@ -17017,8 +17474,8 @@
         </p:blipFill>
         <p:spPr>
           <a:xfrm>
-            <a:off x="0" y="658368"/>
-            <a:ext cx="3840480" cy="5833872"/>
+            <a:off x="6537960" y="2903104"/>
+            <a:ext cx="5470855" cy="2030200"/>
           </a:xfrm>
           <a:prstGeom prst="rect">
             <a:avLst/>
@@ -17027,14 +17484,14 @@
       </p:pic>
       <p:sp>
         <p:nvSpPr>
-          <p:cNvPr id="4" name="Text 1"/>
+          <p:cNvPr id="7" name="Text 4"/>
           <p:cNvSpPr/>
           <p:nvPr/>
         </p:nvSpPr>
         <p:spPr>
           <a:xfrm>
-            <a:off x="4069080" y="1005840"/>
-            <a:ext cx="7802575" cy="731520"/>
+            <a:off x="6537960" y="6089904"/>
+            <a:ext cx="5470855" cy="347472"/>
           </a:xfrm>
           <a:prstGeom prst="rect">
             <a:avLst/>
@@ -17043,131 +17500,24 @@
           <a:ln/>
         </p:spPr>
         <p:txBody>
-          <a:bodyPr wrap="square" lIns="0" tIns="0" rIns="0" bIns="0" rtlCol="0" anchor="ctr">
-            <a:normAutofit/>
-          </a:bodyPr>
+          <a:bodyPr wrap="square" lIns="0" tIns="0" rIns="0" bIns="0" rtlCol="0" anchor="ctr"/>
           <a:lstStyle/>
           <a:p>
             <a:pPr algn="ctr" indent="0" marL="0">
               <a:buNone/>
             </a:pPr>
             <a:r>
-              <a:rPr lang="en-US" sz="3600" b="1" dirty="0">
-                <a:solidFill>
-                  <a:srgbClr val="990011"/>
+              <a:rPr lang="en-US" sz="1600" i="1" dirty="0">
+                <a:solidFill>
+                  <a:srgbClr val="555555"/>
                 </a:solidFill>
                 <a:latin typeface="Times New Roman" pitchFamily="34" charset="0"/>
                 <a:ea typeface="Times New Roman" pitchFamily="34" charset="-122"/>
                 <a:cs typeface="Times New Roman" pitchFamily="34" charset="-120"/>
               </a:rPr>
-              <a:t>3. Aerosols (Particulates)</a:t>
-            </a:r>
-            <a:endParaRPr lang="en-US" sz="3600" dirty="0"/>
-          </a:p>
-        </p:txBody>
-      </p:sp>
-      <p:sp>
-        <p:nvSpPr>
-          <p:cNvPr id="5" name="Text 2"/>
-          <p:cNvSpPr/>
-          <p:nvPr/>
-        </p:nvSpPr>
-        <p:spPr>
-          <a:xfrm>
-            <a:off x="4069080" y="1783080"/>
-            <a:ext cx="7802575" cy="4663440"/>
-          </a:xfrm>
-          <a:prstGeom prst="rect">
-            <a:avLst/>
-          </a:prstGeom>
-          <a:noFill/>
-          <a:ln/>
-        </p:spPr>
-        <p:txBody>
-          <a:bodyPr wrap="square" lIns="0" tIns="0" rIns="0" bIns="0" rtlCol="0" anchor="t"/>
-          <a:lstStyle/>
-          <a:p>
-            <a:pPr algn="l" indent="0" marL="0">
-              <a:spcAft>
-                <a:spcPts val="800"/>
-              </a:spcAft>
-              <a:buNone/>
-            </a:pPr>
-            <a:r>
-              <a:rPr lang="en-US" sz="4000" b="1" dirty="0">
-                <a:solidFill>
-                  <a:srgbClr val="111111"/>
-                </a:solidFill>
-                <a:latin typeface="Times New Roman" pitchFamily="34" charset="0"/>
-                <a:ea typeface="Times New Roman" pitchFamily="34" charset="-122"/>
-                <a:cs typeface="Times New Roman" pitchFamily="34" charset="-120"/>
-              </a:rPr>
-              <a:t>Solid aerosols:</a:t>
-            </a:r>
-            <a:endParaRPr lang="en-US" sz="4000" dirty="0"/>
-          </a:p>
-          <a:p>
-            <a:pPr algn="l" marL="342900" indent="-342900">
-              <a:spcAft>
-                <a:spcPts val="800"/>
-              </a:spcAft>
-              <a:buSzPct val="100000"/>
-              <a:buChar char="•"/>
-            </a:pPr>
-            <a:r>
-              <a:rPr lang="en-US" sz="4000" dirty="0">
-                <a:solidFill>
-                  <a:srgbClr val="111111"/>
-                </a:solidFill>
-                <a:latin typeface="Times New Roman" pitchFamily="34" charset="0"/>
-                <a:ea typeface="Times New Roman" pitchFamily="34" charset="-122"/>
-                <a:cs typeface="Times New Roman" pitchFamily="34" charset="-120"/>
-              </a:rPr>
-              <a:t>Dust from deserts, like the Harmattan dust.</a:t>
-            </a:r>
-            <a:endParaRPr lang="en-US" sz="4000" dirty="0"/>
-          </a:p>
-          <a:p>
-            <a:pPr algn="l" marL="342900" indent="-342900">
-              <a:spcAft>
-                <a:spcPts val="800"/>
-              </a:spcAft>
-              <a:buSzPct val="100000"/>
-              <a:buChar char="•"/>
-            </a:pPr>
-            <a:r>
-              <a:rPr lang="en-US" sz="4000" dirty="0">
-                <a:solidFill>
-                  <a:srgbClr val="111111"/>
-                </a:solidFill>
-                <a:latin typeface="Times New Roman" pitchFamily="34" charset="0"/>
-                <a:ea typeface="Times New Roman" pitchFamily="34" charset="-122"/>
-                <a:cs typeface="Times New Roman" pitchFamily="34" charset="-120"/>
-              </a:rPr>
-              <a:t>Salt crystals from sea spray.</a:t>
-            </a:r>
-            <a:endParaRPr lang="en-US" sz="4000" dirty="0"/>
-          </a:p>
-          <a:p>
-            <a:pPr algn="l" marL="342900" indent="-342900">
-              <a:spcAft>
-                <a:spcPts val="800"/>
-              </a:spcAft>
-              <a:buSzPct val="100000"/>
-              <a:buChar char="•"/>
-            </a:pPr>
-            <a:r>
-              <a:rPr lang="en-US" sz="4000" dirty="0">
-                <a:solidFill>
-                  <a:srgbClr val="111111"/>
-                </a:solidFill>
-                <a:latin typeface="Times New Roman" pitchFamily="34" charset="0"/>
-                <a:ea typeface="Times New Roman" pitchFamily="34" charset="-122"/>
-                <a:cs typeface="Times New Roman" pitchFamily="34" charset="-120"/>
-              </a:rPr>
-              <a:t>Pollen and spores from plants.</a:t>
-            </a:r>
-            <a:endParaRPr lang="en-US" sz="4000" dirty="0"/>
+              <a:t>Illustration: fog</a:t>
+            </a:r>
+            <a:endParaRPr lang="en-US" sz="1600" dirty="0"/>
           </a:p>
         </p:txBody>
       </p:sp>
@@ -17300,7 +17650,7 @@
         <p:spPr>
           <a:xfrm>
             <a:off x="0" y="658368"/>
-            <a:ext cx="5120640" cy="5833872"/>
+            <a:ext cx="3840480" cy="5833872"/>
           </a:xfrm>
           <a:prstGeom prst="rect">
             <a:avLst/>
@@ -17315,8 +17665,8 @@
         </p:nvSpPr>
         <p:spPr>
           <a:xfrm>
-            <a:off x="5349240" y="1005840"/>
-            <a:ext cx="6522415" cy="731520"/>
+            <a:off x="4069080" y="1005840"/>
+            <a:ext cx="7802575" cy="731520"/>
           </a:xfrm>
           <a:prstGeom prst="rect">
             <a:avLst/>
@@ -17342,7 +17692,7 @@
                 <a:ea typeface="Times New Roman" pitchFamily="34" charset="-122"/>
                 <a:cs typeface="Times New Roman" pitchFamily="34" charset="-120"/>
               </a:rPr>
-              <a:t>3. Aerosols (Particulates) (continued)</a:t>
+              <a:t>3. Aerosols (Particulates)</a:t>
             </a:r>
             <a:endParaRPr lang="en-US" sz="3600" dirty="0"/>
           </a:p>
@@ -17356,8 +17706,8 @@
         </p:nvSpPr>
         <p:spPr>
           <a:xfrm>
-            <a:off x="5349240" y="1783080"/>
-            <a:ext cx="6522415" cy="4663440"/>
+            <a:off x="4069080" y="1737360"/>
+            <a:ext cx="7802575" cy="457200"/>
           </a:xfrm>
           <a:prstGeom prst="rect">
             <a:avLst/>
@@ -17366,18 +17716,56 @@
           <a:ln/>
         </p:spPr>
         <p:txBody>
+          <a:bodyPr wrap="square" lIns="0" tIns="0" rIns="0" bIns="0" rtlCol="0" anchor="ctr"/>
+          <a:lstStyle/>
+          <a:p>
+            <a:pPr algn="l" indent="0" marL="0">
+              <a:buNone/>
+            </a:pPr>
+            <a:r>
+              <a:rPr lang="en-US" sz="3200" b="1" dirty="0">
+                <a:solidFill>
+                  <a:srgbClr val="990011"/>
+                </a:solidFill>
+                <a:latin typeface="Times New Roman" pitchFamily="34" charset="0"/>
+                <a:ea typeface="Times New Roman" pitchFamily="34" charset="-122"/>
+                <a:cs typeface="Times New Roman" pitchFamily="34" charset="-120"/>
+              </a:rPr>
+              <a:t>A) Liquid Aerosols</a:t>
+            </a:r>
+            <a:endParaRPr lang="en-US" sz="3200" dirty="0"/>
+          </a:p>
+        </p:txBody>
+      </p:sp>
+      <p:sp>
+        <p:nvSpPr>
+          <p:cNvPr id="6" name="Text 3"/>
+          <p:cNvSpPr/>
+          <p:nvPr/>
+        </p:nvSpPr>
+        <p:spPr>
+          <a:xfrm>
+            <a:off x="4069080" y="2240280"/>
+            <a:ext cx="7802575" cy="4206240"/>
+          </a:xfrm>
+          <a:prstGeom prst="rect">
+            <a:avLst/>
+          </a:prstGeom>
+          <a:noFill/>
+          <a:ln/>
+        </p:spPr>
+        <p:txBody>
           <a:bodyPr wrap="square" lIns="0" tIns="0" rIns="0" bIns="0" rtlCol="0" anchor="t"/>
           <a:lstStyle/>
           <a:p>
-            <a:pPr algn="l" marL="342900" indent="-342900">
+            <a:pPr algn="l" indent="0" marL="0">
               <a:spcAft>
                 <a:spcPts val="800"/>
               </a:spcAft>
-              <a:buSzPct val="100000"/>
-              <a:buChar char="•"/>
-            </a:pPr>
-            <a:r>
-              <a:rPr lang="en-US" sz="4000" dirty="0">
+              <a:buNone/>
+            </a:pPr>
+            <a:r>
+              <a:rPr lang="en-US" sz="4000" b="1" dirty="0">
                 <a:solidFill>
                   <a:srgbClr val="111111"/>
                 </a:solidFill>
@@ -17385,17 +17773,13 @@
                 <a:ea typeface="Times New Roman" pitchFamily="34" charset="-122"/>
                 <a:cs typeface="Times New Roman" pitchFamily="34" charset="-120"/>
               </a:rPr>
-              <a:t>Ash and soot from volcanoes and bush fires.</a:t>
-            </a:r>
-            <a:endParaRPr lang="en-US" sz="4000" dirty="0"/>
-          </a:p>
-          <a:p>
-            <a:pPr algn="l" marL="342900" indent="-342900">
+              <a:t>Acid droplets: </a:t>
+            </a:r>
+            <a:pPr algn="l" indent="0" marL="0">
               <a:spcAft>
                 <a:spcPts val="800"/>
               </a:spcAft>
-              <a:buSzPct val="100000"/>
-              <a:buChar char="•"/>
+              <a:buNone/>
             </a:pPr>
             <a:r>
               <a:rPr lang="en-US" sz="4000" dirty="0">
@@ -17406,7 +17790,7 @@
                 <a:ea typeface="Times New Roman" pitchFamily="34" charset="-122"/>
                 <a:cs typeface="Times New Roman" pitchFamily="34" charset="-120"/>
               </a:rPr>
-              <a:t>Pollutants from factories and vehicles.</a:t>
+              <a:t>Droplets of sulphuric and nitric acid form from gases given off by volcanoes, factories and vehicles. They make the sky hazy and fall as acid rain that damages plants and buildings.</a:t>
             </a:r>
             <a:endParaRPr lang="en-US" sz="4000" dirty="0"/>
           </a:p>
@@ -17573,8 +17957,49 @@
         </p:nvSpPr>
         <p:spPr>
           <a:xfrm>
-            <a:off x="365760" y="1783080"/>
-            <a:ext cx="4846320" cy="4617720"/>
+            <a:off x="365760" y="1737360"/>
+            <a:ext cx="6035040" cy="457200"/>
+          </a:xfrm>
+          <a:prstGeom prst="rect">
+            <a:avLst/>
+          </a:prstGeom>
+          <a:noFill/>
+          <a:ln/>
+        </p:spPr>
+        <p:txBody>
+          <a:bodyPr wrap="square" lIns="0" tIns="0" rIns="0" bIns="0" rtlCol="0" anchor="ctr">
+            <a:normAutofit/>
+          </a:bodyPr>
+          <a:lstStyle/>
+          <a:p>
+            <a:pPr algn="l" indent="0" marL="0">
+              <a:buNone/>
+            </a:pPr>
+            <a:r>
+              <a:rPr lang="en-US" sz="3000" b="1" dirty="0">
+                <a:solidFill>
+                  <a:srgbClr val="990011"/>
+                </a:solidFill>
+                <a:latin typeface="Times New Roman" pitchFamily="34" charset="0"/>
+                <a:ea typeface="Times New Roman" pitchFamily="34" charset="-122"/>
+                <a:cs typeface="Times New Roman" pitchFamily="34" charset="-120"/>
+              </a:rPr>
+              <a:t>B) Solid Aerosols</a:t>
+            </a:r>
+            <a:endParaRPr lang="en-US" sz="3000" dirty="0"/>
+          </a:p>
+        </p:txBody>
+      </p:sp>
+      <p:sp>
+        <p:nvSpPr>
+          <p:cNvPr id="5" name="Text 3"/>
+          <p:cNvSpPr/>
+          <p:nvPr/>
+        </p:nvSpPr>
+        <p:spPr>
+          <a:xfrm>
+            <a:off x="365760" y="2240280"/>
+            <a:ext cx="6035040" cy="4160520"/>
           </a:xfrm>
           <a:prstGeom prst="rect">
             <a:avLst/>
@@ -17593,7 +18018,7 @@
               <a:buNone/>
             </a:pPr>
             <a:r>
-              <a:rPr lang="en-US" sz="3600" b="1" dirty="0">
+              <a:rPr lang="en-US" sz="3000" i="1" dirty="0">
                 <a:solidFill>
                   <a:srgbClr val="111111"/>
                 </a:solidFill>
@@ -17601,8 +18026,11 @@
                 <a:ea typeface="Times New Roman" pitchFamily="34" charset="-122"/>
                 <a:cs typeface="Times New Roman" pitchFamily="34" charset="-120"/>
               </a:rPr>
-              <a:t>Harmattan haze: </a:t>
-            </a:r>
+              <a:t>The solid aerosols of the atmosphere are the following:</a:t>
+            </a:r>
+            <a:endParaRPr lang="en-US" sz="3000" dirty="0"/>
+          </a:p>
+          <a:p>
             <a:pPr algn="l" indent="0" marL="0">
               <a:spcAft>
                 <a:spcPts val="800"/>
@@ -17610,7 +18038,7 @@
               <a:buNone/>
             </a:pPr>
             <a:r>
-              <a:rPr lang="en-US" sz="3600" dirty="0">
+              <a:rPr lang="en-US" sz="3000" b="1" dirty="0">
                 <a:solidFill>
                   <a:srgbClr val="111111"/>
                 </a:solidFill>
@@ -17618,15 +18046,32 @@
                 <a:ea typeface="Times New Roman" pitchFamily="34" charset="-122"/>
                 <a:cs typeface="Times New Roman" pitchFamily="34" charset="-120"/>
               </a:rPr>
-              <a:t>In the dry season, Saharan dust makes the sky of Garoua hazy and reduces visibility.</a:t>
-            </a:r>
-            <a:endParaRPr lang="en-US" sz="3600" dirty="0"/>
+              <a:t>Dust: </a:t>
+            </a:r>
+            <a:pPr algn="l" indent="0" marL="0">
+              <a:spcAft>
+                <a:spcPts val="800"/>
+              </a:spcAft>
+              <a:buNone/>
+            </a:pPr>
+            <a:r>
+              <a:rPr lang="en-US" sz="3000" dirty="0">
+                <a:solidFill>
+                  <a:srgbClr val="111111"/>
+                </a:solidFill>
+                <a:latin typeface="Times New Roman" pitchFamily="34" charset="0"/>
+                <a:ea typeface="Times New Roman" pitchFamily="34" charset="-122"/>
+                <a:cs typeface="Times New Roman" pitchFamily="34" charset="-120"/>
+              </a:rPr>
+              <a:t>Dust is lifted by winds from deserts and dry soils, as when the Harmattan brings Saharan dust to Garoua. It makes the sky hazy, reduces visibility and serves as nuclei on which droplets condense.</a:t>
+            </a:r>
+            <a:endParaRPr lang="en-US" sz="3000" dirty="0"/>
           </a:p>
         </p:txBody>
       </p:sp>
       <p:pic>
         <p:nvPicPr>
-          <p:cNvPr id="5" name="Image 0" descr="/home/claude/f4/img/v2/f2t_sandstorm.jpg">    </p:cNvPr>
+          <p:cNvPr id="6" name="Image 0" descr="/home/claude/f4/img/v2/f2t_sandstorm.jpg">    </p:cNvPr>
           <p:cNvPicPr>
             <a:picLocks noChangeAspect="1"/>
           </p:cNvPicPr>
@@ -17640,8 +18085,8 @@
         </p:blipFill>
         <p:spPr>
           <a:xfrm>
-            <a:off x="5349240" y="2450233"/>
-            <a:ext cx="6659575" cy="2935942"/>
+            <a:off x="6537960" y="2712263"/>
+            <a:ext cx="5470855" cy="2411882"/>
           </a:xfrm>
           <a:prstGeom prst="rect">
             <a:avLst/>
@@ -17650,14 +18095,14 @@
       </p:pic>
       <p:sp>
         <p:nvSpPr>
-          <p:cNvPr id="6" name="Text 3"/>
+          <p:cNvPr id="7" name="Text 4"/>
           <p:cNvSpPr/>
           <p:nvPr/>
         </p:nvSpPr>
         <p:spPr>
           <a:xfrm>
-            <a:off x="5349240" y="6089904"/>
-            <a:ext cx="6659575" cy="347472"/>
+            <a:off x="6537960" y="6089904"/>
+            <a:ext cx="5470855" cy="347472"/>
           </a:xfrm>
           <a:prstGeom prst="rect">
             <a:avLst/>
@@ -17681,7 +18126,7 @@
                 <a:ea typeface="Times New Roman" pitchFamily="34" charset="-122"/>
                 <a:cs typeface="Times New Roman" pitchFamily="34" charset="-120"/>
               </a:rPr>
-              <a:t>Illustration: dust in the air</a:t>
+              <a:t>Illustration: a dust storm</a:t>
             </a:r>
             <a:endParaRPr lang="en-US" sz="1600" dirty="0"/>
           </a:p>
@@ -17816,7 +18261,7 @@
         <p:spPr>
           <a:xfrm>
             <a:off x="0" y="658368"/>
-            <a:ext cx="5120640" cy="5833872"/>
+            <a:ext cx="3840480" cy="5833872"/>
           </a:xfrm>
           <a:prstGeom prst="rect">
             <a:avLst/>
@@ -17831,8 +18276,8 @@
         </p:nvSpPr>
         <p:spPr>
           <a:xfrm>
-            <a:off x="5349240" y="1005840"/>
-            <a:ext cx="6522415" cy="731520"/>
+            <a:off x="4069080" y="1005840"/>
+            <a:ext cx="7802575" cy="731520"/>
           </a:xfrm>
           <a:prstGeom prst="rect">
             <a:avLst/>
@@ -17872,8 +18317,47 @@
         </p:nvSpPr>
         <p:spPr>
           <a:xfrm>
-            <a:off x="5349240" y="1783080"/>
-            <a:ext cx="6522415" cy="4663440"/>
+            <a:off x="4069080" y="1737360"/>
+            <a:ext cx="7802575" cy="457200"/>
+          </a:xfrm>
+          <a:prstGeom prst="rect">
+            <a:avLst/>
+          </a:prstGeom>
+          <a:noFill/>
+          <a:ln/>
+        </p:spPr>
+        <p:txBody>
+          <a:bodyPr wrap="square" lIns="0" tIns="0" rIns="0" bIns="0" rtlCol="0" anchor="ctr"/>
+          <a:lstStyle/>
+          <a:p>
+            <a:pPr algn="l" indent="0" marL="0">
+              <a:buNone/>
+            </a:pPr>
+            <a:r>
+              <a:rPr lang="en-US" sz="3200" b="1" dirty="0">
+                <a:solidFill>
+                  <a:srgbClr val="990011"/>
+                </a:solidFill>
+                <a:latin typeface="Times New Roman" pitchFamily="34" charset="0"/>
+                <a:ea typeface="Times New Roman" pitchFamily="34" charset="-122"/>
+                <a:cs typeface="Times New Roman" pitchFamily="34" charset="-120"/>
+              </a:rPr>
+              <a:t>B) Solid Aerosols</a:t>
+            </a:r>
+            <a:endParaRPr lang="en-US" sz="3200" dirty="0"/>
+          </a:p>
+        </p:txBody>
+      </p:sp>
+      <p:sp>
+        <p:nvSpPr>
+          <p:cNvPr id="6" name="Text 3"/>
+          <p:cNvSpPr/>
+          <p:nvPr/>
+        </p:nvSpPr>
+        <p:spPr>
+          <a:xfrm>
+            <a:off x="4069080" y="2240280"/>
+            <a:ext cx="7802575" cy="4206240"/>
           </a:xfrm>
           <a:prstGeom prst="rect">
             <a:avLst/>
@@ -17900,7 +18384,7 @@
                 <a:ea typeface="Times New Roman" pitchFamily="34" charset="-122"/>
                 <a:cs typeface="Times New Roman" pitchFamily="34" charset="-120"/>
               </a:rPr>
-              <a:t>Role in weather: </a:t>
+              <a:t>Sea salt: </a:t>
             </a:r>
             <a:pPr algn="l" indent="0" marL="0">
               <a:spcAft>
@@ -17917,7 +18401,7 @@
                 <a:ea typeface="Times New Roman" pitchFamily="34" charset="-122"/>
                 <a:cs typeface="Times New Roman" pitchFamily="34" charset="-120"/>
               </a:rPr>
-              <a:t>Aerosols scatter sunlight and act as condensation nuclei on which cloud droplets form.</a:t>
+              <a:t>Salt crystals are thrown into the air when waves break and sea spray evaporates. Because they attract water, they are among the best condensation nuclei over the oceans.</a:t>
             </a:r>
             <a:endParaRPr lang="en-US" sz="4000" dirty="0"/>
           </a:p>
@@ -18029,15 +18513,156 @@
                 <a:ea typeface="Calibri" pitchFamily="34" charset="-122"/>
                 <a:cs typeface="Calibri" pitchFamily="34" charset="-120"/>
               </a:rPr>
-              <a:t>FORMATIVE EVALUATION</a:t>
+              <a:t>BOARD SUMMARY</a:t>
             </a:r>
             <a:endParaRPr lang="en-US" sz="1400" dirty="0"/>
+          </a:p>
+        </p:txBody>
+      </p:sp>
+      <p:sp>
+        <p:nvSpPr>
+          <p:cNvPr id="3" name="Text 1"/>
+          <p:cNvSpPr/>
+          <p:nvPr/>
+        </p:nvSpPr>
+        <p:spPr>
+          <a:xfrm>
+            <a:off x="365760" y="1005840"/>
+            <a:ext cx="11460175" cy="731520"/>
+          </a:xfrm>
+          <a:prstGeom prst="rect">
+            <a:avLst/>
+          </a:prstGeom>
+          <a:noFill/>
+          <a:ln/>
+        </p:spPr>
+        <p:txBody>
+          <a:bodyPr wrap="square" lIns="0" tIns="0" rIns="0" bIns="0" rtlCol="0" anchor="ctr">
+            <a:normAutofit/>
+          </a:bodyPr>
+          <a:lstStyle/>
+          <a:p>
+            <a:pPr algn="ctr" indent="0" marL="0">
+              <a:buNone/>
+            </a:pPr>
+            <a:r>
+              <a:rPr lang="en-US" sz="3600" b="1" dirty="0">
+                <a:solidFill>
+                  <a:srgbClr val="990011"/>
+                </a:solidFill>
+                <a:latin typeface="Times New Roman" pitchFamily="34" charset="0"/>
+                <a:ea typeface="Times New Roman" pitchFamily="34" charset="-122"/>
+                <a:cs typeface="Times New Roman" pitchFamily="34" charset="-120"/>
+              </a:rPr>
+              <a:t>3. Aerosols (Particulates)</a:t>
+            </a:r>
+            <a:endParaRPr lang="en-US" sz="3600" dirty="0"/>
+          </a:p>
+        </p:txBody>
+      </p:sp>
+      <p:sp>
+        <p:nvSpPr>
+          <p:cNvPr id="4" name="Text 2"/>
+          <p:cNvSpPr/>
+          <p:nvPr/>
+        </p:nvSpPr>
+        <p:spPr>
+          <a:xfrm>
+            <a:off x="365760" y="1737360"/>
+            <a:ext cx="6035040" cy="457200"/>
+          </a:xfrm>
+          <a:prstGeom prst="rect">
+            <a:avLst/>
+          </a:prstGeom>
+          <a:noFill/>
+          <a:ln/>
+        </p:spPr>
+        <p:txBody>
+          <a:bodyPr wrap="square" lIns="0" tIns="0" rIns="0" bIns="0" rtlCol="0" anchor="ctr">
+            <a:normAutofit/>
+          </a:bodyPr>
+          <a:lstStyle/>
+          <a:p>
+            <a:pPr algn="l" indent="0" marL="0">
+              <a:buNone/>
+            </a:pPr>
+            <a:r>
+              <a:rPr lang="en-US" sz="3000" b="1" dirty="0">
+                <a:solidFill>
+                  <a:srgbClr val="990011"/>
+                </a:solidFill>
+                <a:latin typeface="Times New Roman" pitchFamily="34" charset="0"/>
+                <a:ea typeface="Times New Roman" pitchFamily="34" charset="-122"/>
+                <a:cs typeface="Times New Roman" pitchFamily="34" charset="-120"/>
+              </a:rPr>
+              <a:t>B) Solid Aerosols</a:t>
+            </a:r>
+            <a:endParaRPr lang="en-US" sz="3000" dirty="0"/>
+          </a:p>
+        </p:txBody>
+      </p:sp>
+      <p:sp>
+        <p:nvSpPr>
+          <p:cNvPr id="5" name="Text 3"/>
+          <p:cNvSpPr/>
+          <p:nvPr/>
+        </p:nvSpPr>
+        <p:spPr>
+          <a:xfrm>
+            <a:off x="365760" y="2240280"/>
+            <a:ext cx="6035040" cy="4160520"/>
+          </a:xfrm>
+          <a:prstGeom prst="rect">
+            <a:avLst/>
+          </a:prstGeom>
+          <a:noFill/>
+          <a:ln/>
+        </p:spPr>
+        <p:txBody>
+          <a:bodyPr wrap="square" lIns="0" tIns="0" rIns="0" bIns="0" rtlCol="0" anchor="t"/>
+          <a:lstStyle/>
+          <a:p>
+            <a:pPr algn="l" indent="0" marL="0">
+              <a:spcAft>
+                <a:spcPts val="800"/>
+              </a:spcAft>
+              <a:buNone/>
+            </a:pPr>
+            <a:r>
+              <a:rPr lang="en-US" sz="3600" b="1" dirty="0">
+                <a:solidFill>
+                  <a:srgbClr val="111111"/>
+                </a:solidFill>
+                <a:latin typeface="Times New Roman" pitchFamily="34" charset="0"/>
+                <a:ea typeface="Times New Roman" pitchFamily="34" charset="-122"/>
+                <a:cs typeface="Times New Roman" pitchFamily="34" charset="-120"/>
+              </a:rPr>
+              <a:t>Smoke, soot and ash: </a:t>
+            </a:r>
+            <a:pPr algn="l" indent="0" marL="0">
+              <a:spcAft>
+                <a:spcPts val="800"/>
+              </a:spcAft>
+              <a:buNone/>
+            </a:pPr>
+            <a:r>
+              <a:rPr lang="en-US" sz="3600" dirty="0">
+                <a:solidFill>
+                  <a:srgbClr val="111111"/>
+                </a:solidFill>
+                <a:latin typeface="Times New Roman" pitchFamily="34" charset="0"/>
+                <a:ea typeface="Times New Roman" pitchFamily="34" charset="-122"/>
+                <a:cs typeface="Times New Roman" pitchFamily="34" charset="-120"/>
+              </a:rPr>
+              <a:t>They come from bush fires, factories, vehicles and volcanic eruptions. They absorb and scatter sunlight and can cool the Earth for months after a big eruption.</a:t>
+            </a:r>
+            <a:endParaRPr lang="en-US" sz="3600" dirty="0"/>
           </a:p>
         </p:txBody>
       </p:sp>
       <p:pic>
         <p:nvPicPr>
-          <p:cNvPr id="3" name="Image 0" descr="/home/claude/f4/img/minesec_sheet.png">    </p:cNvPr>
+          <p:cNvPr id="6" name="Image 0" descr="/home/claude/f4/img/v2/f2t_forest_fire.jpg">    </p:cNvPr>
           <p:cNvPicPr>
             <a:picLocks noChangeAspect="1"/>
           </p:cNvPicPr>
@@ -18051,8 +18676,8 @@
         </p:blipFill>
         <p:spPr>
           <a:xfrm>
-            <a:off x="0" y="658368"/>
-            <a:ext cx="5120640" cy="5833872"/>
+            <a:off x="6537960" y="2399413"/>
+            <a:ext cx="5470855" cy="3037581"/>
           </a:xfrm>
           <a:prstGeom prst="rect">
             <a:avLst/>
@@ -18061,14 +18686,14 @@
       </p:pic>
       <p:sp>
         <p:nvSpPr>
-          <p:cNvPr id="4" name="Text 1"/>
+          <p:cNvPr id="7" name="Text 4"/>
           <p:cNvSpPr/>
           <p:nvPr/>
         </p:nvSpPr>
         <p:spPr>
           <a:xfrm>
-            <a:off x="5349240" y="1005840"/>
-            <a:ext cx="6522415" cy="731520"/>
+            <a:off x="6537960" y="6089904"/>
+            <a:ext cx="5470855" cy="347472"/>
           </a:xfrm>
           <a:prstGeom prst="rect">
             <a:avLst/>
@@ -18077,68 +18702,24 @@
           <a:ln/>
         </p:spPr>
         <p:txBody>
-          <a:bodyPr wrap="square" lIns="0" tIns="0" rIns="0" bIns="0" rtlCol="0" anchor="ctr">
-            <a:normAutofit/>
-          </a:bodyPr>
+          <a:bodyPr wrap="square" lIns="0" tIns="0" rIns="0" bIns="0" rtlCol="0" anchor="ctr"/>
           <a:lstStyle/>
           <a:p>
             <a:pPr algn="ctr" indent="0" marL="0">
               <a:buNone/>
             </a:pPr>
             <a:r>
-              <a:rPr lang="en-US" sz="3600" b="1" dirty="0">
-                <a:solidFill>
-                  <a:srgbClr val="990011"/>
+              <a:rPr lang="en-US" sz="1600" i="1" dirty="0">
+                <a:solidFill>
+                  <a:srgbClr val="555555"/>
                 </a:solidFill>
                 <a:latin typeface="Times New Roman" pitchFamily="34" charset="0"/>
                 <a:ea typeface="Times New Roman" pitchFamily="34" charset="-122"/>
                 <a:cs typeface="Times New Roman" pitchFamily="34" charset="-120"/>
               </a:rPr>
-              <a:t>Evaluation 1</a:t>
-            </a:r>
-            <a:endParaRPr lang="en-US" sz="3600" dirty="0"/>
-          </a:p>
-        </p:txBody>
-      </p:sp>
-      <p:sp>
-        <p:nvSpPr>
-          <p:cNvPr id="5" name="Text 2"/>
-          <p:cNvSpPr/>
-          <p:nvPr/>
-        </p:nvSpPr>
-        <p:spPr>
-          <a:xfrm>
-            <a:off x="5349240" y="1783080"/>
-            <a:ext cx="6522415" cy="4663440"/>
-          </a:xfrm>
-          <a:prstGeom prst="rect">
-            <a:avLst/>
-          </a:prstGeom>
-          <a:noFill/>
-          <a:ln/>
-        </p:spPr>
-        <p:txBody>
-          <a:bodyPr wrap="square" lIns="0" tIns="0" rIns="0" bIns="0" rtlCol="0" anchor="t"/>
-          <a:lstStyle/>
-          <a:p>
-            <a:pPr algn="l" indent="0" marL="0">
-              <a:spcAft>
-                <a:spcPts val="800"/>
-              </a:spcAft>
-              <a:buNone/>
-            </a:pPr>
-            <a:r>
-              <a:rPr lang="en-US" sz="4000" dirty="0">
-                <a:solidFill>
-                  <a:srgbClr val="111111"/>
-                </a:solidFill>
-                <a:latin typeface="Times New Roman" pitchFamily="34" charset="0"/>
-                <a:ea typeface="Times New Roman" pitchFamily="34" charset="-122"/>
-                <a:cs typeface="Times New Roman" pitchFamily="34" charset="-120"/>
-              </a:rPr>
-              <a:t>Distinguish a constant gas from a variable gas with one example each.</a:t>
-            </a:r>
-            <a:endParaRPr lang="en-US" sz="4000" dirty="0"/>
+              <a:t>Illustration: smoke from a fire</a:t>
+            </a:r>
+            <a:endParaRPr lang="en-US" sz="1600" dirty="0"/>
           </a:p>
         </p:txBody>
       </p:sp>
@@ -18248,7 +18829,7 @@
                 <a:ea typeface="Calibri" pitchFamily="34" charset="-122"/>
                 <a:cs typeface="Calibri" pitchFamily="34" charset="-120"/>
               </a:rPr>
-              <a:t>FORMATIVE EVALUATION</a:t>
+              <a:t>BOARD SUMMARY</a:t>
             </a:r>
             <a:endParaRPr lang="en-US" sz="1400" dirty="0"/>
           </a:p>
@@ -18271,7 +18852,7 @@
         <p:spPr>
           <a:xfrm>
             <a:off x="0" y="658368"/>
-            <a:ext cx="5120640" cy="5833872"/>
+            <a:ext cx="3840480" cy="5833872"/>
           </a:xfrm>
           <a:prstGeom prst="rect">
             <a:avLst/>
@@ -18286,8 +18867,8 @@
         </p:nvSpPr>
         <p:spPr>
           <a:xfrm>
-            <a:off x="5349240" y="1005840"/>
-            <a:ext cx="6522415" cy="731520"/>
+            <a:off x="4069080" y="1005840"/>
+            <a:ext cx="7802575" cy="731520"/>
           </a:xfrm>
           <a:prstGeom prst="rect">
             <a:avLst/>
@@ -18313,7 +18894,7 @@
                 <a:ea typeface="Times New Roman" pitchFamily="34" charset="-122"/>
                 <a:cs typeface="Times New Roman" pitchFamily="34" charset="-120"/>
               </a:rPr>
-              <a:t>Expected Answer</a:t>
+              <a:t>3. Aerosols (Particulates)</a:t>
             </a:r>
             <a:endParaRPr lang="en-US" sz="3600" dirty="0"/>
           </a:p>
@@ -18327,8 +18908,47 @@
         </p:nvSpPr>
         <p:spPr>
           <a:xfrm>
-            <a:off x="5349240" y="1783080"/>
-            <a:ext cx="6522415" cy="4663440"/>
+            <a:off x="4069080" y="1737360"/>
+            <a:ext cx="7802575" cy="457200"/>
+          </a:xfrm>
+          <a:prstGeom prst="rect">
+            <a:avLst/>
+          </a:prstGeom>
+          <a:noFill/>
+          <a:ln/>
+        </p:spPr>
+        <p:txBody>
+          <a:bodyPr wrap="square" lIns="0" tIns="0" rIns="0" bIns="0" rtlCol="0" anchor="ctr"/>
+          <a:lstStyle/>
+          <a:p>
+            <a:pPr algn="l" indent="0" marL="0">
+              <a:buNone/>
+            </a:pPr>
+            <a:r>
+              <a:rPr lang="en-US" sz="3200" b="1" dirty="0">
+                <a:solidFill>
+                  <a:srgbClr val="990011"/>
+                </a:solidFill>
+                <a:latin typeface="Times New Roman" pitchFamily="34" charset="0"/>
+                <a:ea typeface="Times New Roman" pitchFamily="34" charset="-122"/>
+                <a:cs typeface="Times New Roman" pitchFamily="34" charset="-120"/>
+              </a:rPr>
+              <a:t>B) Solid Aerosols</a:t>
+            </a:r>
+            <a:endParaRPr lang="en-US" sz="3200" dirty="0"/>
+          </a:p>
+        </p:txBody>
+      </p:sp>
+      <p:sp>
+        <p:nvSpPr>
+          <p:cNvPr id="6" name="Text 3"/>
+          <p:cNvSpPr/>
+          <p:nvPr/>
+        </p:nvSpPr>
+        <p:spPr>
+          <a:xfrm>
+            <a:off x="4069080" y="2240280"/>
+            <a:ext cx="7802575" cy="4206240"/>
           </a:xfrm>
           <a:prstGeom prst="rect">
             <a:avLst/>
@@ -18347,7 +18967,7 @@
               <a:buNone/>
             </a:pPr>
             <a:r>
-              <a:rPr lang="en-US" sz="4000" dirty="0">
+              <a:rPr lang="en-US" sz="4000" b="1" dirty="0">
                 <a:solidFill>
                   <a:srgbClr val="111111"/>
                 </a:solidFill>
@@ -18355,7 +18975,24 @@
                 <a:ea typeface="Times New Roman" pitchFamily="34" charset="-122"/>
                 <a:cs typeface="Times New Roman" pitchFamily="34" charset="-120"/>
               </a:rPr>
-              <a:t>A constant gas keeps the same proportion everywhere (oxygen); a variable gas changes in amount (water vapour).</a:t>
+              <a:t>Pollen and spores: </a:t>
+            </a:r>
+            <a:pPr algn="l" indent="0" marL="0">
+              <a:spcAft>
+                <a:spcPts val="800"/>
+              </a:spcAft>
+              <a:buNone/>
+            </a:pPr>
+            <a:r>
+              <a:rPr lang="en-US" sz="4000" dirty="0">
+                <a:solidFill>
+                  <a:srgbClr val="111111"/>
+                </a:solidFill>
+                <a:latin typeface="Times New Roman" pitchFamily="34" charset="0"/>
+                <a:ea typeface="Times New Roman" pitchFamily="34" charset="-122"/>
+                <a:cs typeface="Times New Roman" pitchFamily="34" charset="-120"/>
+              </a:rPr>
+              <a:t>Plants and fungi release pollen grains and spores that are carried by the wind. They also act as condensation nuclei and cause allergies in some people.</a:t>
             </a:r>
             <a:endParaRPr lang="en-US" sz="4000" dirty="0"/>
           </a:p>
@@ -18795,7 +19432,7 @@
                 <a:ea typeface="Times New Roman" pitchFamily="34" charset="-122"/>
                 <a:cs typeface="Times New Roman" pitchFamily="34" charset="-120"/>
               </a:rPr>
-              <a:t>Evaluation 2</a:t>
+              <a:t>Evaluation 1</a:t>
             </a:r>
             <a:endParaRPr lang="en-US" sz="3600" dirty="0"/>
           </a:p>
@@ -18837,7 +19474,7 @@
                 <a:ea typeface="Times New Roman" pitchFamily="34" charset="-122"/>
                 <a:cs typeface="Times New Roman" pitchFamily="34" charset="-120"/>
               </a:rPr>
-              <a:t>Why are aerosols important in the formation of clouds?</a:t>
+              <a:t>Distinguish a constant gas from a variable gas with one example each.</a:t>
             </a:r>
             <a:endParaRPr lang="en-US" sz="4000" dirty="0"/>
           </a:p>
@@ -19056,7 +19693,7 @@
                 <a:ea typeface="Times New Roman" pitchFamily="34" charset="-122"/>
                 <a:cs typeface="Times New Roman" pitchFamily="34" charset="-120"/>
               </a:rPr>
-              <a:t>Water vapour condenses on them; they act as condensation nuclei.</a:t>
+              <a:t>A constant gas keeps the same proportion everywhere (oxygen); a variable gas changes in amount (water vapour).</a:t>
             </a:r>
             <a:endParaRPr lang="en-US" sz="4000" dirty="0"/>
           </a:p>
@@ -19168,7 +19805,7 @@
                 <a:ea typeface="Calibri" pitchFamily="34" charset="-122"/>
                 <a:cs typeface="Calibri" pitchFamily="34" charset="-120"/>
               </a:rPr>
-              <a:t>REMEDIATION</a:t>
+              <a:t>FORMATIVE EVALUATION</a:t>
             </a:r>
             <a:endParaRPr lang="en-US" sz="1400" dirty="0"/>
           </a:p>
@@ -19191,7 +19828,7 @@
         <p:spPr>
           <a:xfrm>
             <a:off x="0" y="658368"/>
-            <a:ext cx="3840480" cy="5833872"/>
+            <a:ext cx="5120640" cy="5833872"/>
           </a:xfrm>
           <a:prstGeom prst="rect">
             <a:avLst/>
@@ -19206,8 +19843,8 @@
         </p:nvSpPr>
         <p:spPr>
           <a:xfrm>
-            <a:off x="4069080" y="1005840"/>
-            <a:ext cx="7802575" cy="731520"/>
+            <a:off x="5349240" y="1005840"/>
+            <a:ext cx="6522415" cy="731520"/>
           </a:xfrm>
           <a:prstGeom prst="rect">
             <a:avLst/>
@@ -19233,7 +19870,7 @@
                 <a:ea typeface="Times New Roman" pitchFamily="34" charset="-122"/>
                 <a:cs typeface="Times New Roman" pitchFamily="34" charset="-120"/>
               </a:rPr>
-              <a:t>Remediation</a:t>
+              <a:t>Evaluation 2</a:t>
             </a:r>
             <a:endParaRPr lang="en-US" sz="3600" dirty="0"/>
           </a:p>
@@ -19247,8 +19884,8 @@
         </p:nvSpPr>
         <p:spPr>
           <a:xfrm>
-            <a:off x="4069080" y="1783080"/>
-            <a:ext cx="7802575" cy="4663440"/>
+            <a:off x="5349240" y="1783080"/>
+            <a:ext cx="6522415" cy="4663440"/>
           </a:xfrm>
           <a:prstGeom prst="rect">
             <a:avLst/>
@@ -19267,7 +19904,7 @@
               <a:buNone/>
             </a:pPr>
             <a:r>
-              <a:rPr lang="en-US" sz="4000" b="1" dirty="0">
+              <a:rPr lang="en-US" sz="4000" dirty="0">
                 <a:solidFill>
                   <a:srgbClr val="111111"/>
                 </a:solidFill>
@@ -19275,73 +19912,7 @@
                 <a:ea typeface="Times New Roman" pitchFamily="34" charset="-122"/>
                 <a:cs typeface="Times New Roman" pitchFamily="34" charset="-120"/>
               </a:rPr>
-              <a:t>Fill in the blanks:</a:t>
-            </a:r>
-            <a:endParaRPr lang="en-US" sz="4000" dirty="0"/>
-          </a:p>
-          <a:p>
-            <a:pPr algn="l" marL="342900" indent="-342900">
-              <a:spcAft>
-                <a:spcPts val="800"/>
-              </a:spcAft>
-              <a:buSzPct val="100000"/>
-              <a:buFont typeface="+mj-lt"/>
-              <a:buAutoNum type="arabicPeriod" startAt="1"/>
-            </a:pPr>
-            <a:r>
-              <a:rPr lang="en-US" sz="4000" dirty="0">
-                <a:solidFill>
-                  <a:srgbClr val="111111"/>
-                </a:solidFill>
-                <a:latin typeface="Times New Roman" pitchFamily="34" charset="0"/>
-                <a:ea typeface="Times New Roman" pitchFamily="34" charset="-122"/>
-                <a:cs typeface="Times New Roman" pitchFamily="34" charset="-120"/>
-              </a:rPr>
-              <a:t>Nitrogen forms about ______ % of the air.</a:t>
-            </a:r>
-            <a:endParaRPr lang="en-US" sz="4000" dirty="0"/>
-          </a:p>
-          <a:p>
-            <a:pPr algn="l" marL="342900" indent="-342900">
-              <a:spcAft>
-                <a:spcPts val="800"/>
-              </a:spcAft>
-              <a:buSzPct val="100000"/>
-              <a:buFont typeface="+mj-lt"/>
-              <a:buAutoNum type="arabicPeriod" startAt="1"/>
-            </a:pPr>
-            <a:r>
-              <a:rPr lang="en-US" sz="4000" dirty="0">
-                <a:solidFill>
-                  <a:srgbClr val="111111"/>
-                </a:solidFill>
-                <a:latin typeface="Times New Roman" pitchFamily="34" charset="0"/>
-                <a:ea typeface="Times New Roman" pitchFamily="34" charset="-122"/>
-                <a:cs typeface="Times New Roman" pitchFamily="34" charset="-120"/>
-              </a:rPr>
-              <a:t>Ozone absorbs ______ radiation.</a:t>
-            </a:r>
-            <a:endParaRPr lang="en-US" sz="4000" dirty="0"/>
-          </a:p>
-          <a:p>
-            <a:pPr algn="l" marL="342900" indent="-342900">
-              <a:spcAft>
-                <a:spcPts val="800"/>
-              </a:spcAft>
-              <a:buSzPct val="100000"/>
-              <a:buFont typeface="+mj-lt"/>
-              <a:buAutoNum type="arabicPeriod" startAt="1"/>
-            </a:pPr>
-            <a:r>
-              <a:rPr lang="en-US" sz="4000" dirty="0">
-                <a:solidFill>
-                  <a:srgbClr val="111111"/>
-                </a:solidFill>
-                <a:latin typeface="Times New Roman" pitchFamily="34" charset="0"/>
-                <a:ea typeface="Times New Roman" pitchFamily="34" charset="-122"/>
-                <a:cs typeface="Times New Roman" pitchFamily="34" charset="-120"/>
-              </a:rPr>
-              <a:t>Harmattan dust is a ______ aerosol.</a:t>
+              <a:t>Why are aerosols important in the formation of clouds?</a:t>
             </a:r>
             <a:endParaRPr lang="en-US" sz="4000" dirty="0"/>
           </a:p>
@@ -19453,7 +20024,7 @@
                 <a:ea typeface="Calibri" pitchFamily="34" charset="-122"/>
                 <a:cs typeface="Calibri" pitchFamily="34" charset="-120"/>
               </a:rPr>
-              <a:t>HOMEWORK</a:t>
+              <a:t>FORMATIVE EVALUATION</a:t>
             </a:r>
             <a:endParaRPr lang="en-US" sz="1400" dirty="0"/>
           </a:p>
@@ -19518,7 +20089,7 @@
                 <a:ea typeface="Times New Roman" pitchFamily="34" charset="-122"/>
                 <a:cs typeface="Times New Roman" pitchFamily="34" charset="-120"/>
               </a:rPr>
-              <a:t>Homework</a:t>
+              <a:t>Expected Answer</a:t>
             </a:r>
             <a:endParaRPr lang="en-US" sz="3600" dirty="0"/>
           </a:p>
@@ -19560,7 +20131,7 @@
                 <a:ea typeface="Times New Roman" pitchFamily="34" charset="-122"/>
                 <a:cs typeface="Times New Roman" pitchFamily="34" charset="-120"/>
               </a:rPr>
-              <a:t>Name the four layers of the atmosphere.</a:t>
+              <a:t>Water vapour condenses on them; they act as condensation nuclei.</a:t>
             </a:r>
             <a:endParaRPr lang="en-US" sz="4000" dirty="0"/>
           </a:p>
@@ -19672,7 +20243,7 @@
                 <a:ea typeface="Calibri" pitchFamily="34" charset="-122"/>
                 <a:cs typeface="Calibri" pitchFamily="34" charset="-120"/>
               </a:rPr>
-              <a:t>NEXT LESSON</a:t>
+              <a:t>REMEDIATION</a:t>
             </a:r>
             <a:endParaRPr lang="en-US" sz="1400" dirty="0"/>
           </a:p>
@@ -19695,7 +20266,7 @@
         <p:spPr>
           <a:xfrm>
             <a:off x="0" y="658368"/>
-            <a:ext cx="5120640" cy="5833872"/>
+            <a:ext cx="3840480" cy="5833872"/>
           </a:xfrm>
           <a:prstGeom prst="rect">
             <a:avLst/>
@@ -19710,8 +20281,8 @@
         </p:nvSpPr>
         <p:spPr>
           <a:xfrm>
-            <a:off x="5349240" y="1005840"/>
-            <a:ext cx="6522415" cy="731520"/>
+            <a:off x="4069080" y="1005840"/>
+            <a:ext cx="7802575" cy="731520"/>
           </a:xfrm>
           <a:prstGeom prst="rect">
             <a:avLst/>
@@ -19737,7 +20308,7 @@
                 <a:ea typeface="Times New Roman" pitchFamily="34" charset="-122"/>
                 <a:cs typeface="Times New Roman" pitchFamily="34" charset="-120"/>
               </a:rPr>
-              <a:t>Next Lesson</a:t>
+              <a:t>Remediation</a:t>
             </a:r>
             <a:endParaRPr lang="en-US" sz="3600" dirty="0"/>
           </a:p>
@@ -19751,8 +20322,8 @@
         </p:nvSpPr>
         <p:spPr>
           <a:xfrm>
-            <a:off x="5349240" y="1783080"/>
-            <a:ext cx="6522415" cy="4663440"/>
+            <a:off x="4069080" y="1783080"/>
+            <a:ext cx="7802575" cy="4663440"/>
           </a:xfrm>
           <a:prstGeom prst="rect">
             <a:avLst/>
@@ -19761,10 +20332,10 @@
           <a:ln/>
         </p:spPr>
         <p:txBody>
-          <a:bodyPr wrap="square" lIns="0" tIns="0" rIns="0" bIns="0" rtlCol="0" anchor="ctr"/>
-          <a:lstStyle/>
-          <a:p>
-            <a:pPr algn="ctr" indent="0" marL="0">
+          <a:bodyPr wrap="square" lIns="0" tIns="0" rIns="0" bIns="0" rtlCol="0" anchor="t"/>
+          <a:lstStyle/>
+          <a:p>
+            <a:pPr algn="l" indent="0" marL="0">
               <a:spcAft>
                 <a:spcPts val="800"/>
               </a:spcAft>
@@ -19779,27 +20350,73 @@
                 <a:ea typeface="Times New Roman" pitchFamily="34" charset="-122"/>
                 <a:cs typeface="Times New Roman" pitchFamily="34" charset="-120"/>
               </a:rPr>
-              <a:t>Our next lesson will be on:</a:t>
+              <a:t>Fill in the blanks:</a:t>
             </a:r>
             <a:endParaRPr lang="en-US" sz="4000" dirty="0"/>
           </a:p>
           <a:p>
-            <a:pPr algn="ctr" indent="0" marL="0">
+            <a:pPr algn="l" marL="342900" indent="-342900">
               <a:spcAft>
                 <a:spcPts val="800"/>
               </a:spcAft>
-              <a:buNone/>
-            </a:pPr>
-            <a:r>
-              <a:rPr lang="en-US" sz="4000" b="1" dirty="0">
-                <a:solidFill>
-                  <a:srgbClr val="990011"/>
+              <a:buSzPct val="100000"/>
+              <a:buFont typeface="+mj-lt"/>
+              <a:buAutoNum type="arabicPeriod" startAt="1"/>
+            </a:pPr>
+            <a:r>
+              <a:rPr lang="en-US" sz="4000" dirty="0">
+                <a:solidFill>
+                  <a:srgbClr val="111111"/>
                 </a:solidFill>
                 <a:latin typeface="Times New Roman" pitchFamily="34" charset="0"/>
                 <a:ea typeface="Times New Roman" pitchFamily="34" charset="-122"/>
                 <a:cs typeface="Times New Roman" pitchFamily="34" charset="-120"/>
               </a:rPr>
-              <a:t>Lesson 2: Structure of the Atmosphere</a:t>
+              <a:t>Nitrogen forms about ______ % of the air.</a:t>
+            </a:r>
+            <a:endParaRPr lang="en-US" sz="4000" dirty="0"/>
+          </a:p>
+          <a:p>
+            <a:pPr algn="l" marL="342900" indent="-342900">
+              <a:spcAft>
+                <a:spcPts val="800"/>
+              </a:spcAft>
+              <a:buSzPct val="100000"/>
+              <a:buFont typeface="+mj-lt"/>
+              <a:buAutoNum type="arabicPeriod" startAt="1"/>
+            </a:pPr>
+            <a:r>
+              <a:rPr lang="en-US" sz="4000" dirty="0">
+                <a:solidFill>
+                  <a:srgbClr val="111111"/>
+                </a:solidFill>
+                <a:latin typeface="Times New Roman" pitchFamily="34" charset="0"/>
+                <a:ea typeface="Times New Roman" pitchFamily="34" charset="-122"/>
+                <a:cs typeface="Times New Roman" pitchFamily="34" charset="-120"/>
+              </a:rPr>
+              <a:t>Ozone absorbs ______ radiation.</a:t>
+            </a:r>
+            <a:endParaRPr lang="en-US" sz="4000" dirty="0"/>
+          </a:p>
+          <a:p>
+            <a:pPr algn="l" marL="342900" indent="-342900">
+              <a:spcAft>
+                <a:spcPts val="800"/>
+              </a:spcAft>
+              <a:buSzPct val="100000"/>
+              <a:buFont typeface="+mj-lt"/>
+              <a:buAutoNum type="arabicPeriod" startAt="1"/>
+            </a:pPr>
+            <a:r>
+              <a:rPr lang="en-US" sz="4000" dirty="0">
+                <a:solidFill>
+                  <a:srgbClr val="111111"/>
+                </a:solidFill>
+                <a:latin typeface="Times New Roman" pitchFamily="34" charset="0"/>
+                <a:ea typeface="Times New Roman" pitchFamily="34" charset="-122"/>
+                <a:cs typeface="Times New Roman" pitchFamily="34" charset="-120"/>
+              </a:rPr>
+              <a:t>Harmattan dust is a ______ aerosol.</a:t>
             </a:r>
             <a:endParaRPr lang="en-US" sz="4000" dirty="0"/>
           </a:p>
@@ -19911,22 +20528,46 @@
                 <a:ea typeface="Calibri" pitchFamily="34" charset="-122"/>
                 <a:cs typeface="Calibri" pitchFamily="34" charset="-120"/>
               </a:rPr>
-              <a:t>BILINGUAL GAME</a:t>
+              <a:t>HOMEWORK</a:t>
             </a:r>
             <a:endParaRPr lang="en-US" sz="1400" dirty="0"/>
           </a:p>
         </p:txBody>
       </p:sp>
-      <p:sp>
-        <p:nvSpPr>
-          <p:cNvPr id="3" name="Text 1"/>
+      <p:pic>
+        <p:nvPicPr>
+          <p:cNvPr id="3" name="Image 0" descr="/home/claude/f4/img/minesec_sheet.png">    </p:cNvPr>
+          <p:cNvPicPr>
+            <a:picLocks noChangeAspect="1"/>
+          </p:cNvPicPr>
+          <p:nvPr/>
+        </p:nvPicPr>
+        <p:blipFill>
+          <a:blip r:embed="rId1"/>
+          <a:stretch>
+            <a:fillRect/>
+          </a:stretch>
+        </p:blipFill>
+        <p:spPr>
+          <a:xfrm>
+            <a:off x="0" y="658368"/>
+            <a:ext cx="5120640" cy="5833872"/>
+          </a:xfrm>
+          <a:prstGeom prst="rect">
+            <a:avLst/>
+          </a:prstGeom>
+        </p:spPr>
+      </p:pic>
+      <p:sp>
+        <p:nvSpPr>
+          <p:cNvPr id="4" name="Text 1"/>
           <p:cNvSpPr/>
           <p:nvPr/>
         </p:nvSpPr>
         <p:spPr>
           <a:xfrm>
-            <a:off x="457200" y="1005840"/>
-            <a:ext cx="11277295" cy="731520"/>
+            <a:off x="5349240" y="1005840"/>
+            <a:ext cx="6522415" cy="731520"/>
           </a:xfrm>
           <a:prstGeom prst="rect">
             <a:avLst/>
@@ -19935,7 +20576,9 @@
           <a:ln/>
         </p:spPr>
         <p:txBody>
-          <a:bodyPr wrap="square" lIns="0" tIns="0" rIns="0" bIns="0" rtlCol="0" anchor="ctr"/>
+          <a:bodyPr wrap="square" lIns="0" tIns="0" rIns="0" bIns="0" rtlCol="0" anchor="ctr">
+            <a:normAutofit/>
+          </a:bodyPr>
           <a:lstStyle/>
           <a:p>
             <a:pPr algn="ctr" indent="0" marL="0">
@@ -19950,6 +20593,438 @@
                 <a:ea typeface="Times New Roman" pitchFamily="34" charset="-122"/>
                 <a:cs typeface="Times New Roman" pitchFamily="34" charset="-120"/>
               </a:rPr>
+              <a:t>Homework</a:t>
+            </a:r>
+            <a:endParaRPr lang="en-US" sz="3600" dirty="0"/>
+          </a:p>
+        </p:txBody>
+      </p:sp>
+      <p:sp>
+        <p:nvSpPr>
+          <p:cNvPr id="5" name="Text 2"/>
+          <p:cNvSpPr/>
+          <p:nvPr/>
+        </p:nvSpPr>
+        <p:spPr>
+          <a:xfrm>
+            <a:off x="5349240" y="1783080"/>
+            <a:ext cx="6522415" cy="4663440"/>
+          </a:xfrm>
+          <a:prstGeom prst="rect">
+            <a:avLst/>
+          </a:prstGeom>
+          <a:noFill/>
+          <a:ln/>
+        </p:spPr>
+        <p:txBody>
+          <a:bodyPr wrap="square" lIns="0" tIns="0" rIns="0" bIns="0" rtlCol="0" anchor="t"/>
+          <a:lstStyle/>
+          <a:p>
+            <a:pPr algn="l" indent="0" marL="0">
+              <a:spcAft>
+                <a:spcPts val="800"/>
+              </a:spcAft>
+              <a:buNone/>
+            </a:pPr>
+            <a:r>
+              <a:rPr lang="en-US" sz="4000" dirty="0">
+                <a:solidFill>
+                  <a:srgbClr val="111111"/>
+                </a:solidFill>
+                <a:latin typeface="Times New Roman" pitchFamily="34" charset="0"/>
+                <a:ea typeface="Times New Roman" pitchFamily="34" charset="-122"/>
+                <a:cs typeface="Times New Roman" pitchFamily="34" charset="-120"/>
+              </a:rPr>
+              <a:t>Name the four layers of the atmosphere.</a:t>
+            </a:r>
+            <a:endParaRPr lang="en-US" sz="4000" dirty="0"/>
+          </a:p>
+        </p:txBody>
+      </p:sp>
+      <p:sp>
+        <p:nvSpPr>
+          <p:cNvPr id="25" name="Slide Number Placeholder 0"/>
+          <p:cNvSpPr>
+            <a:spLocks noGrp="1"/>
+          </p:cNvSpPr>
+          <p:nvPr>
+            <p:ph type="sldNum" sz="quarter" idx="4294967295"/>
+          </p:nvPr>
+        </p:nvSpPr>
+        <p:spPr>
+          <a:xfrm>
+            <a:off x="27432" y="91440"/>
+            <a:ext cx="585216" cy="475488"/>
+          </a:xfrm>
+          <a:prstGeom prst="rect">
+            <a:avLst/>
+          </a:prstGeom>
+          <a:extLst>
+            <a:ext uri="{C572A759-6A51-4108-AA02-DFA0A04FC94B}">
+              <ma14:wrappingTextBoxFlag xmlns:ma14="http://schemas.microsoft.com/office/mac/drawingml/2011/main" val="0"/>
+            </a:ext>
+          </a:extLst>
+        </p:spPr>
+        <p:txBody>
+          <a:bodyPr/>
+          <a:lstStyle>
+            <a:lvl1pPr>
+              <a:defRPr sz="2000">
+                <a:solidFill>
+                  <a:srgbClr val="FFFFFF"/>
+                </a:solidFill>
+                <a:latin typeface="Calibri"/>
+                <a:ea typeface="Calibri"/>
+                <a:cs typeface="Calibri"/>
+              </a:defRPr>
+            </a:lvl1pPr>
+          </a:lstStyle>
+          <a:p>
+            <a:pPr algn="ctr"/>
+            <a:fld id="{F7021451-1387-4CA6-816F-3879F97B5CBC}" type="slidenum">
+              <a:rPr b="1" lang="en-US"/>
+              <a:t>55</a:t>
+            </a:fld>
+            <a:endParaRPr lang="en-US"/>
+          </a:p>
+        </p:txBody>
+      </p:sp>
+    </p:spTree>
+  </p:cSld>
+  <p:clrMapOvr>
+    <a:masterClrMapping/>
+  </p:clrMapOvr>
+</p:sld>
+</file>
+
+<file path=ppt/slides/slide56.xml><?xml version="1.0" encoding="utf-8"?>
+<p:sld xmlns:a="http://schemas.openxmlformats.org/drawingml/2006/main" xmlns:r="http://schemas.openxmlformats.org/officeDocument/2006/relationships" xmlns:p="http://schemas.openxmlformats.org/presentationml/2006/main">
+  <p:cSld name="Slide 56">
+    <p:spTree>
+      <p:nvGrpSpPr>
+        <p:cNvPr id="1" name=""/>
+        <p:cNvGrpSpPr/>
+        <p:nvPr/>
+      </p:nvGrpSpPr>
+      <p:grpSpPr>
+        <a:xfrm>
+          <a:off x="0" y="0"/>
+          <a:ext cx="0" cy="0"/>
+          <a:chOff x="0" y="0"/>
+          <a:chExt cx="0" cy="0"/>
+        </a:xfrm>
+      </p:grpSpPr>
+      <p:sp>
+        <p:nvSpPr>
+          <p:cNvPr id="2" name="Text 0"/>
+          <p:cNvSpPr/>
+          <p:nvPr/>
+        </p:nvSpPr>
+        <p:spPr>
+          <a:xfrm>
+            <a:off x="457200" y="713232"/>
+            <a:ext cx="11368735" cy="274320"/>
+          </a:xfrm>
+          <a:prstGeom prst="rect">
+            <a:avLst/>
+          </a:prstGeom>
+          <a:noFill/>
+          <a:ln/>
+        </p:spPr>
+        <p:txBody>
+          <a:bodyPr wrap="square" lIns="0" tIns="0" rIns="0" bIns="0" rtlCol="0" anchor="ctr"/>
+          <a:lstStyle/>
+          <a:p>
+            <a:pPr algn="r" indent="0" marL="0">
+              <a:buNone/>
+            </a:pPr>
+            <a:r>
+              <a:rPr lang="en-US" sz="1400" b="1" dirty="0">
+                <a:solidFill>
+                  <a:srgbClr val="1C3F6E"/>
+                </a:solidFill>
+                <a:latin typeface="Calibri" pitchFamily="34" charset="0"/>
+                <a:ea typeface="Calibri" pitchFamily="34" charset="-122"/>
+                <a:cs typeface="Calibri" pitchFamily="34" charset="-120"/>
+              </a:rPr>
+              <a:t>NEXT LESSON</a:t>
+            </a:r>
+            <a:endParaRPr lang="en-US" sz="1400" dirty="0"/>
+          </a:p>
+        </p:txBody>
+      </p:sp>
+      <p:pic>
+        <p:nvPicPr>
+          <p:cNvPr id="3" name="Image 0" descr="/home/claude/f4/img/minesec_sheet.png">    </p:cNvPr>
+          <p:cNvPicPr>
+            <a:picLocks noChangeAspect="1"/>
+          </p:cNvPicPr>
+          <p:nvPr/>
+        </p:nvPicPr>
+        <p:blipFill>
+          <a:blip r:embed="rId1"/>
+          <a:stretch>
+            <a:fillRect/>
+          </a:stretch>
+        </p:blipFill>
+        <p:spPr>
+          <a:xfrm>
+            <a:off x="0" y="658368"/>
+            <a:ext cx="5120640" cy="5833872"/>
+          </a:xfrm>
+          <a:prstGeom prst="rect">
+            <a:avLst/>
+          </a:prstGeom>
+        </p:spPr>
+      </p:pic>
+      <p:sp>
+        <p:nvSpPr>
+          <p:cNvPr id="4" name="Text 1"/>
+          <p:cNvSpPr/>
+          <p:nvPr/>
+        </p:nvSpPr>
+        <p:spPr>
+          <a:xfrm>
+            <a:off x="5349240" y="1005840"/>
+            <a:ext cx="6522415" cy="731520"/>
+          </a:xfrm>
+          <a:prstGeom prst="rect">
+            <a:avLst/>
+          </a:prstGeom>
+          <a:noFill/>
+          <a:ln/>
+        </p:spPr>
+        <p:txBody>
+          <a:bodyPr wrap="square" lIns="0" tIns="0" rIns="0" bIns="0" rtlCol="0" anchor="ctr">
+            <a:normAutofit/>
+          </a:bodyPr>
+          <a:lstStyle/>
+          <a:p>
+            <a:pPr algn="ctr" indent="0" marL="0">
+              <a:buNone/>
+            </a:pPr>
+            <a:r>
+              <a:rPr lang="en-US" sz="3600" b="1" dirty="0">
+                <a:solidFill>
+                  <a:srgbClr val="990011"/>
+                </a:solidFill>
+                <a:latin typeface="Times New Roman" pitchFamily="34" charset="0"/>
+                <a:ea typeface="Times New Roman" pitchFamily="34" charset="-122"/>
+                <a:cs typeface="Times New Roman" pitchFamily="34" charset="-120"/>
+              </a:rPr>
+              <a:t>Next Lesson</a:t>
+            </a:r>
+            <a:endParaRPr lang="en-US" sz="3600" dirty="0"/>
+          </a:p>
+        </p:txBody>
+      </p:sp>
+      <p:sp>
+        <p:nvSpPr>
+          <p:cNvPr id="5" name="Text 2"/>
+          <p:cNvSpPr/>
+          <p:nvPr/>
+        </p:nvSpPr>
+        <p:spPr>
+          <a:xfrm>
+            <a:off x="5349240" y="1783080"/>
+            <a:ext cx="6522415" cy="4663440"/>
+          </a:xfrm>
+          <a:prstGeom prst="rect">
+            <a:avLst/>
+          </a:prstGeom>
+          <a:noFill/>
+          <a:ln/>
+        </p:spPr>
+        <p:txBody>
+          <a:bodyPr wrap="square" lIns="0" tIns="0" rIns="0" bIns="0" rtlCol="0" anchor="ctr"/>
+          <a:lstStyle/>
+          <a:p>
+            <a:pPr algn="ctr" indent="0" marL="0">
+              <a:spcAft>
+                <a:spcPts val="800"/>
+              </a:spcAft>
+              <a:buNone/>
+            </a:pPr>
+            <a:r>
+              <a:rPr lang="en-US" sz="4000" b="1" dirty="0">
+                <a:solidFill>
+                  <a:srgbClr val="111111"/>
+                </a:solidFill>
+                <a:latin typeface="Times New Roman" pitchFamily="34" charset="0"/>
+                <a:ea typeface="Times New Roman" pitchFamily="34" charset="-122"/>
+                <a:cs typeface="Times New Roman" pitchFamily="34" charset="-120"/>
+              </a:rPr>
+              <a:t>Our next lesson will be on:</a:t>
+            </a:r>
+            <a:endParaRPr lang="en-US" sz="4000" dirty="0"/>
+          </a:p>
+          <a:p>
+            <a:pPr algn="ctr" indent="0" marL="0">
+              <a:spcAft>
+                <a:spcPts val="800"/>
+              </a:spcAft>
+              <a:buNone/>
+            </a:pPr>
+            <a:r>
+              <a:rPr lang="en-US" sz="4000" b="1" dirty="0">
+                <a:solidFill>
+                  <a:srgbClr val="990011"/>
+                </a:solidFill>
+                <a:latin typeface="Times New Roman" pitchFamily="34" charset="0"/>
+                <a:ea typeface="Times New Roman" pitchFamily="34" charset="-122"/>
+                <a:cs typeface="Times New Roman" pitchFamily="34" charset="-120"/>
+              </a:rPr>
+              <a:t>Lesson 2: Structure of the Atmosphere</a:t>
+            </a:r>
+            <a:endParaRPr lang="en-US" sz="4000" dirty="0"/>
+          </a:p>
+        </p:txBody>
+      </p:sp>
+      <p:sp>
+        <p:nvSpPr>
+          <p:cNvPr id="25" name="Slide Number Placeholder 0"/>
+          <p:cNvSpPr>
+            <a:spLocks noGrp="1"/>
+          </p:cNvSpPr>
+          <p:nvPr>
+            <p:ph type="sldNum" sz="quarter" idx="4294967295"/>
+          </p:nvPr>
+        </p:nvSpPr>
+        <p:spPr>
+          <a:xfrm>
+            <a:off x="27432" y="91440"/>
+            <a:ext cx="585216" cy="475488"/>
+          </a:xfrm>
+          <a:prstGeom prst="rect">
+            <a:avLst/>
+          </a:prstGeom>
+          <a:extLst>
+            <a:ext uri="{C572A759-6A51-4108-AA02-DFA0A04FC94B}">
+              <ma14:wrappingTextBoxFlag xmlns:ma14="http://schemas.microsoft.com/office/mac/drawingml/2011/main" val="0"/>
+            </a:ext>
+          </a:extLst>
+        </p:spPr>
+        <p:txBody>
+          <a:bodyPr/>
+          <a:lstStyle>
+            <a:lvl1pPr>
+              <a:defRPr sz="2000">
+                <a:solidFill>
+                  <a:srgbClr val="FFFFFF"/>
+                </a:solidFill>
+                <a:latin typeface="Calibri"/>
+                <a:ea typeface="Calibri"/>
+                <a:cs typeface="Calibri"/>
+              </a:defRPr>
+            </a:lvl1pPr>
+          </a:lstStyle>
+          <a:p>
+            <a:pPr algn="ctr"/>
+            <a:fld id="{F7021451-1387-4CA6-816F-3879F97B5CBC}" type="slidenum">
+              <a:rPr b="1" lang="en-US"/>
+              <a:t>56</a:t>
+            </a:fld>
+            <a:endParaRPr lang="en-US"/>
+          </a:p>
+        </p:txBody>
+      </p:sp>
+    </p:spTree>
+  </p:cSld>
+  <p:clrMapOvr>
+    <a:masterClrMapping/>
+  </p:clrMapOvr>
+</p:sld>
+</file>
+
+<file path=ppt/slides/slide57.xml><?xml version="1.0" encoding="utf-8"?>
+<p:sld xmlns:a="http://schemas.openxmlformats.org/drawingml/2006/main" xmlns:r="http://schemas.openxmlformats.org/officeDocument/2006/relationships" xmlns:p="http://schemas.openxmlformats.org/presentationml/2006/main">
+  <p:cSld name="Slide 57">
+    <p:spTree>
+      <p:nvGrpSpPr>
+        <p:cNvPr id="1" name=""/>
+        <p:cNvGrpSpPr/>
+        <p:nvPr/>
+      </p:nvGrpSpPr>
+      <p:grpSpPr>
+        <a:xfrm>
+          <a:off x="0" y="0"/>
+          <a:ext cx="0" cy="0"/>
+          <a:chOff x="0" y="0"/>
+          <a:chExt cx="0" cy="0"/>
+        </a:xfrm>
+      </p:grpSpPr>
+      <p:sp>
+        <p:nvSpPr>
+          <p:cNvPr id="2" name="Text 0"/>
+          <p:cNvSpPr/>
+          <p:nvPr/>
+        </p:nvSpPr>
+        <p:spPr>
+          <a:xfrm>
+            <a:off x="457200" y="713232"/>
+            <a:ext cx="11368735" cy="274320"/>
+          </a:xfrm>
+          <a:prstGeom prst="rect">
+            <a:avLst/>
+          </a:prstGeom>
+          <a:noFill/>
+          <a:ln/>
+        </p:spPr>
+        <p:txBody>
+          <a:bodyPr wrap="square" lIns="0" tIns="0" rIns="0" bIns="0" rtlCol="0" anchor="ctr"/>
+          <a:lstStyle/>
+          <a:p>
+            <a:pPr algn="r" indent="0" marL="0">
+              <a:buNone/>
+            </a:pPr>
+            <a:r>
+              <a:rPr lang="en-US" sz="1400" b="1" dirty="0">
+                <a:solidFill>
+                  <a:srgbClr val="1C3F6E"/>
+                </a:solidFill>
+                <a:latin typeface="Calibri" pitchFamily="34" charset="0"/>
+                <a:ea typeface="Calibri" pitchFamily="34" charset="-122"/>
+                <a:cs typeface="Calibri" pitchFamily="34" charset="-120"/>
+              </a:rPr>
+              <a:t>BILINGUAL GAME</a:t>
+            </a:r>
+            <a:endParaRPr lang="en-US" sz="1400" dirty="0"/>
+          </a:p>
+        </p:txBody>
+      </p:sp>
+      <p:sp>
+        <p:nvSpPr>
+          <p:cNvPr id="3" name="Text 1"/>
+          <p:cNvSpPr/>
+          <p:nvPr/>
+        </p:nvSpPr>
+        <p:spPr>
+          <a:xfrm>
+            <a:off x="457200" y="1005840"/>
+            <a:ext cx="11277295" cy="731520"/>
+          </a:xfrm>
+          <a:prstGeom prst="rect">
+            <a:avLst/>
+          </a:prstGeom>
+          <a:noFill/>
+          <a:ln/>
+        </p:spPr>
+        <p:txBody>
+          <a:bodyPr wrap="square" lIns="0" tIns="0" rIns="0" bIns="0" rtlCol="0" anchor="ctr"/>
+          <a:lstStyle/>
+          <a:p>
+            <a:pPr algn="ctr" indent="0" marL="0">
+              <a:buNone/>
+            </a:pPr>
+            <a:r>
+              <a:rPr lang="en-US" sz="3600" b="1" dirty="0">
+                <a:solidFill>
+                  <a:srgbClr val="990011"/>
+                </a:solidFill>
+                <a:latin typeface="Times New Roman" pitchFamily="34" charset="0"/>
+                <a:ea typeface="Times New Roman" pitchFamily="34" charset="-122"/>
+                <a:cs typeface="Times New Roman" pitchFamily="34" charset="-120"/>
+              </a:rPr>
               <a:t>Bilingual Game (Jeu Bilingue)</a:t>
             </a:r>
             <a:endParaRPr lang="en-US" sz="3600" dirty="0"/>
@@ -19958,7 +21033,7 @@
       </p:sp>
       <p:graphicFrame>
         <p:nvGraphicFramePr>
-          <p:cNvPr id="56" name="Table 0"/>
+          <p:cNvPr id="58" name="Table 0"/>
           <p:cNvGraphicFramePr>
             <a:graphicFrameLocks noGrp="1"/>
           </p:cNvGraphicFramePr>
@@ -20994,7 +22069,7 @@
             <a:pPr algn="ctr"/>
             <a:fld id="{F7021451-1387-4CA6-816F-3879F97B5CBC}" type="slidenum">
               <a:rPr b="1" lang="en-US"/>
-              <a:t>55</a:t>
+              <a:t>57</a:t>
             </a:fld>
             <a:endParaRPr lang="en-US"/>
           </a:p>
@@ -21008,9 +22083,9 @@
 </p:sld>
 </file>
 
-<file path=ppt/slides/slide56.xml><?xml version="1.0" encoding="utf-8"?>
+<file path=ppt/slides/slide58.xml><?xml version="1.0" encoding="utf-8"?>
 <p:sld xmlns:a="http://schemas.openxmlformats.org/drawingml/2006/main" xmlns:r="http://schemas.openxmlformats.org/officeDocument/2006/relationships" xmlns:p="http://schemas.openxmlformats.org/presentationml/2006/main">
-  <p:cSld name="Slide 56">
+  <p:cSld name="Slide 58">
     <p:spTree>
       <p:nvGrpSpPr>
         <p:cNvPr id="1" name=""/>
@@ -21105,7 +22180,7 @@
       </p:sp>
       <p:graphicFrame>
         <p:nvGraphicFramePr>
-          <p:cNvPr id="57" name="Table 0"/>
+          <p:cNvPr id="59" name="Table 0"/>
           <p:cNvGraphicFramePr>
             <a:graphicFrameLocks noGrp="1"/>
           </p:cNvGraphicFramePr>
@@ -21727,7 +22802,7 @@
             <a:pPr algn="ctr"/>
             <a:fld id="{F7021451-1387-4CA6-816F-3879F97B5CBC}" type="slidenum">
               <a:rPr b="1" lang="en-US"/>
-              <a:t>56</a:t>
+              <a:t>58</a:t>
             </a:fld>
             <a:endParaRPr lang="en-US"/>
           </a:p>
@@ -21741,9 +22816,9 @@
 </p:sld>
 </file>
 
-<file path=ppt/slides/slide57.xml><?xml version="1.0" encoding="utf-8"?>
+<file path=ppt/slides/slide59.xml><?xml version="1.0" encoding="utf-8"?>
 <p:sld xmlns:a="http://schemas.openxmlformats.org/drawingml/2006/main" xmlns:r="http://schemas.openxmlformats.org/officeDocument/2006/relationships" xmlns:p="http://schemas.openxmlformats.org/presentationml/2006/main">
-  <p:cSld name="Slide 57">
+  <p:cSld name="Slide 59">
     <p:spTree>
       <p:nvGrpSpPr>
         <p:cNvPr id="1" name=""/>
@@ -21838,7 +22913,7 @@
       </p:sp>
       <p:graphicFrame>
         <p:nvGraphicFramePr>
-          <p:cNvPr id="58" name="Table 0"/>
+          <p:cNvPr id="60" name="Table 0"/>
           <p:cNvGraphicFramePr>
             <a:graphicFrameLocks noGrp="1"/>
           </p:cNvGraphicFramePr>
@@ -21948,7 +23023,7 @@
                           <a:ea typeface="Calibri" pitchFamily="34" charset="-122"/>
                           <a:cs typeface="Calibri" pitchFamily="34" charset="-120"/>
                         </a:rPr>
-                        <a:t>DEFINITIONS; Meaning and Importance of the Atmosphere; The Gaseous Components; Aerosols (Particulates).</a:t>
+                        <a:t>DEFINITIONS; Meaning of the Atmosphere; Constant Gases; Variable Gases; Liquid Aerosols; Solid Aerosols.</a:t>
                       </a:r>
                       <a:endParaRPr lang="en-US" sz="1600" dirty="0">
                         <a:latin typeface="Calibri" charset="0"/>
@@ -22598,656 +23673,6 @@
             <a:pPr algn="ctr"/>
             <a:fld id="{F7021451-1387-4CA6-816F-3879F97B5CBC}" type="slidenum">
               <a:rPr b="1" lang="en-US"/>
-              <a:t>57</a:t>
-            </a:fld>
-            <a:endParaRPr lang="en-US"/>
-          </a:p>
-        </p:txBody>
-      </p:sp>
-    </p:spTree>
-  </p:cSld>
-  <p:clrMapOvr>
-    <a:masterClrMapping/>
-  </p:clrMapOvr>
-</p:sld>
-</file>
-
-<file path=ppt/slides/slide58.xml><?xml version="1.0" encoding="utf-8"?>
-<p:sld xmlns:a="http://schemas.openxmlformats.org/drawingml/2006/main" xmlns:r="http://schemas.openxmlformats.org/officeDocument/2006/relationships" xmlns:p="http://schemas.openxmlformats.org/presentationml/2006/main">
-  <p:cSld name="Slide 58">
-    <p:spTree>
-      <p:nvGrpSpPr>
-        <p:cNvPr id="1" name=""/>
-        <p:cNvGrpSpPr/>
-        <p:nvPr/>
-      </p:nvGrpSpPr>
-      <p:grpSpPr>
-        <a:xfrm>
-          <a:off x="0" y="0"/>
-          <a:ext cx="0" cy="0"/>
-          <a:chOff x="0" y="0"/>
-          <a:chExt cx="0" cy="0"/>
-        </a:xfrm>
-      </p:grpSpPr>
-      <p:sp>
-        <p:nvSpPr>
-          <p:cNvPr id="2" name="Text 0"/>
-          <p:cNvSpPr/>
-          <p:nvPr/>
-        </p:nvSpPr>
-        <p:spPr>
-          <a:xfrm>
-            <a:off x="457200" y="713232"/>
-            <a:ext cx="11368735" cy="274320"/>
-          </a:xfrm>
-          <a:prstGeom prst="rect">
-            <a:avLst/>
-          </a:prstGeom>
-          <a:noFill/>
-          <a:ln/>
-        </p:spPr>
-        <p:txBody>
-          <a:bodyPr wrap="square" lIns="0" tIns="0" rIns="0" bIns="0" rtlCol="0" anchor="ctr"/>
-          <a:lstStyle/>
-          <a:p>
-            <a:pPr algn="r" indent="0" marL="0">
-              <a:buNone/>
-            </a:pPr>
-            <a:r>
-              <a:rPr lang="en-US" sz="1400" b="1" dirty="0">
-                <a:solidFill>
-                  <a:srgbClr val="1C3F6E"/>
-                </a:solidFill>
-                <a:latin typeface="Calibri" pitchFamily="34" charset="0"/>
-                <a:ea typeface="Calibri" pitchFamily="34" charset="-122"/>
-                <a:cs typeface="Calibri" pitchFamily="34" charset="-120"/>
-              </a:rPr>
-              <a:t>TEACHER'S NOTE</a:t>
-            </a:r>
-            <a:endParaRPr lang="en-US" sz="1400" dirty="0"/>
-          </a:p>
-        </p:txBody>
-      </p:sp>
-      <p:pic>
-        <p:nvPicPr>
-          <p:cNvPr id="3" name="Image 0" descr="/home/claude/f4/img/minesec_sheet.png">    </p:cNvPr>
-          <p:cNvPicPr>
-            <a:picLocks noChangeAspect="1"/>
-          </p:cNvPicPr>
-          <p:nvPr/>
-        </p:nvPicPr>
-        <p:blipFill>
-          <a:blip r:embed="rId1"/>
-          <a:stretch>
-            <a:fillRect/>
-          </a:stretch>
-        </p:blipFill>
-        <p:spPr>
-          <a:xfrm>
-            <a:off x="0" y="658368"/>
-            <a:ext cx="3840480" cy="5833872"/>
-          </a:xfrm>
-          <a:prstGeom prst="rect">
-            <a:avLst/>
-          </a:prstGeom>
-        </p:spPr>
-      </p:pic>
-      <p:sp>
-        <p:nvSpPr>
-          <p:cNvPr id="4" name="Text 1"/>
-          <p:cNvSpPr/>
-          <p:nvPr/>
-        </p:nvSpPr>
-        <p:spPr>
-          <a:xfrm>
-            <a:off x="4069080" y="1005840"/>
-            <a:ext cx="7802575" cy="731520"/>
-          </a:xfrm>
-          <a:prstGeom prst="rect">
-            <a:avLst/>
-          </a:prstGeom>
-          <a:noFill/>
-          <a:ln/>
-        </p:spPr>
-        <p:txBody>
-          <a:bodyPr wrap="square" lIns="0" tIns="0" rIns="0" bIns="0" rtlCol="0" anchor="ctr">
-            <a:normAutofit/>
-          </a:bodyPr>
-          <a:lstStyle/>
-          <a:p>
-            <a:pPr algn="ctr" indent="0" marL="0">
-              <a:buNone/>
-            </a:pPr>
-            <a:r>
-              <a:rPr lang="en-US" sz="3600" b="1" dirty="0">
-                <a:solidFill>
-                  <a:srgbClr val="990011"/>
-                </a:solidFill>
-                <a:latin typeface="Times New Roman" pitchFamily="34" charset="0"/>
-                <a:ea typeface="Times New Roman" pitchFamily="34" charset="-122"/>
-                <a:cs typeface="Times New Roman" pitchFamily="34" charset="-120"/>
-              </a:rPr>
-              <a:t>Teacher's Note</a:t>
-            </a:r>
-            <a:endParaRPr lang="en-US" sz="3600" dirty="0"/>
-          </a:p>
-        </p:txBody>
-      </p:sp>
-      <p:sp>
-        <p:nvSpPr>
-          <p:cNvPr id="5" name="Text 2"/>
-          <p:cNvSpPr/>
-          <p:nvPr/>
-        </p:nvSpPr>
-        <p:spPr>
-          <a:xfrm>
-            <a:off x="4069080" y="1783080"/>
-            <a:ext cx="7802575" cy="4663440"/>
-          </a:xfrm>
-          <a:prstGeom prst="rect">
-            <a:avLst/>
-          </a:prstGeom>
-          <a:noFill/>
-          <a:ln/>
-        </p:spPr>
-        <p:txBody>
-          <a:bodyPr wrap="square" lIns="0" tIns="0" rIns="0" bIns="0" rtlCol="0" anchor="t"/>
-          <a:lstStyle/>
-          <a:p>
-            <a:pPr algn="l" marL="342900" indent="-342900">
-              <a:spcAft>
-                <a:spcPts val="800"/>
-              </a:spcAft>
-              <a:buSzPct val="100000"/>
-              <a:buChar char="•"/>
-            </a:pPr>
-            <a:r>
-              <a:rPr lang="en-US" sz="2000" dirty="0">
-                <a:solidFill>
-                  <a:srgbClr val="111111"/>
-                </a:solidFill>
-                <a:latin typeface="Calibri" pitchFamily="34" charset="0"/>
-                <a:ea typeface="Calibri" pitchFamily="34" charset="-122"/>
-                <a:cs typeface="Calibri" pitchFamily="34" charset="-120"/>
-              </a:rPr>
-              <a:t>Timing: Homework correction, plan, objectives 8 min | Recall, situation, action 10 min | 5 activities 30 min | Board summary (copying) 30 min | Evaluation, remediation 10 min | Homework, next lesson 5 min | Logbook 7 min</a:t>
-            </a:r>
-            <a:endParaRPr lang="en-US" sz="2000" dirty="0"/>
-          </a:p>
-          <a:p>
-            <a:pPr algn="l" marL="342900" indent="-342900">
-              <a:spcAft>
-                <a:spcPts val="800"/>
-              </a:spcAft>
-              <a:buSzPct val="100000"/>
-              <a:buChar char="•"/>
-            </a:pPr>
-            <a:r>
-              <a:rPr lang="en-US" sz="2000" dirty="0">
-                <a:solidFill>
-                  <a:srgbClr val="111111"/>
-                </a:solidFill>
-                <a:latin typeface="Calibri" pitchFamily="34" charset="0"/>
-                <a:ea typeface="Calibri" pitchFamily="34" charset="-122"/>
-                <a:cs typeface="Calibri" pitchFamily="34" charset="-120"/>
-              </a:rPr>
-              <a:t>Without the projector (Activity 1): compare the atmosphere to a blanket.</a:t>
-            </a:r>
-            <a:endParaRPr lang="en-US" sz="2000" dirty="0"/>
-          </a:p>
-          <a:p>
-            <a:pPr algn="l" marL="342900" indent="-342900">
-              <a:spcAft>
-                <a:spcPts val="800"/>
-              </a:spcAft>
-              <a:buSzPct val="100000"/>
-              <a:buChar char="•"/>
-            </a:pPr>
-            <a:r>
-              <a:rPr lang="en-US" sz="2000" dirty="0">
-                <a:solidFill>
-                  <a:srgbClr val="111111"/>
-                </a:solidFill>
-                <a:latin typeface="Calibri" pitchFamily="34" charset="0"/>
-                <a:ea typeface="Calibri" pitchFamily="34" charset="-122"/>
-                <a:cs typeface="Calibri" pitchFamily="34" charset="-120"/>
-              </a:rPr>
-              <a:t>Without the projector (Activity 2): draw the pie chart on the board.</a:t>
-            </a:r>
-            <a:endParaRPr lang="en-US" sz="2000" dirty="0"/>
-          </a:p>
-          <a:p>
-            <a:pPr algn="l" marL="342900" indent="-342900">
-              <a:spcAft>
-                <a:spcPts val="800"/>
-              </a:spcAft>
-              <a:buSzPct val="100000"/>
-              <a:buChar char="•"/>
-            </a:pPr>
-            <a:r>
-              <a:rPr lang="en-US" sz="2000" dirty="0">
-                <a:solidFill>
-                  <a:srgbClr val="111111"/>
-                </a:solidFill>
-                <a:latin typeface="Calibri" pitchFamily="34" charset="0"/>
-                <a:ea typeface="Calibri" pitchFamily="34" charset="-122"/>
-                <a:cs typeface="Calibri" pitchFamily="34" charset="-120"/>
-              </a:rPr>
-              <a:t>Without the projector (Activity 3): compare January and August in Garoua.</a:t>
-            </a:r>
-            <a:endParaRPr lang="en-US" sz="2000" dirty="0"/>
-          </a:p>
-          <a:p>
-            <a:pPr algn="l" marL="342900" indent="-342900">
-              <a:spcAft>
-                <a:spcPts val="800"/>
-              </a:spcAft>
-              <a:buSzPct val="100000"/>
-              <a:buChar char="•"/>
-            </a:pPr>
-            <a:r>
-              <a:rPr lang="en-US" sz="2000" dirty="0">
-                <a:solidFill>
-                  <a:srgbClr val="111111"/>
-                </a:solidFill>
-                <a:latin typeface="Calibri" pitchFamily="34" charset="0"/>
-                <a:ea typeface="Calibri" pitchFamily="34" charset="-122"/>
-                <a:cs typeface="Calibri" pitchFamily="34" charset="-120"/>
-              </a:rPr>
-              <a:t>Without the projector (Activity 4): look at dust on a car in January.</a:t>
-            </a:r>
-            <a:endParaRPr lang="en-US" sz="2000" dirty="0"/>
-          </a:p>
-          <a:p>
-            <a:pPr algn="l" marL="342900" indent="-342900">
-              <a:spcAft>
-                <a:spcPts val="800"/>
-              </a:spcAft>
-              <a:buSzPct val="100000"/>
-              <a:buChar char="•"/>
-            </a:pPr>
-            <a:r>
-              <a:rPr lang="en-US" sz="2000" dirty="0">
-                <a:solidFill>
-                  <a:srgbClr val="111111"/>
-                </a:solidFill>
-                <a:latin typeface="Calibri" pitchFamily="34" charset="0"/>
-                <a:ea typeface="Calibri" pitchFamily="34" charset="-122"/>
-                <a:cs typeface="Calibri" pitchFamily="34" charset="-120"/>
-              </a:rPr>
-              <a:t>Without the projector (Activity 5): breathe on a cold glass.</a:t>
-            </a:r>
-            <a:endParaRPr lang="en-US" sz="2000" dirty="0"/>
-          </a:p>
-        </p:txBody>
-      </p:sp>
-      <p:sp>
-        <p:nvSpPr>
-          <p:cNvPr id="25" name="Slide Number Placeholder 0"/>
-          <p:cNvSpPr>
-            <a:spLocks noGrp="1"/>
-          </p:cNvSpPr>
-          <p:nvPr>
-            <p:ph type="sldNum" sz="quarter" idx="4294967295"/>
-          </p:nvPr>
-        </p:nvSpPr>
-        <p:spPr>
-          <a:xfrm>
-            <a:off x="27432" y="91440"/>
-            <a:ext cx="585216" cy="475488"/>
-          </a:xfrm>
-          <a:prstGeom prst="rect">
-            <a:avLst/>
-          </a:prstGeom>
-          <a:extLst>
-            <a:ext uri="{C572A759-6A51-4108-AA02-DFA0A04FC94B}">
-              <ma14:wrappingTextBoxFlag xmlns:ma14="http://schemas.microsoft.com/office/mac/drawingml/2011/main" val="0"/>
-            </a:ext>
-          </a:extLst>
-        </p:spPr>
-        <p:txBody>
-          <a:bodyPr/>
-          <a:lstStyle>
-            <a:lvl1pPr>
-              <a:defRPr sz="2000">
-                <a:solidFill>
-                  <a:srgbClr val="FFFFFF"/>
-                </a:solidFill>
-                <a:latin typeface="Calibri"/>
-                <a:ea typeface="Calibri"/>
-                <a:cs typeface="Calibri"/>
-              </a:defRPr>
-            </a:lvl1pPr>
-          </a:lstStyle>
-          <a:p>
-            <a:pPr algn="ctr"/>
-            <a:fld id="{F7021451-1387-4CA6-816F-3879F97B5CBC}" type="slidenum">
-              <a:rPr b="1" lang="en-US"/>
-              <a:t>58</a:t>
-            </a:fld>
-            <a:endParaRPr lang="en-US"/>
-          </a:p>
-        </p:txBody>
-      </p:sp>
-    </p:spTree>
-  </p:cSld>
-  <p:clrMapOvr>
-    <a:masterClrMapping/>
-  </p:clrMapOvr>
-</p:sld>
-</file>
-
-<file path=ppt/slides/slide59.xml><?xml version="1.0" encoding="utf-8"?>
-<p:sld xmlns:a="http://schemas.openxmlformats.org/drawingml/2006/main" xmlns:r="http://schemas.openxmlformats.org/officeDocument/2006/relationships" xmlns:p="http://schemas.openxmlformats.org/presentationml/2006/main">
-  <p:cSld name="Slide 59">
-    <p:spTree>
-      <p:nvGrpSpPr>
-        <p:cNvPr id="1" name=""/>
-        <p:cNvGrpSpPr/>
-        <p:nvPr/>
-      </p:nvGrpSpPr>
-      <p:grpSpPr>
-        <a:xfrm>
-          <a:off x="0" y="0"/>
-          <a:ext cx="0" cy="0"/>
-          <a:chOff x="0" y="0"/>
-          <a:chExt cx="0" cy="0"/>
-        </a:xfrm>
-      </p:grpSpPr>
-      <p:sp>
-        <p:nvSpPr>
-          <p:cNvPr id="2" name="Text 0"/>
-          <p:cNvSpPr/>
-          <p:nvPr/>
-        </p:nvSpPr>
-        <p:spPr>
-          <a:xfrm>
-            <a:off x="457200" y="713232"/>
-            <a:ext cx="11368735" cy="274320"/>
-          </a:xfrm>
-          <a:prstGeom prst="rect">
-            <a:avLst/>
-          </a:prstGeom>
-          <a:noFill/>
-          <a:ln/>
-        </p:spPr>
-        <p:txBody>
-          <a:bodyPr wrap="square" lIns="0" tIns="0" rIns="0" bIns="0" rtlCol="0" anchor="ctr"/>
-          <a:lstStyle/>
-          <a:p>
-            <a:pPr algn="r" indent="0" marL="0">
-              <a:buNone/>
-            </a:pPr>
-            <a:r>
-              <a:rPr lang="en-US" sz="1400" b="1" dirty="0">
-                <a:solidFill>
-                  <a:srgbClr val="1C3F6E"/>
-                </a:solidFill>
-                <a:latin typeface="Calibri" pitchFamily="34" charset="0"/>
-                <a:ea typeface="Calibri" pitchFamily="34" charset="-122"/>
-                <a:cs typeface="Calibri" pitchFamily="34" charset="-120"/>
-              </a:rPr>
-              <a:t>REFERENCES</a:t>
-            </a:r>
-            <a:endParaRPr lang="en-US" sz="1400" dirty="0"/>
-          </a:p>
-        </p:txBody>
-      </p:sp>
-      <p:pic>
-        <p:nvPicPr>
-          <p:cNvPr id="3" name="Image 0" descr="/home/claude/f4/img/minesec_sheet.png">    </p:cNvPr>
-          <p:cNvPicPr>
-            <a:picLocks noChangeAspect="1"/>
-          </p:cNvPicPr>
-          <p:nvPr/>
-        </p:nvPicPr>
-        <p:blipFill>
-          <a:blip r:embed="rId1"/>
-          <a:stretch>
-            <a:fillRect/>
-          </a:stretch>
-        </p:blipFill>
-        <p:spPr>
-          <a:xfrm>
-            <a:off x="0" y="658368"/>
-            <a:ext cx="3840480" cy="5833872"/>
-          </a:xfrm>
-          <a:prstGeom prst="rect">
-            <a:avLst/>
-          </a:prstGeom>
-        </p:spPr>
-      </p:pic>
-      <p:sp>
-        <p:nvSpPr>
-          <p:cNvPr id="4" name="Text 1"/>
-          <p:cNvSpPr/>
-          <p:nvPr/>
-        </p:nvSpPr>
-        <p:spPr>
-          <a:xfrm>
-            <a:off x="4069080" y="1005840"/>
-            <a:ext cx="7802575" cy="731520"/>
-          </a:xfrm>
-          <a:prstGeom prst="rect">
-            <a:avLst/>
-          </a:prstGeom>
-          <a:noFill/>
-          <a:ln/>
-        </p:spPr>
-        <p:txBody>
-          <a:bodyPr wrap="square" lIns="0" tIns="0" rIns="0" bIns="0" rtlCol="0" anchor="ctr">
-            <a:normAutofit/>
-          </a:bodyPr>
-          <a:lstStyle/>
-          <a:p>
-            <a:pPr algn="ctr" indent="0" marL="0">
-              <a:buNone/>
-            </a:pPr>
-            <a:r>
-              <a:rPr lang="en-US" sz="3600" b="1" dirty="0">
-                <a:solidFill>
-                  <a:srgbClr val="990011"/>
-                </a:solidFill>
-                <a:latin typeface="Times New Roman" pitchFamily="34" charset="0"/>
-                <a:ea typeface="Times New Roman" pitchFamily="34" charset="-122"/>
-                <a:cs typeface="Times New Roman" pitchFamily="34" charset="-120"/>
-              </a:rPr>
-              <a:t>References</a:t>
-            </a:r>
-            <a:endParaRPr lang="en-US" sz="3600" dirty="0"/>
-          </a:p>
-        </p:txBody>
-      </p:sp>
-      <p:sp>
-        <p:nvSpPr>
-          <p:cNvPr id="5" name="Text 2"/>
-          <p:cNvSpPr/>
-          <p:nvPr/>
-        </p:nvSpPr>
-        <p:spPr>
-          <a:xfrm>
-            <a:off x="4069080" y="1783080"/>
-            <a:ext cx="7802575" cy="4663440"/>
-          </a:xfrm>
-          <a:prstGeom prst="rect">
-            <a:avLst/>
-          </a:prstGeom>
-          <a:noFill/>
-          <a:ln/>
-        </p:spPr>
-        <p:txBody>
-          <a:bodyPr wrap="square" lIns="0" tIns="0" rIns="0" bIns="0" rtlCol="0" anchor="t"/>
-          <a:lstStyle/>
-          <a:p>
-            <a:pPr algn="l" marL="342900" indent="-342900">
-              <a:spcAft>
-                <a:spcPts val="800"/>
-              </a:spcAft>
-              <a:buSzPct val="100000"/>
-              <a:buChar char="•"/>
-            </a:pPr>
-            <a:r>
-              <a:rPr lang="en-US" sz="1800" dirty="0">
-                <a:solidFill>
-                  <a:srgbClr val="111111"/>
-                </a:solidFill>
-                <a:latin typeface="Calibri" pitchFamily="34" charset="0"/>
-                <a:ea typeface="Calibri" pitchFamily="34" charset="-122"/>
-                <a:cs typeface="Calibri" pitchFamily="34" charset="-120"/>
-              </a:rPr>
-              <a:t>Geography Syllabus for Sixth Forms (Lower and Upper Sixth), MINESEC, 2019 — Module 1 (Meteorology, Climatology &amp; Hydrology).</a:t>
-            </a:r>
-            <a:endParaRPr lang="en-US" sz="1800" dirty="0"/>
-          </a:p>
-          <a:p>
-            <a:pPr algn="l" marL="342900" indent="-342900">
-              <a:spcAft>
-                <a:spcPts val="800"/>
-              </a:spcAft>
-              <a:buSzPct val="100000"/>
-              <a:buChar char="•"/>
-            </a:pPr>
-            <a:r>
-              <a:rPr lang="en-US" sz="1800" dirty="0">
-                <a:solidFill>
-                  <a:srgbClr val="111111"/>
-                </a:solidFill>
-                <a:latin typeface="Calibri" pitchFamily="34" charset="0"/>
-                <a:ea typeface="Calibri" pitchFamily="34" charset="-122"/>
-                <a:cs typeface="Calibri" pitchFamily="34" charset="-120"/>
-              </a:rPr>
-              <a:t>Teacher's course notes: Mr KAMDEM E., Meteorology (LSA), GBHS Garoua, 2026.</a:t>
-            </a:r>
-            <a:endParaRPr lang="en-US" sz="1800" dirty="0"/>
-          </a:p>
-          <a:p>
-            <a:pPr algn="l" marL="342900" indent="-342900">
-              <a:spcAft>
-                <a:spcPts val="800"/>
-              </a:spcAft>
-              <a:buSzPct val="100000"/>
-              <a:buChar char="•"/>
-            </a:pPr>
-            <a:r>
-              <a:rPr lang="en-US" sz="1800" dirty="0">
-                <a:solidFill>
-                  <a:srgbClr val="111111"/>
-                </a:solidFill>
-                <a:latin typeface="Calibri" pitchFamily="34" charset="0"/>
-                <a:ea typeface="Calibri" pitchFamily="34" charset="-122"/>
-                <a:cs typeface="Calibri" pitchFamily="34" charset="-120"/>
-              </a:rPr>
-              <a:t>Photo, Activity 1: “Sunset Over the Indian Ocean (NASA, International Space Station Scienc” by NASA's Marshall Space Flight Center, CC BY-NC 2.0, via nasa (https://www.flickr.com/photos/28634332@N05/8134997029)</a:t>
-            </a:r>
-            <a:endParaRPr lang="en-US" sz="1800" dirty="0"/>
-          </a:p>
-          <a:p>
-            <a:pPr algn="l" marL="342900" indent="-342900">
-              <a:spcAft>
-                <a:spcPts val="800"/>
-              </a:spcAft>
-              <a:buSzPct val="100000"/>
-              <a:buChar char="•"/>
-            </a:pPr>
-            <a:r>
-              <a:rPr lang="en-US" sz="1800" dirty="0">
-                <a:solidFill>
-                  <a:srgbClr val="111111"/>
-                </a:solidFill>
-                <a:latin typeface="Calibri" pitchFamily="34" charset="0"/>
-                <a:ea typeface="Calibri" pitchFamily="34" charset="-122"/>
-                <a:cs typeface="Calibri" pitchFamily="34" charset="-120"/>
-              </a:rPr>
-              <a:t>Photo, Activity 4: “Sandstorm at Camp Bastion, Afghanistan” by Defence Images, CC BY-NC 2.0, via Flickr (https://www.flickr.com/photos/48399297@N04/10343833885)</a:t>
-            </a:r>
-            <a:endParaRPr lang="en-US" sz="1800" dirty="0"/>
-          </a:p>
-          <a:p>
-            <a:pPr algn="l" marL="342900" indent="-342900">
-              <a:spcAft>
-                <a:spcPts val="800"/>
-              </a:spcAft>
-              <a:buSzPct val="100000"/>
-              <a:buChar char="•"/>
-            </a:pPr>
-            <a:r>
-              <a:rPr lang="en-US" sz="1800" dirty="0">
-                <a:solidFill>
-                  <a:srgbClr val="111111"/>
-                </a:solidFill>
-                <a:latin typeface="Calibri" pitchFamily="34" charset="0"/>
-                <a:ea typeface="Calibri" pitchFamily="34" charset="-122"/>
-                <a:cs typeface="Calibri" pitchFamily="34" charset="-120"/>
-              </a:rPr>
-              <a:t>Photo, Activity 5: “Mist” by Art by MarkAC, CC BY-SA 2.0, via Flickr (https://www.flickr.com/photos/60580775@N08/40783321332)</a:t>
-            </a:r>
-            <a:endParaRPr lang="en-US" sz="1800" dirty="0"/>
-          </a:p>
-          <a:p>
-            <a:pPr algn="l" marL="342900" indent="-342900">
-              <a:spcAft>
-                <a:spcPts val="800"/>
-              </a:spcAft>
-              <a:buSzPct val="100000"/>
-              <a:buChar char="•"/>
-            </a:pPr>
-            <a:r>
-              <a:rPr lang="en-US" sz="1800" dirty="0">
-                <a:solidFill>
-                  <a:srgbClr val="111111"/>
-                </a:solidFill>
-                <a:latin typeface="Calibri" pitchFamily="34" charset="0"/>
-                <a:ea typeface="Calibri" pitchFamily="34" charset="-122"/>
-                <a:cs typeface="Calibri" pitchFamily="34" charset="-120"/>
-              </a:rPr>
-              <a:t>Diagrams and animations: drawn for this lesson (Geography Department).</a:t>
-            </a:r>
-            <a:endParaRPr lang="en-US" sz="1800" dirty="0"/>
-          </a:p>
-        </p:txBody>
-      </p:sp>
-      <p:sp>
-        <p:nvSpPr>
-          <p:cNvPr id="25" name="Slide Number Placeholder 0"/>
-          <p:cNvSpPr>
-            <a:spLocks noGrp="1"/>
-          </p:cNvSpPr>
-          <p:nvPr>
-            <p:ph type="sldNum" sz="quarter" idx="4294967295"/>
-          </p:nvPr>
-        </p:nvSpPr>
-        <p:spPr>
-          <a:xfrm>
-            <a:off x="27432" y="91440"/>
-            <a:ext cx="585216" cy="475488"/>
-          </a:xfrm>
-          <a:prstGeom prst="rect">
-            <a:avLst/>
-          </a:prstGeom>
-          <a:extLst>
-            <a:ext uri="{C572A759-6A51-4108-AA02-DFA0A04FC94B}">
-              <ma14:wrappingTextBoxFlag xmlns:ma14="http://schemas.microsoft.com/office/mac/drawingml/2011/main" val="0"/>
-            </a:ext>
-          </a:extLst>
-        </p:spPr>
-        <p:txBody>
-          <a:bodyPr/>
-          <a:lstStyle>
-            <a:lvl1pPr>
-              <a:defRPr sz="2000">
-                <a:solidFill>
-                  <a:srgbClr val="FFFFFF"/>
-                </a:solidFill>
-                <a:latin typeface="Calibri"/>
-                <a:ea typeface="Calibri"/>
-                <a:cs typeface="Calibri"/>
-              </a:defRPr>
-            </a:lvl1pPr>
-          </a:lstStyle>
-          <a:p>
-            <a:pPr algn="ctr"/>
-            <a:fld id="{F7021451-1387-4CA6-816F-3879F97B5CBC}" type="slidenum">
-              <a:rPr b="1" lang="en-US"/>
               <a:t>59</a:t>
             </a:fld>
             <a:endParaRPr lang="en-US"/>
@@ -23492,6 +23917,677 @@
             <a:fld id="{F7021451-1387-4CA6-816F-3879F97B5CBC}" type="slidenum">
               <a:rPr b="1" lang="en-US"/>
               <a:t>6</a:t>
+            </a:fld>
+            <a:endParaRPr lang="en-US"/>
+          </a:p>
+        </p:txBody>
+      </p:sp>
+    </p:spTree>
+  </p:cSld>
+  <p:clrMapOvr>
+    <a:masterClrMapping/>
+  </p:clrMapOvr>
+</p:sld>
+</file>
+
+<file path=ppt/slides/slide60.xml><?xml version="1.0" encoding="utf-8"?>
+<p:sld xmlns:a="http://schemas.openxmlformats.org/drawingml/2006/main" xmlns:r="http://schemas.openxmlformats.org/officeDocument/2006/relationships" xmlns:p="http://schemas.openxmlformats.org/presentationml/2006/main">
+  <p:cSld name="Slide 60">
+    <p:spTree>
+      <p:nvGrpSpPr>
+        <p:cNvPr id="1" name=""/>
+        <p:cNvGrpSpPr/>
+        <p:nvPr/>
+      </p:nvGrpSpPr>
+      <p:grpSpPr>
+        <a:xfrm>
+          <a:off x="0" y="0"/>
+          <a:ext cx="0" cy="0"/>
+          <a:chOff x="0" y="0"/>
+          <a:chExt cx="0" cy="0"/>
+        </a:xfrm>
+      </p:grpSpPr>
+      <p:sp>
+        <p:nvSpPr>
+          <p:cNvPr id="2" name="Text 0"/>
+          <p:cNvSpPr/>
+          <p:nvPr/>
+        </p:nvSpPr>
+        <p:spPr>
+          <a:xfrm>
+            <a:off x="457200" y="713232"/>
+            <a:ext cx="11368735" cy="274320"/>
+          </a:xfrm>
+          <a:prstGeom prst="rect">
+            <a:avLst/>
+          </a:prstGeom>
+          <a:noFill/>
+          <a:ln/>
+        </p:spPr>
+        <p:txBody>
+          <a:bodyPr wrap="square" lIns="0" tIns="0" rIns="0" bIns="0" rtlCol="0" anchor="ctr"/>
+          <a:lstStyle/>
+          <a:p>
+            <a:pPr algn="r" indent="0" marL="0">
+              <a:buNone/>
+            </a:pPr>
+            <a:r>
+              <a:rPr lang="en-US" sz="1400" b="1" dirty="0">
+                <a:solidFill>
+                  <a:srgbClr val="1C3F6E"/>
+                </a:solidFill>
+                <a:latin typeface="Calibri" pitchFamily="34" charset="0"/>
+                <a:ea typeface="Calibri" pitchFamily="34" charset="-122"/>
+                <a:cs typeface="Calibri" pitchFamily="34" charset="-120"/>
+              </a:rPr>
+              <a:t>TEACHER'S NOTE</a:t>
+            </a:r>
+            <a:endParaRPr lang="en-US" sz="1400" dirty="0"/>
+          </a:p>
+        </p:txBody>
+      </p:sp>
+      <p:pic>
+        <p:nvPicPr>
+          <p:cNvPr id="3" name="Image 0" descr="/home/claude/f4/img/minesec_sheet.png">    </p:cNvPr>
+          <p:cNvPicPr>
+            <a:picLocks noChangeAspect="1"/>
+          </p:cNvPicPr>
+          <p:nvPr/>
+        </p:nvPicPr>
+        <p:blipFill>
+          <a:blip r:embed="rId1"/>
+          <a:stretch>
+            <a:fillRect/>
+          </a:stretch>
+        </p:blipFill>
+        <p:spPr>
+          <a:xfrm>
+            <a:off x="0" y="658368"/>
+            <a:ext cx="3840480" cy="5833872"/>
+          </a:xfrm>
+          <a:prstGeom prst="rect">
+            <a:avLst/>
+          </a:prstGeom>
+        </p:spPr>
+      </p:pic>
+      <p:sp>
+        <p:nvSpPr>
+          <p:cNvPr id="4" name="Text 1"/>
+          <p:cNvSpPr/>
+          <p:nvPr/>
+        </p:nvSpPr>
+        <p:spPr>
+          <a:xfrm>
+            <a:off x="4069080" y="1005840"/>
+            <a:ext cx="7802575" cy="731520"/>
+          </a:xfrm>
+          <a:prstGeom prst="rect">
+            <a:avLst/>
+          </a:prstGeom>
+          <a:noFill/>
+          <a:ln/>
+        </p:spPr>
+        <p:txBody>
+          <a:bodyPr wrap="square" lIns="0" tIns="0" rIns="0" bIns="0" rtlCol="0" anchor="ctr">
+            <a:normAutofit/>
+          </a:bodyPr>
+          <a:lstStyle/>
+          <a:p>
+            <a:pPr algn="ctr" indent="0" marL="0">
+              <a:buNone/>
+            </a:pPr>
+            <a:r>
+              <a:rPr lang="en-US" sz="3600" b="1" dirty="0">
+                <a:solidFill>
+                  <a:srgbClr val="990011"/>
+                </a:solidFill>
+                <a:latin typeface="Times New Roman" pitchFamily="34" charset="0"/>
+                <a:ea typeface="Times New Roman" pitchFamily="34" charset="-122"/>
+                <a:cs typeface="Times New Roman" pitchFamily="34" charset="-120"/>
+              </a:rPr>
+              <a:t>Teacher's Note</a:t>
+            </a:r>
+            <a:endParaRPr lang="en-US" sz="3600" dirty="0"/>
+          </a:p>
+        </p:txBody>
+      </p:sp>
+      <p:sp>
+        <p:nvSpPr>
+          <p:cNvPr id="5" name="Text 2"/>
+          <p:cNvSpPr/>
+          <p:nvPr/>
+        </p:nvSpPr>
+        <p:spPr>
+          <a:xfrm>
+            <a:off x="4069080" y="1783080"/>
+            <a:ext cx="7802575" cy="4663440"/>
+          </a:xfrm>
+          <a:prstGeom prst="rect">
+            <a:avLst/>
+          </a:prstGeom>
+          <a:noFill/>
+          <a:ln/>
+        </p:spPr>
+        <p:txBody>
+          <a:bodyPr wrap="square" lIns="0" tIns="0" rIns="0" bIns="0" rtlCol="0" anchor="t"/>
+          <a:lstStyle/>
+          <a:p>
+            <a:pPr algn="l" marL="342900" indent="-342900">
+              <a:spcAft>
+                <a:spcPts val="800"/>
+              </a:spcAft>
+              <a:buSzPct val="100000"/>
+              <a:buChar char="•"/>
+            </a:pPr>
+            <a:r>
+              <a:rPr lang="en-US" sz="2000" dirty="0">
+                <a:solidFill>
+                  <a:srgbClr val="111111"/>
+                </a:solidFill>
+                <a:latin typeface="Calibri" pitchFamily="34" charset="0"/>
+                <a:ea typeface="Calibri" pitchFamily="34" charset="-122"/>
+                <a:cs typeface="Calibri" pitchFamily="34" charset="-120"/>
+              </a:rPr>
+              <a:t>Timing: Homework correction, plan, objectives 8 min | Recall, situation, action 10 min | 5 activities 30 min | Board summary (copying) 30 min | Evaluation, remediation 10 min | Homework, next lesson 5 min | Logbook 7 min</a:t>
+            </a:r>
+            <a:endParaRPr lang="en-US" sz="2000" dirty="0"/>
+          </a:p>
+          <a:p>
+            <a:pPr algn="l" marL="342900" indent="-342900">
+              <a:spcAft>
+                <a:spcPts val="800"/>
+              </a:spcAft>
+              <a:buSzPct val="100000"/>
+              <a:buChar char="•"/>
+            </a:pPr>
+            <a:r>
+              <a:rPr lang="en-US" sz="2000" dirty="0">
+                <a:solidFill>
+                  <a:srgbClr val="111111"/>
+                </a:solidFill>
+                <a:latin typeface="Calibri" pitchFamily="34" charset="0"/>
+                <a:ea typeface="Calibri" pitchFamily="34" charset="-122"/>
+                <a:cs typeface="Calibri" pitchFamily="34" charset="-120"/>
+              </a:rPr>
+              <a:t>Without the projector (Activity 1): compare the atmosphere to a blanket.</a:t>
+            </a:r>
+            <a:endParaRPr lang="en-US" sz="2000" dirty="0"/>
+          </a:p>
+          <a:p>
+            <a:pPr algn="l" marL="342900" indent="-342900">
+              <a:spcAft>
+                <a:spcPts val="800"/>
+              </a:spcAft>
+              <a:buSzPct val="100000"/>
+              <a:buChar char="•"/>
+            </a:pPr>
+            <a:r>
+              <a:rPr lang="en-US" sz="2000" dirty="0">
+                <a:solidFill>
+                  <a:srgbClr val="111111"/>
+                </a:solidFill>
+                <a:latin typeface="Calibri" pitchFamily="34" charset="0"/>
+                <a:ea typeface="Calibri" pitchFamily="34" charset="-122"/>
+                <a:cs typeface="Calibri" pitchFamily="34" charset="-120"/>
+              </a:rPr>
+              <a:t>Without the projector (Activity 2): draw the pie chart on the board.</a:t>
+            </a:r>
+            <a:endParaRPr lang="en-US" sz="2000" dirty="0"/>
+          </a:p>
+          <a:p>
+            <a:pPr algn="l" marL="342900" indent="-342900">
+              <a:spcAft>
+                <a:spcPts val="800"/>
+              </a:spcAft>
+              <a:buSzPct val="100000"/>
+              <a:buChar char="•"/>
+            </a:pPr>
+            <a:r>
+              <a:rPr lang="en-US" sz="2000" dirty="0">
+                <a:solidFill>
+                  <a:srgbClr val="111111"/>
+                </a:solidFill>
+                <a:latin typeface="Calibri" pitchFamily="34" charset="0"/>
+                <a:ea typeface="Calibri" pitchFamily="34" charset="-122"/>
+                <a:cs typeface="Calibri" pitchFamily="34" charset="-120"/>
+              </a:rPr>
+              <a:t>Without the projector (Activity 3): compare January and August in Garoua.</a:t>
+            </a:r>
+            <a:endParaRPr lang="en-US" sz="2000" dirty="0"/>
+          </a:p>
+          <a:p>
+            <a:pPr algn="l" marL="342900" indent="-342900">
+              <a:spcAft>
+                <a:spcPts val="800"/>
+              </a:spcAft>
+              <a:buSzPct val="100000"/>
+              <a:buChar char="•"/>
+            </a:pPr>
+            <a:r>
+              <a:rPr lang="en-US" sz="2000" dirty="0">
+                <a:solidFill>
+                  <a:srgbClr val="111111"/>
+                </a:solidFill>
+                <a:latin typeface="Calibri" pitchFamily="34" charset="0"/>
+                <a:ea typeface="Calibri" pitchFamily="34" charset="-122"/>
+                <a:cs typeface="Calibri" pitchFamily="34" charset="-120"/>
+              </a:rPr>
+              <a:t>Without the projector (Activity 4): look at dust on a car in January.</a:t>
+            </a:r>
+            <a:endParaRPr lang="en-US" sz="2000" dirty="0"/>
+          </a:p>
+          <a:p>
+            <a:pPr algn="l" marL="342900" indent="-342900">
+              <a:spcAft>
+                <a:spcPts val="800"/>
+              </a:spcAft>
+              <a:buSzPct val="100000"/>
+              <a:buChar char="•"/>
+            </a:pPr>
+            <a:r>
+              <a:rPr lang="en-US" sz="2000" dirty="0">
+                <a:solidFill>
+                  <a:srgbClr val="111111"/>
+                </a:solidFill>
+                <a:latin typeface="Calibri" pitchFamily="34" charset="0"/>
+                <a:ea typeface="Calibri" pitchFamily="34" charset="-122"/>
+                <a:cs typeface="Calibri" pitchFamily="34" charset="-120"/>
+              </a:rPr>
+              <a:t>Without the projector (Activity 5): breathe on a cold glass.</a:t>
+            </a:r>
+            <a:endParaRPr lang="en-US" sz="2000" dirty="0"/>
+          </a:p>
+        </p:txBody>
+      </p:sp>
+      <p:sp>
+        <p:nvSpPr>
+          <p:cNvPr id="25" name="Slide Number Placeholder 0"/>
+          <p:cNvSpPr>
+            <a:spLocks noGrp="1"/>
+          </p:cNvSpPr>
+          <p:nvPr>
+            <p:ph type="sldNum" sz="quarter" idx="4294967295"/>
+          </p:nvPr>
+        </p:nvSpPr>
+        <p:spPr>
+          <a:xfrm>
+            <a:off x="27432" y="91440"/>
+            <a:ext cx="585216" cy="475488"/>
+          </a:xfrm>
+          <a:prstGeom prst="rect">
+            <a:avLst/>
+          </a:prstGeom>
+          <a:extLst>
+            <a:ext uri="{C572A759-6A51-4108-AA02-DFA0A04FC94B}">
+              <ma14:wrappingTextBoxFlag xmlns:ma14="http://schemas.microsoft.com/office/mac/drawingml/2011/main" val="0"/>
+            </a:ext>
+          </a:extLst>
+        </p:spPr>
+        <p:txBody>
+          <a:bodyPr/>
+          <a:lstStyle>
+            <a:lvl1pPr>
+              <a:defRPr sz="2000">
+                <a:solidFill>
+                  <a:srgbClr val="FFFFFF"/>
+                </a:solidFill>
+                <a:latin typeface="Calibri"/>
+                <a:ea typeface="Calibri"/>
+                <a:cs typeface="Calibri"/>
+              </a:defRPr>
+            </a:lvl1pPr>
+          </a:lstStyle>
+          <a:p>
+            <a:pPr algn="ctr"/>
+            <a:fld id="{F7021451-1387-4CA6-816F-3879F97B5CBC}" type="slidenum">
+              <a:rPr b="1" lang="en-US"/>
+              <a:t>60</a:t>
+            </a:fld>
+            <a:endParaRPr lang="en-US"/>
+          </a:p>
+        </p:txBody>
+      </p:sp>
+    </p:spTree>
+  </p:cSld>
+  <p:clrMapOvr>
+    <a:masterClrMapping/>
+  </p:clrMapOvr>
+</p:sld>
+</file>
+
+<file path=ppt/slides/slide61.xml><?xml version="1.0" encoding="utf-8"?>
+<p:sld xmlns:a="http://schemas.openxmlformats.org/drawingml/2006/main" xmlns:r="http://schemas.openxmlformats.org/officeDocument/2006/relationships" xmlns:p="http://schemas.openxmlformats.org/presentationml/2006/main">
+  <p:cSld name="Slide 61">
+    <p:spTree>
+      <p:nvGrpSpPr>
+        <p:cNvPr id="1" name=""/>
+        <p:cNvGrpSpPr/>
+        <p:nvPr/>
+      </p:nvGrpSpPr>
+      <p:grpSpPr>
+        <a:xfrm>
+          <a:off x="0" y="0"/>
+          <a:ext cx="0" cy="0"/>
+          <a:chOff x="0" y="0"/>
+          <a:chExt cx="0" cy="0"/>
+        </a:xfrm>
+      </p:grpSpPr>
+      <p:sp>
+        <p:nvSpPr>
+          <p:cNvPr id="2" name="Text 0"/>
+          <p:cNvSpPr/>
+          <p:nvPr/>
+        </p:nvSpPr>
+        <p:spPr>
+          <a:xfrm>
+            <a:off x="457200" y="713232"/>
+            <a:ext cx="11368735" cy="274320"/>
+          </a:xfrm>
+          <a:prstGeom prst="rect">
+            <a:avLst/>
+          </a:prstGeom>
+          <a:noFill/>
+          <a:ln/>
+        </p:spPr>
+        <p:txBody>
+          <a:bodyPr wrap="square" lIns="0" tIns="0" rIns="0" bIns="0" rtlCol="0" anchor="ctr"/>
+          <a:lstStyle/>
+          <a:p>
+            <a:pPr algn="r" indent="0" marL="0">
+              <a:buNone/>
+            </a:pPr>
+            <a:r>
+              <a:rPr lang="en-US" sz="1400" b="1" dirty="0">
+                <a:solidFill>
+                  <a:srgbClr val="1C3F6E"/>
+                </a:solidFill>
+                <a:latin typeface="Calibri" pitchFamily="34" charset="0"/>
+                <a:ea typeface="Calibri" pitchFamily="34" charset="-122"/>
+                <a:cs typeface="Calibri" pitchFamily="34" charset="-120"/>
+              </a:rPr>
+              <a:t>REFERENCES</a:t>
+            </a:r>
+            <a:endParaRPr lang="en-US" sz="1400" dirty="0"/>
+          </a:p>
+        </p:txBody>
+      </p:sp>
+      <p:pic>
+        <p:nvPicPr>
+          <p:cNvPr id="3" name="Image 0" descr="/home/claude/f4/img/minesec_sheet.png">    </p:cNvPr>
+          <p:cNvPicPr>
+            <a:picLocks noChangeAspect="1"/>
+          </p:cNvPicPr>
+          <p:nvPr/>
+        </p:nvPicPr>
+        <p:blipFill>
+          <a:blip r:embed="rId1"/>
+          <a:stretch>
+            <a:fillRect/>
+          </a:stretch>
+        </p:blipFill>
+        <p:spPr>
+          <a:xfrm>
+            <a:off x="0" y="658368"/>
+            <a:ext cx="2468880" cy="5833872"/>
+          </a:xfrm>
+          <a:prstGeom prst="rect">
+            <a:avLst/>
+          </a:prstGeom>
+        </p:spPr>
+      </p:pic>
+      <p:sp>
+        <p:nvSpPr>
+          <p:cNvPr id="4" name="Text 1"/>
+          <p:cNvSpPr/>
+          <p:nvPr/>
+        </p:nvSpPr>
+        <p:spPr>
+          <a:xfrm>
+            <a:off x="2697480" y="1005840"/>
+            <a:ext cx="9174175" cy="731520"/>
+          </a:xfrm>
+          <a:prstGeom prst="rect">
+            <a:avLst/>
+          </a:prstGeom>
+          <a:noFill/>
+          <a:ln/>
+        </p:spPr>
+        <p:txBody>
+          <a:bodyPr wrap="square" lIns="0" tIns="0" rIns="0" bIns="0" rtlCol="0" anchor="ctr">
+            <a:normAutofit/>
+          </a:bodyPr>
+          <a:lstStyle/>
+          <a:p>
+            <a:pPr algn="ctr" indent="0" marL="0">
+              <a:buNone/>
+            </a:pPr>
+            <a:r>
+              <a:rPr lang="en-US" sz="3600" b="1" dirty="0">
+                <a:solidFill>
+                  <a:srgbClr val="990011"/>
+                </a:solidFill>
+                <a:latin typeface="Times New Roman" pitchFamily="34" charset="0"/>
+                <a:ea typeface="Times New Roman" pitchFamily="34" charset="-122"/>
+                <a:cs typeface="Times New Roman" pitchFamily="34" charset="-120"/>
+              </a:rPr>
+              <a:t>References</a:t>
+            </a:r>
+            <a:endParaRPr lang="en-US" sz="3600" dirty="0"/>
+          </a:p>
+        </p:txBody>
+      </p:sp>
+      <p:sp>
+        <p:nvSpPr>
+          <p:cNvPr id="5" name="Text 2"/>
+          <p:cNvSpPr/>
+          <p:nvPr/>
+        </p:nvSpPr>
+        <p:spPr>
+          <a:xfrm>
+            <a:off x="2697480" y="1783080"/>
+            <a:ext cx="9174175" cy="4663440"/>
+          </a:xfrm>
+          <a:prstGeom prst="rect">
+            <a:avLst/>
+          </a:prstGeom>
+          <a:noFill/>
+          <a:ln/>
+        </p:spPr>
+        <p:txBody>
+          <a:bodyPr wrap="square" lIns="0" tIns="0" rIns="0" bIns="0" rtlCol="0" anchor="t"/>
+          <a:lstStyle/>
+          <a:p>
+            <a:pPr algn="l" marL="342900" indent="-342900">
+              <a:spcAft>
+                <a:spcPts val="800"/>
+              </a:spcAft>
+              <a:buSzPct val="100000"/>
+              <a:buChar char="•"/>
+            </a:pPr>
+            <a:r>
+              <a:rPr lang="en-US" sz="1800" dirty="0">
+                <a:solidFill>
+                  <a:srgbClr val="111111"/>
+                </a:solidFill>
+                <a:latin typeface="Calibri" pitchFamily="34" charset="0"/>
+                <a:ea typeface="Calibri" pitchFamily="34" charset="-122"/>
+                <a:cs typeface="Calibri" pitchFamily="34" charset="-120"/>
+              </a:rPr>
+              <a:t>Geography Syllabus for Sixth Forms (Lower and Upper Sixth), MINESEC, 2019 — Module 1 (Meteorology, Climatology &amp; Hydrology).</a:t>
+            </a:r>
+            <a:endParaRPr lang="en-US" sz="1800" dirty="0"/>
+          </a:p>
+          <a:p>
+            <a:pPr algn="l" marL="342900" indent="-342900">
+              <a:spcAft>
+                <a:spcPts val="800"/>
+              </a:spcAft>
+              <a:buSzPct val="100000"/>
+              <a:buChar char="•"/>
+            </a:pPr>
+            <a:r>
+              <a:rPr lang="en-US" sz="1800" dirty="0">
+                <a:solidFill>
+                  <a:srgbClr val="111111"/>
+                </a:solidFill>
+                <a:latin typeface="Calibri" pitchFamily="34" charset="0"/>
+                <a:ea typeface="Calibri" pitchFamily="34" charset="-122"/>
+                <a:cs typeface="Calibri" pitchFamily="34" charset="-120"/>
+              </a:rPr>
+              <a:t>Teacher's course notes: Mr KAMDEM E., Meteorology (LSA), GBHS Garoua, 2026.</a:t>
+            </a:r>
+            <a:endParaRPr lang="en-US" sz="1800" dirty="0"/>
+          </a:p>
+          <a:p>
+            <a:pPr algn="l" marL="342900" indent="-342900">
+              <a:spcAft>
+                <a:spcPts val="800"/>
+              </a:spcAft>
+              <a:buSzPct val="100000"/>
+              <a:buChar char="•"/>
+            </a:pPr>
+            <a:r>
+              <a:rPr lang="en-US" sz="1800" dirty="0">
+                <a:solidFill>
+                  <a:srgbClr val="111111"/>
+                </a:solidFill>
+                <a:latin typeface="Calibri" pitchFamily="34" charset="0"/>
+                <a:ea typeface="Calibri" pitchFamily="34" charset="-122"/>
+                <a:cs typeface="Calibri" pitchFamily="34" charset="-120"/>
+              </a:rPr>
+              <a:t>Photo, Activity 1: “Sunset Over the Indian Ocean (NASA, International Space Station Scienc” by NASA's Marshall Space Flight Center, CC BY-NC 2.0, via nasa (https://www.flickr.com/photos/28634332@N05/8134997029)</a:t>
+            </a:r>
+            <a:endParaRPr lang="en-US" sz="1800" dirty="0"/>
+          </a:p>
+          <a:p>
+            <a:pPr algn="l" marL="342900" indent="-342900">
+              <a:spcAft>
+                <a:spcPts val="800"/>
+              </a:spcAft>
+              <a:buSzPct val="100000"/>
+              <a:buChar char="•"/>
+            </a:pPr>
+            <a:r>
+              <a:rPr lang="en-US" sz="1800" dirty="0">
+                <a:solidFill>
+                  <a:srgbClr val="111111"/>
+                </a:solidFill>
+                <a:latin typeface="Calibri" pitchFamily="34" charset="0"/>
+                <a:ea typeface="Calibri" pitchFamily="34" charset="-122"/>
+                <a:cs typeface="Calibri" pitchFamily="34" charset="-120"/>
+              </a:rPr>
+              <a:t>Photo, Activity 4: “Sandstorm at Camp Bastion, Afghanistan” by Defence Images, CC BY-NC 2.0, via Flickr (https://www.flickr.com/photos/48399297@N04/10343833885)</a:t>
+            </a:r>
+            <a:endParaRPr lang="en-US" sz="1800" dirty="0"/>
+          </a:p>
+          <a:p>
+            <a:pPr algn="l" marL="342900" indent="-342900">
+              <a:spcAft>
+                <a:spcPts val="800"/>
+              </a:spcAft>
+              <a:buSzPct val="100000"/>
+              <a:buChar char="•"/>
+            </a:pPr>
+            <a:r>
+              <a:rPr lang="en-US" sz="1800" dirty="0">
+                <a:solidFill>
+                  <a:srgbClr val="111111"/>
+                </a:solidFill>
+                <a:latin typeface="Calibri" pitchFamily="34" charset="0"/>
+                <a:ea typeface="Calibri" pitchFamily="34" charset="-122"/>
+                <a:cs typeface="Calibri" pitchFamily="34" charset="-120"/>
+              </a:rPr>
+              <a:t>Photo, Activity 5: “Mist” by Art by MarkAC, CC BY-SA 2.0, via Flickr (https://www.flickr.com/photos/60580775@N08/40783321332)</a:t>
+            </a:r>
+            <a:endParaRPr lang="en-US" sz="1800" dirty="0"/>
+          </a:p>
+          <a:p>
+            <a:pPr algn="l" marL="342900" indent="-342900">
+              <a:spcAft>
+                <a:spcPts val="800"/>
+              </a:spcAft>
+              <a:buSzPct val="100000"/>
+              <a:buChar char="•"/>
+            </a:pPr>
+            <a:r>
+              <a:rPr lang="en-US" sz="1800" dirty="0">
+                <a:solidFill>
+                  <a:srgbClr val="111111"/>
+                </a:solidFill>
+                <a:latin typeface="Calibri" pitchFamily="34" charset="0"/>
+                <a:ea typeface="Calibri" pitchFamily="34" charset="-122"/>
+                <a:cs typeface="Calibri" pitchFamily="34" charset="-120"/>
+              </a:rPr>
+              <a:t>Photo, board summary (Smoke, soot and ash): “Forest Fires in Greece” by Lotus R, CC BY-SA 2.0, via Flickr (https://www.flickr.com/photos/66012345@N00/964251167)</a:t>
+            </a:r>
+            <a:endParaRPr lang="en-US" sz="1800" dirty="0"/>
+          </a:p>
+          <a:p>
+            <a:pPr algn="l" marL="342900" indent="-342900">
+              <a:spcAft>
+                <a:spcPts val="800"/>
+              </a:spcAft>
+              <a:buSzPct val="100000"/>
+              <a:buChar char="•"/>
+            </a:pPr>
+            <a:r>
+              <a:rPr lang="en-US" sz="1800" dirty="0">
+                <a:solidFill>
+                  <a:srgbClr val="111111"/>
+                </a:solidFill>
+                <a:latin typeface="Calibri" pitchFamily="34" charset="0"/>
+                <a:ea typeface="Calibri" pitchFamily="34" charset="-122"/>
+                <a:cs typeface="Calibri" pitchFamily="34" charset="-120"/>
+              </a:rPr>
+              <a:t>Diagrams and animations: drawn for this lesson (Geography Department).</a:t>
+            </a:r>
+            <a:endParaRPr lang="en-US" sz="1800" dirty="0"/>
+          </a:p>
+        </p:txBody>
+      </p:sp>
+      <p:sp>
+        <p:nvSpPr>
+          <p:cNvPr id="25" name="Slide Number Placeholder 0"/>
+          <p:cNvSpPr>
+            <a:spLocks noGrp="1"/>
+          </p:cNvSpPr>
+          <p:nvPr>
+            <p:ph type="sldNum" sz="quarter" idx="4294967295"/>
+          </p:nvPr>
+        </p:nvSpPr>
+        <p:spPr>
+          <a:xfrm>
+            <a:off x="27432" y="91440"/>
+            <a:ext cx="585216" cy="475488"/>
+          </a:xfrm>
+          <a:prstGeom prst="rect">
+            <a:avLst/>
+          </a:prstGeom>
+          <a:extLst>
+            <a:ext uri="{C572A759-6A51-4108-AA02-DFA0A04FC94B}">
+              <ma14:wrappingTextBoxFlag xmlns:ma14="http://schemas.microsoft.com/office/mac/drawingml/2011/main" val="0"/>
+            </a:ext>
+          </a:extLst>
+        </p:spPr>
+        <p:txBody>
+          <a:bodyPr/>
+          <a:lstStyle>
+            <a:lvl1pPr>
+              <a:defRPr sz="2000">
+                <a:solidFill>
+                  <a:srgbClr val="FFFFFF"/>
+                </a:solidFill>
+                <a:latin typeface="Calibri"/>
+                <a:ea typeface="Calibri"/>
+                <a:cs typeface="Calibri"/>
+              </a:defRPr>
+            </a:lvl1pPr>
+          </a:lstStyle>
+          <a:p>
+            <a:pPr algn="ctr"/>
+            <a:fld id="{F7021451-1387-4CA6-816F-3879F97B5CBC}" type="slidenum">
+              <a:rPr b="1" lang="en-US"/>
+              <a:t>61</a:t>
             </a:fld>
             <a:endParaRPr lang="en-US"/>
           </a:p>
